--- a/states/md/_assets/md-presentation-template.pptx
+++ b/states/md/_assets/md-presentation-template.pptx
@@ -1,16 +1,33 @@
 
 <file path=ppt/presentation.xml><?xml version="1.0" encoding="utf-8"?>
-<p:presentation xmlns:a="http://schemas.openxmlformats.org/drawingml/2006/main" xmlns:r="http://schemas.openxmlformats.org/officeDocument/2006/relationships" xmlns:p="http://schemas.openxmlformats.org/presentationml/2006/main" saveSubsetFonts="1" autoCompressPictures="0">
+<p:presentation xmlns:a="http://schemas.openxmlformats.org/drawingml/2006/main" xmlns:r="http://schemas.openxmlformats.org/officeDocument/2006/relationships" xmlns:p="http://schemas.openxmlformats.org/presentationml/2006/main" saveSubsetFonts="1">
   <p:sldMasterIdLst>
-    <p:sldMasterId id="2147483648" r:id="rId1"/>
+    <p:sldMasterId id="2147483677" r:id="rId1"/>
   </p:sldMasterIdLst>
-  <p:sldSz cx="12191695" cy="6858000" type="screen4x3"/>
+  <p:sldIdLst>
+    <p:sldId id="256" r:id="rId6"/>
+    <p:sldId id="257" r:id="rId7"/>
+    <p:sldId id="258" r:id="rId8"/>
+    <p:sldId id="259" r:id="rId9"/>
+    <p:sldId id="260" r:id="rId10"/>
+    <p:sldId id="261" r:id="rId11"/>
+    <p:sldId id="262" r:id="rId12"/>
+    <p:sldId id="263" r:id="rId13"/>
+    <p:sldId id="264" r:id="rId14"/>
+    <p:sldId id="265" r:id="rId15"/>
+    <p:sldId id="266" r:id="rId16"/>
+    <p:sldId id="267" r:id="rId17"/>
+    <p:sldId id="268" r:id="rId18"/>
+    <p:sldId id="269" r:id="rId19"/>
+    <p:sldId id="270" r:id="rId20"/>
+  </p:sldIdLst>
+  <p:sldSz cx="12192000" cy="6858000"/>
   <p:notesSz cx="6858000" cy="9144000"/>
   <p:defaultTextStyle>
     <a:defPPr>
       <a:defRPr lang="en-US"/>
     </a:defPPr>
-    <a:lvl1pPr marL="0" algn="l" defTabSz="457200" rtl="0" eaLnBrk="1" latinLnBrk="0" hangingPunct="1">
+    <a:lvl1pPr marL="0" algn="l" defTabSz="914400" rtl="0" eaLnBrk="1" latinLnBrk="0" hangingPunct="1">
       <a:defRPr sz="1800" kern="1200">
         <a:solidFill>
           <a:schemeClr val="tx1"/>
@@ -20,7 +37,7 @@
         <a:cs typeface="+mn-cs"/>
       </a:defRPr>
     </a:lvl1pPr>
-    <a:lvl2pPr marL="457200" algn="l" defTabSz="457200" rtl="0" eaLnBrk="1" latinLnBrk="0" hangingPunct="1">
+    <a:lvl2pPr marL="457200" algn="l" defTabSz="914400" rtl="0" eaLnBrk="1" latinLnBrk="0" hangingPunct="1">
       <a:defRPr sz="1800" kern="1200">
         <a:solidFill>
           <a:schemeClr val="tx1"/>
@@ -30,7 +47,7 @@
         <a:cs typeface="+mn-cs"/>
       </a:defRPr>
     </a:lvl2pPr>
-    <a:lvl3pPr marL="914400" algn="l" defTabSz="457200" rtl="0" eaLnBrk="1" latinLnBrk="0" hangingPunct="1">
+    <a:lvl3pPr marL="914400" algn="l" defTabSz="914400" rtl="0" eaLnBrk="1" latinLnBrk="0" hangingPunct="1">
       <a:defRPr sz="1800" kern="1200">
         <a:solidFill>
           <a:schemeClr val="tx1"/>
@@ -40,7 +57,7 @@
         <a:cs typeface="+mn-cs"/>
       </a:defRPr>
     </a:lvl3pPr>
-    <a:lvl4pPr marL="1371600" algn="l" defTabSz="457200" rtl="0" eaLnBrk="1" latinLnBrk="0" hangingPunct="1">
+    <a:lvl4pPr marL="1371600" algn="l" defTabSz="914400" rtl="0" eaLnBrk="1" latinLnBrk="0" hangingPunct="1">
       <a:defRPr sz="1800" kern="1200">
         <a:solidFill>
           <a:schemeClr val="tx1"/>
@@ -50,7 +67,7 @@
         <a:cs typeface="+mn-cs"/>
       </a:defRPr>
     </a:lvl4pPr>
-    <a:lvl5pPr marL="1828800" algn="l" defTabSz="457200" rtl="0" eaLnBrk="1" latinLnBrk="0" hangingPunct="1">
+    <a:lvl5pPr marL="1828800" algn="l" defTabSz="914400" rtl="0" eaLnBrk="1" latinLnBrk="0" hangingPunct="1">
       <a:defRPr sz="1800" kern="1200">
         <a:solidFill>
           <a:schemeClr val="tx1"/>
@@ -60,7 +77,7 @@
         <a:cs typeface="+mn-cs"/>
       </a:defRPr>
     </a:lvl5pPr>
-    <a:lvl6pPr marL="2286000" algn="l" defTabSz="457200" rtl="0" eaLnBrk="1" latinLnBrk="0" hangingPunct="1">
+    <a:lvl6pPr marL="2286000" algn="l" defTabSz="914400" rtl="0" eaLnBrk="1" latinLnBrk="0" hangingPunct="1">
       <a:defRPr sz="1800" kern="1200">
         <a:solidFill>
           <a:schemeClr val="tx1"/>
@@ -70,7 +87,7 @@
         <a:cs typeface="+mn-cs"/>
       </a:defRPr>
     </a:lvl6pPr>
-    <a:lvl7pPr marL="2743200" algn="l" defTabSz="457200" rtl="0" eaLnBrk="1" latinLnBrk="0" hangingPunct="1">
+    <a:lvl7pPr marL="2743200" algn="l" defTabSz="914400" rtl="0" eaLnBrk="1" latinLnBrk="0" hangingPunct="1">
       <a:defRPr sz="1800" kern="1200">
         <a:solidFill>
           <a:schemeClr val="tx1"/>
@@ -80,7 +97,7 @@
         <a:cs typeface="+mn-cs"/>
       </a:defRPr>
     </a:lvl7pPr>
-    <a:lvl8pPr marL="3200400" algn="l" defTabSz="457200" rtl="0" eaLnBrk="1" latinLnBrk="0" hangingPunct="1">
+    <a:lvl8pPr marL="3200400" algn="l" defTabSz="914400" rtl="0" eaLnBrk="1" latinLnBrk="0" hangingPunct="1">
       <a:defRPr sz="1800" kern="1200">
         <a:solidFill>
           <a:schemeClr val="tx1"/>
@@ -90,7 +107,7 @@
         <a:cs typeface="+mn-cs"/>
       </a:defRPr>
     </a:lvl8pPr>
-    <a:lvl9pPr marL="3657600" algn="l" defTabSz="457200" rtl="0" eaLnBrk="1" latinLnBrk="0" hangingPunct="1">
+    <a:lvl9pPr marL="3657600" algn="l" defTabSz="914400" rtl="0" eaLnBrk="1" latinLnBrk="0" hangingPunct="1">
       <a:defRPr sz="1800" kern="1200">
         <a:solidFill>
           <a:schemeClr val="tx1"/>
@@ -101,6 +118,11 @@
       </a:defRPr>
     </a:lvl9pPr>
   </p:defaultTextStyle>
+  <p:extLst>
+    <p:ext uri="{EFAFB233-063F-42B5-8137-9DF3F51BA10A}">
+      <p15:sldGuideLst xmlns:p15="http://schemas.microsoft.com/office/powerpoint/2012/main"/>
+    </p:ext>
+  </p:extLst>
 </p:presentation>
 </file>
 
@@ -123,7 +145,13 @@
       </p:grpSpPr>
       <p:sp>
         <p:nvSpPr>
-          <p:cNvPr id="2" name="Title 1"/>
+          <p:cNvPr id="2" name="Title 1">
+            <a:extLst>
+              <a:ext uri="{FF2B5EF4-FFF2-40B4-BE49-F238E27FC236}">
+                <a16:creationId xmlns:a16="http://schemas.microsoft.com/office/drawing/2014/main" id="{40F0A02D-7834-09AE-FA6F-9624A30BE8D1}"/>
+              </a:ext>
+            </a:extLst>
+          </p:cNvPr>
           <p:cNvSpPr>
             <a:spLocks noGrp="1"/>
           </p:cNvSpPr>
@@ -133,25 +161,34 @@
         </p:nvSpPr>
         <p:spPr>
           <a:xfrm>
-            <a:off x="685800" y="2130425"/>
-            <a:ext cx="7772400" cy="1470025"/>
-          </a:xfrm>
-        </p:spPr>
-        <p:txBody>
-          <a:bodyPr/>
-          <a:lstStyle/>
-          <a:p>
-            <a:r>
-              <a:rPr lang="en-US" smtClean="0"/>
+            <a:off x="1524000" y="1122363"/>
+            <a:ext cx="9144000" cy="2387600"/>
+          </a:xfrm>
+        </p:spPr>
+        <p:txBody>
+          <a:bodyPr anchor="b"/>
+          <a:lstStyle>
+            <a:lvl1pPr algn="ctr">
+              <a:defRPr sz="6000"/>
+            </a:lvl1pPr>
+          </a:lstStyle>
+          <a:p>
+            <a:r>
+              <a:rPr lang="en-US"/>
               <a:t>Click to edit Master title style</a:t>
             </a:r>
-            <a:endParaRPr lang="en-US"/>
-          </a:p>
-        </p:txBody>
-      </p:sp>
-      <p:sp>
-        <p:nvSpPr>
-          <p:cNvPr id="3" name="Subtitle 2"/>
+          </a:p>
+        </p:txBody>
+      </p:sp>
+      <p:sp>
+        <p:nvSpPr>
+          <p:cNvPr id="3" name="Subtitle 2">
+            <a:extLst>
+              <a:ext uri="{FF2B5EF4-FFF2-40B4-BE49-F238E27FC236}">
+                <a16:creationId xmlns:a16="http://schemas.microsoft.com/office/drawing/2014/main" id="{15B5DC0B-10A6-5E75-162A-631857EF8D61}"/>
+              </a:ext>
+            </a:extLst>
+          </p:cNvPr>
           <p:cNvSpPr>
             <a:spLocks noGrp="1"/>
           </p:cNvSpPr>
@@ -161,8 +198,8 @@
         </p:nvSpPr>
         <p:spPr>
           <a:xfrm>
-            <a:off x="1371600" y="3886200"/>
-            <a:ext cx="6400800" cy="1752600"/>
+            <a:off x="1524000" y="3602038"/>
+            <a:ext cx="9144000" cy="1655762"/>
           </a:xfrm>
         </p:spPr>
         <p:txBody>
@@ -170,122 +207,73 @@
           <a:lstStyle>
             <a:lvl1pPr marL="0" indent="0" algn="ctr">
               <a:buNone/>
-              <a:defRPr>
-                <a:solidFill>
-                  <a:schemeClr val="tx1">
-                    <a:tint val="75000"/>
-                  </a:schemeClr>
-                </a:solidFill>
-              </a:defRPr>
+              <a:defRPr sz="2400"/>
             </a:lvl1pPr>
             <a:lvl2pPr marL="457200" indent="0" algn="ctr">
               <a:buNone/>
-              <a:defRPr>
-                <a:solidFill>
-                  <a:schemeClr val="tx1">
-                    <a:tint val="75000"/>
-                  </a:schemeClr>
-                </a:solidFill>
-              </a:defRPr>
+              <a:defRPr sz="2000"/>
             </a:lvl2pPr>
             <a:lvl3pPr marL="914400" indent="0" algn="ctr">
               <a:buNone/>
-              <a:defRPr>
-                <a:solidFill>
-                  <a:schemeClr val="tx1">
-                    <a:tint val="75000"/>
-                  </a:schemeClr>
-                </a:solidFill>
-              </a:defRPr>
+              <a:defRPr sz="1800"/>
             </a:lvl3pPr>
             <a:lvl4pPr marL="1371600" indent="0" algn="ctr">
               <a:buNone/>
-              <a:defRPr>
-                <a:solidFill>
-                  <a:schemeClr val="tx1">
-                    <a:tint val="75000"/>
-                  </a:schemeClr>
-                </a:solidFill>
-              </a:defRPr>
+              <a:defRPr sz="1600"/>
             </a:lvl4pPr>
             <a:lvl5pPr marL="1828800" indent="0" algn="ctr">
               <a:buNone/>
-              <a:defRPr>
-                <a:solidFill>
-                  <a:schemeClr val="tx1">
-                    <a:tint val="75000"/>
-                  </a:schemeClr>
-                </a:solidFill>
-              </a:defRPr>
+              <a:defRPr sz="1600"/>
             </a:lvl5pPr>
             <a:lvl6pPr marL="2286000" indent="0" algn="ctr">
               <a:buNone/>
-              <a:defRPr>
-                <a:solidFill>
-                  <a:schemeClr val="tx1">
-                    <a:tint val="75000"/>
-                  </a:schemeClr>
-                </a:solidFill>
-              </a:defRPr>
+              <a:defRPr sz="1600"/>
             </a:lvl6pPr>
             <a:lvl7pPr marL="2743200" indent="0" algn="ctr">
               <a:buNone/>
-              <a:defRPr>
-                <a:solidFill>
-                  <a:schemeClr val="tx1">
-                    <a:tint val="75000"/>
-                  </a:schemeClr>
-                </a:solidFill>
-              </a:defRPr>
+              <a:defRPr sz="1600"/>
             </a:lvl7pPr>
             <a:lvl8pPr marL="3200400" indent="0" algn="ctr">
               <a:buNone/>
-              <a:defRPr>
-                <a:solidFill>
-                  <a:schemeClr val="tx1">
-                    <a:tint val="75000"/>
-                  </a:schemeClr>
-                </a:solidFill>
-              </a:defRPr>
+              <a:defRPr sz="1600"/>
             </a:lvl8pPr>
             <a:lvl9pPr marL="3657600" indent="0" algn="ctr">
               <a:buNone/>
-              <a:defRPr>
-                <a:solidFill>
-                  <a:schemeClr val="tx1">
-                    <a:tint val="75000"/>
-                  </a:schemeClr>
-                </a:solidFill>
-              </a:defRPr>
+              <a:defRPr sz="1600"/>
             </a:lvl9pPr>
           </a:lstStyle>
           <a:p>
             <a:r>
+              <a:rPr lang="en-US"/>
+              <a:t>Click to edit Master subtitle style</a:t>
+            </a:r>
+          </a:p>
+        </p:txBody>
+      </p:sp>
+      <p:sp>
+        <p:nvSpPr>
+          <p:cNvPr id="4" name="Date Placeholder 3">
+            <a:extLst>
+              <a:ext uri="{FF2B5EF4-FFF2-40B4-BE49-F238E27FC236}">
+                <a16:creationId xmlns:a16="http://schemas.microsoft.com/office/drawing/2014/main" id="{9EA6953E-89AF-4819-1938-FF52D0BA77DA}"/>
+              </a:ext>
+            </a:extLst>
+          </p:cNvPr>
+          <p:cNvSpPr>
+            <a:spLocks noGrp="1"/>
+          </p:cNvSpPr>
+          <p:nvPr>
+            <p:ph type="dt" sz="half" idx="10"/>
+          </p:nvPr>
+        </p:nvSpPr>
+        <p:spPr/>
+        <p:txBody>
+          <a:bodyPr/>
+          <a:lstStyle/>
+          <a:p>
+            <a:fld id="{FCBA1D2B-2537-4D61-9387-23A02DC35F45}" type="datetimeFigureOut">
               <a:rPr lang="en-US" smtClean="0"/>
-              <a:t>Click to edit Master subtitle style</a:t>
-            </a:r>
-            <a:endParaRPr lang="en-US"/>
-          </a:p>
-        </p:txBody>
-      </p:sp>
-      <p:sp>
-        <p:nvSpPr>
-          <p:cNvPr id="4" name="Date Placeholder 3"/>
-          <p:cNvSpPr>
-            <a:spLocks noGrp="1"/>
-          </p:cNvSpPr>
-          <p:nvPr>
-            <p:ph type="dt" sz="half" idx="10"/>
-          </p:nvPr>
-        </p:nvSpPr>
-        <p:spPr/>
-        <p:txBody>
-          <a:bodyPr/>
-          <a:lstStyle/>
-          <a:p>
-            <a:fld id="{5BCAD085-E8A6-8845-BD4E-CB4CCA059FC4}" type="datetimeFigureOut">
-              <a:rPr lang="en-US" smtClean="0"/>
-              <a:t>1/27/13</a:t>
+              <a:t>2/12/2026</a:t>
             </a:fld>
             <a:endParaRPr lang="en-US"/>
           </a:p>
@@ -293,7 +281,13 @@
       </p:sp>
       <p:sp>
         <p:nvSpPr>
-          <p:cNvPr id="5" name="Footer Placeholder 4"/>
+          <p:cNvPr id="5" name="Footer Placeholder 4">
+            <a:extLst>
+              <a:ext uri="{FF2B5EF4-FFF2-40B4-BE49-F238E27FC236}">
+                <a16:creationId xmlns:a16="http://schemas.microsoft.com/office/drawing/2014/main" id="{A19CF29B-D43C-5A5B-6E0B-ED9A6D2C678C}"/>
+              </a:ext>
+            </a:extLst>
+          </p:cNvPr>
           <p:cNvSpPr>
             <a:spLocks noGrp="1"/>
           </p:cNvSpPr>
@@ -312,7 +306,13 @@
       </p:sp>
       <p:sp>
         <p:nvSpPr>
-          <p:cNvPr id="6" name="Slide Number Placeholder 5"/>
+          <p:cNvPr id="6" name="Slide Number Placeholder 5">
+            <a:extLst>
+              <a:ext uri="{FF2B5EF4-FFF2-40B4-BE49-F238E27FC236}">
+                <a16:creationId xmlns:a16="http://schemas.microsoft.com/office/drawing/2014/main" id="{5997FFED-642F-DB92-DCD4-F456116AE11B}"/>
+              </a:ext>
+            </a:extLst>
+          </p:cNvPr>
           <p:cNvSpPr>
             <a:spLocks noGrp="1"/>
           </p:cNvSpPr>
@@ -325,7 +325,7 @@
           <a:bodyPr/>
           <a:lstStyle/>
           <a:p>
-            <a:fld id="{C1FF6DA9-008F-8B48-92A6-B652298478BF}" type="slidenum">
+            <a:fld id="{1F6C2334-BDD3-4B5A-BFA7-22F489CFAFEA}" type="slidenum">
               <a:rPr lang="en-US" smtClean="0"/>
               <a:t>‹#›</a:t>
             </a:fld>
@@ -336,7 +336,7 @@
     </p:spTree>
     <p:extLst>
       <p:ext uri="{BB962C8B-B14F-4D97-AF65-F5344CB8AC3E}">
-        <p14:creationId xmlns:p14="http://schemas.microsoft.com/office/powerpoint/2010/main" val="3168075583"/>
+        <p14:creationId xmlns:p14="http://schemas.microsoft.com/office/powerpoint/2010/main" val="3735999022"/>
       </p:ext>
     </p:extLst>
   </p:cSld>
@@ -347,8 +347,8 @@
 </file>
 
 <file path=ppt/slideLayouts/slideLayout10.xml><?xml version="1.0" encoding="utf-8"?>
-<p:sldLayout xmlns:a="http://schemas.openxmlformats.org/drawingml/2006/main" xmlns:r="http://schemas.openxmlformats.org/officeDocument/2006/relationships" xmlns:p="http://schemas.openxmlformats.org/presentationml/2006/main" type="vertTx" preserve="1">
-  <p:cSld name="Title and Vertical Text">
+<p:sldLayout xmlns:a="http://schemas.openxmlformats.org/drawingml/2006/main" xmlns:r="http://schemas.openxmlformats.org/officeDocument/2006/relationships" xmlns:p="http://schemas.openxmlformats.org/presentationml/2006/main" showMasterSp="0" preserve="1" userDrawn="1">
+  <p:cSld name="Top Banner with Picture">
     <p:spTree>
       <p:nvGrpSpPr>
         <p:cNvPr id="1" name=""/>
@@ -365,7 +365,60 @@
       </p:grpSpPr>
       <p:sp>
         <p:nvSpPr>
-          <p:cNvPr id="2" name="Title 1"/>
+          <p:cNvPr id="10" name="Header Rectangle"/>
+          <p:cNvSpPr/>
+          <p:nvPr userDrawn="1"/>
+        </p:nvSpPr>
+        <p:spPr>
+          <a:xfrm>
+            <a:off x="0" y="0"/>
+            <a:ext cx="12192000" cy="1613140"/>
+          </a:xfrm>
+          <a:prstGeom prst="rect">
+            <a:avLst/>
+          </a:prstGeom>
+          <a:solidFill>
+            <a:srgbClr val="4472C4"/>
+          </a:solidFill>
+          <a:ln>
+            <a:noFill/>
+          </a:ln>
+        </p:spPr>
+        <p:txBody>
+          <a:bodyPr/>
+          <a:lstStyle/>
+          <a:p>
+            <a:endParaRPr lang="en-US"/>
+          </a:p>
+        </p:txBody>
+      </p:sp>
+      <p:pic>
+        <p:nvPicPr>
+          <p:cNvPr id="11" name="Logo"/>
+          <p:cNvPicPr>
+            <a:picLocks noChangeAspect="1"/>
+          </p:cNvPicPr>
+          <p:nvPr userDrawn="1"/>
+        </p:nvPicPr>
+        <p:blipFill>
+          <a:blip r:embed="rId2"/>
+          <a:stretch>
+            <a:fillRect/>
+          </a:stretch>
+        </p:blipFill>
+        <p:spPr>
+          <a:xfrm>
+            <a:off x="10638826" y="284672"/>
+            <a:ext cx="1199069" cy="257820"/>
+          </a:xfrm>
+          <a:prstGeom prst="rect">
+            <a:avLst/>
+          </a:prstGeom>
+        </p:spPr>
+      </p:pic>
+      <p:sp>
+        <p:nvSpPr>
+          <p:cNvPr id="12" name="Title 1"/>
           <p:cNvSpPr>
             <a:spLocks noGrp="1"/>
           </p:cNvSpPr>
@@ -373,140 +426,143 @@
             <p:ph type="title"/>
           </p:nvPr>
         </p:nvSpPr>
-        <p:spPr/>
-        <p:txBody>
-          <a:bodyPr/>
-          <a:lstStyle/>
-          <a:p>
-            <a:r>
-              <a:rPr lang="en-US" smtClean="0"/>
+        <p:spPr>
+          <a:xfrm>
+            <a:off x="354105" y="284672"/>
+            <a:ext cx="3225675" cy="480060"/>
+          </a:xfrm>
+        </p:spPr>
+        <p:txBody>
+          <a:bodyPr vert="horz" lIns="91440" tIns="45720" rIns="91440" bIns="45720" anchor="t">
+            <a:normAutofit/>
+          </a:bodyPr>
+          <a:lstStyle>
+            <a:lvl1pPr algn="l">
+              <a:defRPr sz="2400" b="1">
+                <a:solidFill>
+                  <a:srgbClr val="FFFFFF"/>
+                </a:solidFill>
+              </a:defRPr>
+            </a:lvl1pPr>
+          </a:lstStyle>
+          <a:p>
+            <a:r>
+              <a:rPr lang="en-US"/>
               <a:t>Click to edit Master title style</a:t>
             </a:r>
-            <a:endParaRPr lang="en-US"/>
-          </a:p>
-        </p:txBody>
-      </p:sp>
-      <p:sp>
-        <p:nvSpPr>
-          <p:cNvPr id="3" name="Vertical Text Placeholder 2"/>
-          <p:cNvSpPr>
-            <a:spLocks noGrp="1"/>
-          </p:cNvSpPr>
-          <p:nvPr>
-            <p:ph type="body" orient="vert" idx="1"/>
-          </p:nvPr>
-        </p:nvSpPr>
-        <p:spPr/>
-        <p:txBody>
-          <a:bodyPr vert="eaVert"/>
-          <a:lstStyle/>
+          </a:p>
+        </p:txBody>
+      </p:sp>
+      <p:sp>
+        <p:nvSpPr>
+          <p:cNvPr id="14" name="Picture Placeholder 2"/>
+          <p:cNvSpPr>
+            <a:spLocks noGrp="1"/>
+          </p:cNvSpPr>
+          <p:nvPr>
+            <p:ph type="pic" idx="1"/>
+          </p:nvPr>
+        </p:nvSpPr>
+        <p:spPr>
+          <a:xfrm>
+            <a:off x="170688" y="1759268"/>
+            <a:ext cx="11783400" cy="4916133"/>
+          </a:xfrm>
+        </p:spPr>
+        <p:txBody>
+          <a:bodyPr/>
+          <a:lstStyle/>
+          <a:p>
+            <a:r>
+              <a:rPr lang="en-US"/>
+              <a:t>Click icon to add picture</a:t>
+            </a:r>
+            <a:endParaRPr lang="en-US" dirty="0"/>
+          </a:p>
+        </p:txBody>
+      </p:sp>
+      <p:sp>
+        <p:nvSpPr>
+          <p:cNvPr id="15" name="Subtitle"/>
+          <p:cNvSpPr>
+            <a:spLocks noGrp="1"/>
+          </p:cNvSpPr>
+          <p:nvPr>
+            <p:ph type="body" sz="quarter" idx="11"/>
+          </p:nvPr>
+        </p:nvSpPr>
+        <p:spPr>
+          <a:xfrm>
+            <a:off x="354105" y="810768"/>
+            <a:ext cx="3225675" cy="384048"/>
+          </a:xfrm>
+        </p:spPr>
+        <p:txBody>
+          <a:bodyPr vert="horz" lIns="91440" tIns="0" rIns="91440" bIns="0" anchor="t">
+            <a:normAutofit/>
+          </a:bodyPr>
+          <a:lstStyle>
+            <a:lvl1pPr marL="0" indent="0" algn="l">
+              <a:buNone/>
+              <a:defRPr sz="1600" b="0">
+                <a:solidFill>
+                  <a:srgbClr val="FFFFFF"/>
+                </a:solidFill>
+              </a:defRPr>
+            </a:lvl1pPr>
+          </a:lstStyle>
           <a:p>
             <a:pPr lvl="0"/>
             <a:r>
-              <a:rPr lang="en-US" smtClean="0"/>
+              <a:rPr lang="en-US"/>
               <a:t>Click to edit Master text styles</a:t>
             </a:r>
           </a:p>
-          <a:p>
-            <a:pPr lvl="1"/>
-            <a:r>
-              <a:rPr lang="en-US" smtClean="0"/>
-              <a:t>Second level</a:t>
-            </a:r>
-          </a:p>
-          <a:p>
-            <a:pPr lvl="2"/>
-            <a:r>
-              <a:rPr lang="en-US" smtClean="0"/>
-              <a:t>Third level</a:t>
-            </a:r>
-          </a:p>
-          <a:p>
-            <a:pPr lvl="3"/>
-            <a:r>
-              <a:rPr lang="en-US" smtClean="0"/>
-              <a:t>Fourth level</a:t>
-            </a:r>
-          </a:p>
-          <a:p>
-            <a:pPr lvl="4"/>
-            <a:r>
-              <a:rPr lang="en-US" smtClean="0"/>
-              <a:t>Fifth level</a:t>
-            </a:r>
-            <a:endParaRPr lang="en-US"/>
-          </a:p>
-        </p:txBody>
-      </p:sp>
-      <p:sp>
-        <p:nvSpPr>
-          <p:cNvPr id="4" name="Date Placeholder 3"/>
-          <p:cNvSpPr>
-            <a:spLocks noGrp="1"/>
-          </p:cNvSpPr>
-          <p:nvPr>
-            <p:ph type="dt" sz="half" idx="10"/>
-          </p:nvPr>
-        </p:nvSpPr>
-        <p:spPr/>
-        <p:txBody>
-          <a:bodyPr/>
-          <a:lstStyle/>
-          <a:p>
-            <a:fld id="{5BCAD085-E8A6-8845-BD4E-CB4CCA059FC4}" type="datetimeFigureOut">
-              <a:rPr lang="en-US" smtClean="0"/>
-              <a:t>1/27/13</a:t>
-            </a:fld>
-            <a:endParaRPr lang="en-US"/>
-          </a:p>
-        </p:txBody>
-      </p:sp>
-      <p:sp>
-        <p:nvSpPr>
-          <p:cNvPr id="5" name="Footer Placeholder 4"/>
-          <p:cNvSpPr>
-            <a:spLocks noGrp="1"/>
-          </p:cNvSpPr>
-          <p:nvPr>
-            <p:ph type="ftr" sz="quarter" idx="11"/>
-          </p:nvPr>
-        </p:nvSpPr>
-        <p:spPr/>
-        <p:txBody>
-          <a:bodyPr/>
-          <a:lstStyle/>
-          <a:p>
-            <a:endParaRPr lang="en-US"/>
-          </a:p>
-        </p:txBody>
-      </p:sp>
-      <p:sp>
-        <p:nvSpPr>
-          <p:cNvPr id="6" name="Slide Number Placeholder 5"/>
-          <p:cNvSpPr>
-            <a:spLocks noGrp="1"/>
-          </p:cNvSpPr>
-          <p:nvPr>
-            <p:ph type="sldNum" sz="quarter" idx="12"/>
-          </p:nvPr>
-        </p:nvSpPr>
-        <p:spPr/>
-        <p:txBody>
-          <a:bodyPr/>
-          <a:lstStyle/>
-          <a:p>
-            <a:fld id="{C1FF6DA9-008F-8B48-92A6-B652298478BF}" type="slidenum">
-              <a:rPr lang="en-US" smtClean="0"/>
-              <a:t>‹#›</a:t>
-            </a:fld>
-            <a:endParaRPr lang="en-US"/>
+        </p:txBody>
+      </p:sp>
+      <p:sp>
+        <p:nvSpPr>
+          <p:cNvPr id="16" name="Detail"/>
+          <p:cNvSpPr>
+            <a:spLocks noGrp="1"/>
+          </p:cNvSpPr>
+          <p:nvPr>
+            <p:ph type="body" sz="quarter" idx="12"/>
+          </p:nvPr>
+        </p:nvSpPr>
+        <p:spPr>
+          <a:xfrm>
+            <a:off x="354105" y="1234440"/>
+            <a:ext cx="3225675" cy="338328"/>
+          </a:xfrm>
+        </p:spPr>
+        <p:txBody>
+          <a:bodyPr vert="horz" lIns="91440" tIns="0" rIns="91440" bIns="0" anchor="t">
+            <a:normAutofit/>
+          </a:bodyPr>
+          <a:lstStyle>
+            <a:lvl1pPr marL="0" indent="0" algn="l">
+              <a:buNone/>
+              <a:defRPr sz="1400" b="0" i="1">
+                <a:solidFill>
+                  <a:srgbClr val="D0DCE8"/>
+                </a:solidFill>
+              </a:defRPr>
+            </a:lvl1pPr>
+          </a:lstStyle>
+          <a:p>
+            <a:pPr lvl="0"/>
+            <a:r>
+              <a:rPr lang="en-US"/>
+              <a:t>Click to edit Master text styles</a:t>
+            </a:r>
           </a:p>
         </p:txBody>
       </p:sp>
     </p:spTree>
     <p:extLst>
       <p:ext uri="{BB962C8B-B14F-4D97-AF65-F5344CB8AC3E}">
-        <p14:creationId xmlns:p14="http://schemas.microsoft.com/office/powerpoint/2010/main" val="2910927964"/>
+        <p14:creationId xmlns:p14="http://schemas.microsoft.com/office/powerpoint/2010/main" val="398998912"/>
       </p:ext>
     </p:extLst>
   </p:cSld>
@@ -517,8 +573,8 @@
 </file>
 
 <file path=ppt/slideLayouts/slideLayout11.xml><?xml version="1.0" encoding="utf-8"?>
-<p:sldLayout xmlns:a="http://schemas.openxmlformats.org/drawingml/2006/main" xmlns:r="http://schemas.openxmlformats.org/officeDocument/2006/relationships" xmlns:p="http://schemas.openxmlformats.org/presentationml/2006/main" type="vertTitleAndTx" preserve="1">
-  <p:cSld name="Vertical Title and Text">
+<p:sldLayout xmlns:a="http://schemas.openxmlformats.org/drawingml/2006/main" xmlns:r="http://schemas.openxmlformats.org/officeDocument/2006/relationships" xmlns:p="http://schemas.openxmlformats.org/presentationml/2006/main" type="picTx" preserve="1">
+  <p:cSld name="Picture with Caption">
     <p:spTree>
       <p:nvGrpSpPr>
         <p:cNvPr id="1" name=""/>
@@ -535,107 +591,206 @@
       </p:grpSpPr>
       <p:sp>
         <p:nvSpPr>
-          <p:cNvPr id="2" name="Vertical Title 1"/>
-          <p:cNvSpPr>
-            <a:spLocks noGrp="1"/>
-          </p:cNvSpPr>
-          <p:nvPr>
-            <p:ph type="title" orient="vert"/>
-          </p:nvPr>
-        </p:nvSpPr>
-        <p:spPr>
-          <a:xfrm>
-            <a:off x="6629400" y="274638"/>
-            <a:ext cx="2057400" cy="5851525"/>
-          </a:xfrm>
-        </p:spPr>
-        <p:txBody>
-          <a:bodyPr vert="eaVert"/>
-          <a:lstStyle/>
-          <a:p>
-            <a:r>
+          <p:cNvPr id="2" name="Title 1">
+            <a:extLst>
+              <a:ext uri="{FF2B5EF4-FFF2-40B4-BE49-F238E27FC236}">
+                <a16:creationId xmlns:a16="http://schemas.microsoft.com/office/drawing/2014/main" id="{9A6471D3-B9EE-110E-6FB5-E8A0A1939D42}"/>
+              </a:ext>
+            </a:extLst>
+          </p:cNvPr>
+          <p:cNvSpPr>
+            <a:spLocks noGrp="1"/>
+          </p:cNvSpPr>
+          <p:nvPr>
+            <p:ph type="title"/>
+          </p:nvPr>
+        </p:nvSpPr>
+        <p:spPr>
+          <a:xfrm>
+            <a:off x="839788" y="457200"/>
+            <a:ext cx="3932237" cy="1600200"/>
+          </a:xfrm>
+        </p:spPr>
+        <p:txBody>
+          <a:bodyPr anchor="b"/>
+          <a:lstStyle>
+            <a:lvl1pPr>
+              <a:defRPr sz="3200"/>
+            </a:lvl1pPr>
+          </a:lstStyle>
+          <a:p>
+            <a:r>
+              <a:rPr lang="en-US"/>
+              <a:t>Click to edit Master title style</a:t>
+            </a:r>
+          </a:p>
+        </p:txBody>
+      </p:sp>
+      <p:sp>
+        <p:nvSpPr>
+          <p:cNvPr id="3" name="Picture Placeholder 2">
+            <a:extLst>
+              <a:ext uri="{FF2B5EF4-FFF2-40B4-BE49-F238E27FC236}">
+                <a16:creationId xmlns:a16="http://schemas.microsoft.com/office/drawing/2014/main" id="{DDCDA8C6-802C-CABA-F7D5-3BE01350797A}"/>
+              </a:ext>
+            </a:extLst>
+          </p:cNvPr>
+          <p:cNvSpPr>
+            <a:spLocks noGrp="1"/>
+          </p:cNvSpPr>
+          <p:nvPr>
+            <p:ph type="pic" idx="1"/>
+          </p:nvPr>
+        </p:nvSpPr>
+        <p:spPr>
+          <a:xfrm>
+            <a:off x="5183188" y="987425"/>
+            <a:ext cx="6172200" cy="4873625"/>
+          </a:xfrm>
+        </p:spPr>
+        <p:txBody>
+          <a:bodyPr/>
+          <a:lstStyle>
+            <a:lvl1pPr marL="0" indent="0">
+              <a:buNone/>
+              <a:defRPr sz="3200"/>
+            </a:lvl1pPr>
+            <a:lvl2pPr marL="457200" indent="0">
+              <a:buNone/>
+              <a:defRPr sz="2800"/>
+            </a:lvl2pPr>
+            <a:lvl3pPr marL="914400" indent="0">
+              <a:buNone/>
+              <a:defRPr sz="2400"/>
+            </a:lvl3pPr>
+            <a:lvl4pPr marL="1371600" indent="0">
+              <a:buNone/>
+              <a:defRPr sz="2000"/>
+            </a:lvl4pPr>
+            <a:lvl5pPr marL="1828800" indent="0">
+              <a:buNone/>
+              <a:defRPr sz="2000"/>
+            </a:lvl5pPr>
+            <a:lvl6pPr marL="2286000" indent="0">
+              <a:buNone/>
+              <a:defRPr sz="2000"/>
+            </a:lvl6pPr>
+            <a:lvl7pPr marL="2743200" indent="0">
+              <a:buNone/>
+              <a:defRPr sz="2000"/>
+            </a:lvl7pPr>
+            <a:lvl8pPr marL="3200400" indent="0">
+              <a:buNone/>
+              <a:defRPr sz="2000"/>
+            </a:lvl8pPr>
+            <a:lvl9pPr marL="3657600" indent="0">
+              <a:buNone/>
+              <a:defRPr sz="2000"/>
+            </a:lvl9pPr>
+          </a:lstStyle>
+          <a:p>
+            <a:r>
+              <a:rPr lang="en-US"/>
+              <a:t>Click icon to add picture</a:t>
+            </a:r>
+          </a:p>
+        </p:txBody>
+      </p:sp>
+      <p:sp>
+        <p:nvSpPr>
+          <p:cNvPr id="4" name="Text Placeholder 3">
+            <a:extLst>
+              <a:ext uri="{FF2B5EF4-FFF2-40B4-BE49-F238E27FC236}">
+                <a16:creationId xmlns:a16="http://schemas.microsoft.com/office/drawing/2014/main" id="{4DC6AD30-C5DD-38F5-48A0-5286DA6BC3BD}"/>
+              </a:ext>
+            </a:extLst>
+          </p:cNvPr>
+          <p:cNvSpPr>
+            <a:spLocks noGrp="1"/>
+          </p:cNvSpPr>
+          <p:nvPr>
+            <p:ph type="body" sz="half" idx="2"/>
+          </p:nvPr>
+        </p:nvSpPr>
+        <p:spPr>
+          <a:xfrm>
+            <a:off x="839788" y="2057400"/>
+            <a:ext cx="3932237" cy="3811588"/>
+          </a:xfrm>
+        </p:spPr>
+        <p:txBody>
+          <a:bodyPr/>
+          <a:lstStyle>
+            <a:lvl1pPr marL="0" indent="0">
+              <a:buNone/>
+              <a:defRPr sz="1600"/>
+            </a:lvl1pPr>
+            <a:lvl2pPr marL="457200" indent="0">
+              <a:buNone/>
+              <a:defRPr sz="1400"/>
+            </a:lvl2pPr>
+            <a:lvl3pPr marL="914400" indent="0">
+              <a:buNone/>
+              <a:defRPr sz="1200"/>
+            </a:lvl3pPr>
+            <a:lvl4pPr marL="1371600" indent="0">
+              <a:buNone/>
+              <a:defRPr sz="1000"/>
+            </a:lvl4pPr>
+            <a:lvl5pPr marL="1828800" indent="0">
+              <a:buNone/>
+              <a:defRPr sz="1000"/>
+            </a:lvl5pPr>
+            <a:lvl6pPr marL="2286000" indent="0">
+              <a:buNone/>
+              <a:defRPr sz="1000"/>
+            </a:lvl6pPr>
+            <a:lvl7pPr marL="2743200" indent="0">
+              <a:buNone/>
+              <a:defRPr sz="1000"/>
+            </a:lvl7pPr>
+            <a:lvl8pPr marL="3200400" indent="0">
+              <a:buNone/>
+              <a:defRPr sz="1000"/>
+            </a:lvl8pPr>
+            <a:lvl9pPr marL="3657600" indent="0">
+              <a:buNone/>
+              <a:defRPr sz="1000"/>
+            </a:lvl9pPr>
+          </a:lstStyle>
+          <a:p>
+            <a:pPr lvl="0"/>
+            <a:r>
+              <a:rPr lang="en-US"/>
+              <a:t>Click to edit Master text styles</a:t>
+            </a:r>
+          </a:p>
+        </p:txBody>
+      </p:sp>
+      <p:sp>
+        <p:nvSpPr>
+          <p:cNvPr id="5" name="Date Placeholder 4">
+            <a:extLst>
+              <a:ext uri="{FF2B5EF4-FFF2-40B4-BE49-F238E27FC236}">
+                <a16:creationId xmlns:a16="http://schemas.microsoft.com/office/drawing/2014/main" id="{3E2D5737-0253-6157-C1B2-7230C7EA7DA0}"/>
+              </a:ext>
+            </a:extLst>
+          </p:cNvPr>
+          <p:cNvSpPr>
+            <a:spLocks noGrp="1"/>
+          </p:cNvSpPr>
+          <p:nvPr>
+            <p:ph type="dt" sz="half" idx="10"/>
+          </p:nvPr>
+        </p:nvSpPr>
+        <p:spPr/>
+        <p:txBody>
+          <a:bodyPr/>
+          <a:lstStyle/>
+          <a:p>
+            <a:fld id="{FCBA1D2B-2537-4D61-9387-23A02DC35F45}" type="datetimeFigureOut">
               <a:rPr lang="en-US" smtClean="0"/>
-              <a:t>Click to edit Master title style</a:t>
-            </a:r>
-            <a:endParaRPr lang="en-US"/>
-          </a:p>
-        </p:txBody>
-      </p:sp>
-      <p:sp>
-        <p:nvSpPr>
-          <p:cNvPr id="3" name="Vertical Text Placeholder 2"/>
-          <p:cNvSpPr>
-            <a:spLocks noGrp="1"/>
-          </p:cNvSpPr>
-          <p:nvPr>
-            <p:ph type="body" orient="vert" idx="1"/>
-          </p:nvPr>
-        </p:nvSpPr>
-        <p:spPr>
-          <a:xfrm>
-            <a:off x="457200" y="274638"/>
-            <a:ext cx="6019800" cy="5851525"/>
-          </a:xfrm>
-        </p:spPr>
-        <p:txBody>
-          <a:bodyPr vert="eaVert"/>
-          <a:lstStyle/>
-          <a:p>
-            <a:pPr lvl="0"/>
-            <a:r>
-              <a:rPr lang="en-US" smtClean="0"/>
-              <a:t>Click to edit Master text styles</a:t>
-            </a:r>
-          </a:p>
-          <a:p>
-            <a:pPr lvl="1"/>
-            <a:r>
-              <a:rPr lang="en-US" smtClean="0"/>
-              <a:t>Second level</a:t>
-            </a:r>
-          </a:p>
-          <a:p>
-            <a:pPr lvl="2"/>
-            <a:r>
-              <a:rPr lang="en-US" smtClean="0"/>
-              <a:t>Third level</a:t>
-            </a:r>
-          </a:p>
-          <a:p>
-            <a:pPr lvl="3"/>
-            <a:r>
-              <a:rPr lang="en-US" smtClean="0"/>
-              <a:t>Fourth level</a:t>
-            </a:r>
-          </a:p>
-          <a:p>
-            <a:pPr lvl="4"/>
-            <a:r>
-              <a:rPr lang="en-US" smtClean="0"/>
-              <a:t>Fifth level</a:t>
-            </a:r>
-            <a:endParaRPr lang="en-US"/>
-          </a:p>
-        </p:txBody>
-      </p:sp>
-      <p:sp>
-        <p:nvSpPr>
-          <p:cNvPr id="4" name="Date Placeholder 3"/>
-          <p:cNvSpPr>
-            <a:spLocks noGrp="1"/>
-          </p:cNvSpPr>
-          <p:nvPr>
-            <p:ph type="dt" sz="half" idx="10"/>
-          </p:nvPr>
-        </p:nvSpPr>
-        <p:spPr/>
-        <p:txBody>
-          <a:bodyPr/>
-          <a:lstStyle/>
-          <a:p>
-            <a:fld id="{5BCAD085-E8A6-8845-BD4E-CB4CCA059FC4}" type="datetimeFigureOut">
-              <a:rPr lang="en-US" smtClean="0"/>
-              <a:t>1/27/13</a:t>
+              <a:t>2/12/2026</a:t>
             </a:fld>
             <a:endParaRPr lang="en-US"/>
           </a:p>
@@ -643,7 +798,13 @@
       </p:sp>
       <p:sp>
         <p:nvSpPr>
-          <p:cNvPr id="5" name="Footer Placeholder 4"/>
+          <p:cNvPr id="6" name="Footer Placeholder 5">
+            <a:extLst>
+              <a:ext uri="{FF2B5EF4-FFF2-40B4-BE49-F238E27FC236}">
+                <a16:creationId xmlns:a16="http://schemas.microsoft.com/office/drawing/2014/main" id="{BC907422-4D4B-23EF-D757-7E311B224E03}"/>
+              </a:ext>
+            </a:extLst>
+          </p:cNvPr>
           <p:cNvSpPr>
             <a:spLocks noGrp="1"/>
           </p:cNvSpPr>
@@ -662,7 +823,13 @@
       </p:sp>
       <p:sp>
         <p:nvSpPr>
-          <p:cNvPr id="6" name="Slide Number Placeholder 5"/>
+          <p:cNvPr id="7" name="Slide Number Placeholder 6">
+            <a:extLst>
+              <a:ext uri="{FF2B5EF4-FFF2-40B4-BE49-F238E27FC236}">
+                <a16:creationId xmlns:a16="http://schemas.microsoft.com/office/drawing/2014/main" id="{67998F76-1EF5-7800-26FE-DF55ED52FF0C}"/>
+              </a:ext>
+            </a:extLst>
+          </p:cNvPr>
           <p:cNvSpPr>
             <a:spLocks noGrp="1"/>
           </p:cNvSpPr>
@@ -675,7 +842,7 @@
           <a:bodyPr/>
           <a:lstStyle/>
           <a:p>
-            <a:fld id="{C1FF6DA9-008F-8B48-92A6-B652298478BF}" type="slidenum">
+            <a:fld id="{1F6C2334-BDD3-4B5A-BFA7-22F489CFAFEA}" type="slidenum">
               <a:rPr lang="en-US" smtClean="0"/>
               <a:t>‹#›</a:t>
             </a:fld>
@@ -686,7 +853,7 @@
     </p:spTree>
     <p:extLst>
       <p:ext uri="{BB962C8B-B14F-4D97-AF65-F5344CB8AC3E}">
-        <p14:creationId xmlns:p14="http://schemas.microsoft.com/office/powerpoint/2010/main" val="3612223792"/>
+        <p14:creationId xmlns:p14="http://schemas.microsoft.com/office/powerpoint/2010/main" val="398998912"/>
       </p:ext>
     </p:extLst>
   </p:cSld>
@@ -715,7 +882,13 @@
       </p:grpSpPr>
       <p:sp>
         <p:nvSpPr>
-          <p:cNvPr id="2" name="Title 1"/>
+          <p:cNvPr id="2" name="Title 1">
+            <a:extLst>
+              <a:ext uri="{FF2B5EF4-FFF2-40B4-BE49-F238E27FC236}">
+                <a16:creationId xmlns:a16="http://schemas.microsoft.com/office/drawing/2014/main" id="{002509F5-B437-05DD-6977-AF1DC9BC0AA9}"/>
+              </a:ext>
+            </a:extLst>
+          </p:cNvPr>
           <p:cNvSpPr>
             <a:spLocks noGrp="1"/>
           </p:cNvSpPr>
@@ -723,89 +896,109 @@
             <p:ph type="title"/>
           </p:nvPr>
         </p:nvSpPr>
+        <p:spPr>
+          <a:xfrm>
+            <a:off x="838200" y="365125"/>
+            <a:ext cx="10515600" cy="1325563"/>
+          </a:xfrm>
+        </p:spPr>
+        <p:txBody>
+          <a:bodyPr/>
+          <a:lstStyle/>
+          <a:p>
+            <a:r>
+              <a:rPr lang="en-US"/>
+              <a:t>Click to edit Master title style</a:t>
+            </a:r>
+          </a:p>
+        </p:txBody>
+      </p:sp>
+      <p:sp>
+        <p:nvSpPr>
+          <p:cNvPr id="3" name="Content Placeholder 2">
+            <a:extLst>
+              <a:ext uri="{FF2B5EF4-FFF2-40B4-BE49-F238E27FC236}">
+                <a16:creationId xmlns:a16="http://schemas.microsoft.com/office/drawing/2014/main" id="{CAA1B4E3-152E-063F-ABF3-176A0BB05A4B}"/>
+              </a:ext>
+            </a:extLst>
+          </p:cNvPr>
+          <p:cNvSpPr>
+            <a:spLocks noGrp="1"/>
+          </p:cNvSpPr>
+          <p:nvPr>
+            <p:ph idx="1"/>
+          </p:nvPr>
+        </p:nvSpPr>
+        <p:spPr>
+          <a:xfrm>
+            <a:off x="838200" y="1825625"/>
+            <a:ext cx="10515600" cy="3788062"/>
+          </a:xfrm>
+        </p:spPr>
+        <p:txBody>
+          <a:bodyPr/>
+          <a:lstStyle/>
+          <a:p>
+            <a:pPr lvl="0"/>
+            <a:r>
+              <a:rPr lang="en-US"/>
+              <a:t>Click to edit Master text styles</a:t>
+            </a:r>
+          </a:p>
+          <a:p>
+            <a:pPr lvl="1"/>
+            <a:r>
+              <a:rPr lang="en-US"/>
+              <a:t>Second level</a:t>
+            </a:r>
+          </a:p>
+          <a:p>
+            <a:pPr lvl="2"/>
+            <a:r>
+              <a:rPr lang="en-US"/>
+              <a:t>Third level</a:t>
+            </a:r>
+          </a:p>
+          <a:p>
+            <a:pPr lvl="3"/>
+            <a:r>
+              <a:rPr lang="en-US"/>
+              <a:t>Fourth level</a:t>
+            </a:r>
+          </a:p>
+          <a:p>
+            <a:pPr lvl="4"/>
+            <a:r>
+              <a:rPr lang="en-US"/>
+              <a:t>Fifth level</a:t>
+            </a:r>
+          </a:p>
+        </p:txBody>
+      </p:sp>
+      <p:sp>
+        <p:nvSpPr>
+          <p:cNvPr id="4" name="Date Placeholder 3">
+            <a:extLst>
+              <a:ext uri="{FF2B5EF4-FFF2-40B4-BE49-F238E27FC236}">
+                <a16:creationId xmlns:a16="http://schemas.microsoft.com/office/drawing/2014/main" id="{2C643E23-83C7-0D9A-A2B4-C3859CC8A1BF}"/>
+              </a:ext>
+            </a:extLst>
+          </p:cNvPr>
+          <p:cNvSpPr>
+            <a:spLocks noGrp="1"/>
+          </p:cNvSpPr>
+          <p:nvPr>
+            <p:ph type="dt" sz="half" idx="10"/>
+          </p:nvPr>
+        </p:nvSpPr>
         <p:spPr/>
         <p:txBody>
           <a:bodyPr/>
           <a:lstStyle/>
           <a:p>
-            <a:r>
+            <a:fld id="{FCBA1D2B-2537-4D61-9387-23A02DC35F45}" type="datetimeFigureOut">
               <a:rPr lang="en-US" smtClean="0"/>
-              <a:t>Click to edit Master title style</a:t>
-            </a:r>
-            <a:endParaRPr lang="en-US"/>
-          </a:p>
-        </p:txBody>
-      </p:sp>
-      <p:sp>
-        <p:nvSpPr>
-          <p:cNvPr id="3" name="Content Placeholder 2"/>
-          <p:cNvSpPr>
-            <a:spLocks noGrp="1"/>
-          </p:cNvSpPr>
-          <p:nvPr>
-            <p:ph idx="1"/>
-          </p:nvPr>
-        </p:nvSpPr>
-        <p:spPr/>
-        <p:txBody>
-          <a:bodyPr/>
-          <a:lstStyle/>
-          <a:p>
-            <a:pPr lvl="0"/>
-            <a:r>
-              <a:rPr lang="en-US" smtClean="0"/>
-              <a:t>Click to edit Master text styles</a:t>
-            </a:r>
-          </a:p>
-          <a:p>
-            <a:pPr lvl="1"/>
-            <a:r>
-              <a:rPr lang="en-US" smtClean="0"/>
-              <a:t>Second level</a:t>
-            </a:r>
-          </a:p>
-          <a:p>
-            <a:pPr lvl="2"/>
-            <a:r>
-              <a:rPr lang="en-US" smtClean="0"/>
-              <a:t>Third level</a:t>
-            </a:r>
-          </a:p>
-          <a:p>
-            <a:pPr lvl="3"/>
-            <a:r>
-              <a:rPr lang="en-US" smtClean="0"/>
-              <a:t>Fourth level</a:t>
-            </a:r>
-          </a:p>
-          <a:p>
-            <a:pPr lvl="4"/>
-            <a:r>
-              <a:rPr lang="en-US" smtClean="0"/>
-              <a:t>Fifth level</a:t>
-            </a:r>
-            <a:endParaRPr lang="en-US"/>
-          </a:p>
-        </p:txBody>
-      </p:sp>
-      <p:sp>
-        <p:nvSpPr>
-          <p:cNvPr id="4" name="Date Placeholder 3"/>
-          <p:cNvSpPr>
-            <a:spLocks noGrp="1"/>
-          </p:cNvSpPr>
-          <p:nvPr>
-            <p:ph type="dt" sz="half" idx="10"/>
-          </p:nvPr>
-        </p:nvSpPr>
-        <p:spPr/>
-        <p:txBody>
-          <a:bodyPr/>
-          <a:lstStyle/>
-          <a:p>
-            <a:fld id="{5BCAD085-E8A6-8845-BD4E-CB4CCA059FC4}" type="datetimeFigureOut">
-              <a:rPr lang="en-US" smtClean="0"/>
-              <a:t>1/27/13</a:t>
+              <a:t>2/12/2026</a:t>
             </a:fld>
             <a:endParaRPr lang="en-US"/>
           </a:p>
@@ -813,7 +1006,13 @@
       </p:sp>
       <p:sp>
         <p:nvSpPr>
-          <p:cNvPr id="5" name="Footer Placeholder 4"/>
+          <p:cNvPr id="5" name="Footer Placeholder 4">
+            <a:extLst>
+              <a:ext uri="{FF2B5EF4-FFF2-40B4-BE49-F238E27FC236}">
+                <a16:creationId xmlns:a16="http://schemas.microsoft.com/office/drawing/2014/main" id="{3C52D64C-EBF5-4BDC-C498-98474B5C1A39}"/>
+              </a:ext>
+            </a:extLst>
+          </p:cNvPr>
           <p:cNvSpPr>
             <a:spLocks noGrp="1"/>
           </p:cNvSpPr>
@@ -832,7 +1031,13 @@
       </p:sp>
       <p:sp>
         <p:nvSpPr>
-          <p:cNvPr id="6" name="Slide Number Placeholder 5"/>
+          <p:cNvPr id="6" name="Slide Number Placeholder 5">
+            <a:extLst>
+              <a:ext uri="{FF2B5EF4-FFF2-40B4-BE49-F238E27FC236}">
+                <a16:creationId xmlns:a16="http://schemas.microsoft.com/office/drawing/2014/main" id="{AFF25701-933D-B87E-EBFF-D8004ED7C1F1}"/>
+              </a:ext>
+            </a:extLst>
+          </p:cNvPr>
           <p:cNvSpPr>
             <a:spLocks noGrp="1"/>
           </p:cNvSpPr>
@@ -845,7 +1050,7 @@
           <a:bodyPr/>
           <a:lstStyle/>
           <a:p>
-            <a:fld id="{C1FF6DA9-008F-8B48-92A6-B652298478BF}" type="slidenum">
+            <a:fld id="{1F6C2334-BDD3-4B5A-BFA7-22F489CFAFEA}" type="slidenum">
               <a:rPr lang="en-US" smtClean="0"/>
               <a:t>‹#›</a:t>
             </a:fld>
@@ -856,7 +1061,7 @@
     </p:spTree>
     <p:extLst>
       <p:ext uri="{BB962C8B-B14F-4D97-AF65-F5344CB8AC3E}">
-        <p14:creationId xmlns:p14="http://schemas.microsoft.com/office/powerpoint/2010/main" val="2614314258"/>
+        <p14:creationId xmlns:p14="http://schemas.microsoft.com/office/powerpoint/2010/main" val="2311107920"/>
       </p:ext>
     </p:extLst>
   </p:cSld>
@@ -885,7 +1090,13 @@
       </p:grpSpPr>
       <p:sp>
         <p:nvSpPr>
-          <p:cNvPr id="2" name="Title 1"/>
+          <p:cNvPr id="2" name="Title 1">
+            <a:extLst>
+              <a:ext uri="{FF2B5EF4-FFF2-40B4-BE49-F238E27FC236}">
+                <a16:creationId xmlns:a16="http://schemas.microsoft.com/office/drawing/2014/main" id="{9386185E-355E-77E2-B1D8-D63F3DCFD328}"/>
+              </a:ext>
+            </a:extLst>
+          </p:cNvPr>
           <p:cNvSpPr>
             <a:spLocks noGrp="1"/>
           </p:cNvSpPr>
@@ -895,29 +1106,34 @@
         </p:nvSpPr>
         <p:spPr>
           <a:xfrm>
-            <a:off x="722313" y="4406900"/>
-            <a:ext cx="7772400" cy="1362075"/>
-          </a:xfrm>
-        </p:spPr>
-        <p:txBody>
-          <a:bodyPr anchor="t"/>
+            <a:off x="831850" y="1709738"/>
+            <a:ext cx="10515600" cy="2852737"/>
+          </a:xfrm>
+        </p:spPr>
+        <p:txBody>
+          <a:bodyPr anchor="b"/>
           <a:lstStyle>
-            <a:lvl1pPr algn="l">
-              <a:defRPr sz="4000" b="1" cap="all"/>
+            <a:lvl1pPr>
+              <a:defRPr sz="6000"/>
             </a:lvl1pPr>
           </a:lstStyle>
           <a:p>
             <a:r>
-              <a:rPr lang="en-US" smtClean="0"/>
+              <a:rPr lang="en-US"/>
               <a:t>Click to edit Master title style</a:t>
             </a:r>
-            <a:endParaRPr lang="en-US"/>
-          </a:p>
-        </p:txBody>
-      </p:sp>
-      <p:sp>
-        <p:nvSpPr>
-          <p:cNvPr id="3" name="Text Placeholder 2"/>
+          </a:p>
+        </p:txBody>
+      </p:sp>
+      <p:sp>
+        <p:nvSpPr>
+          <p:cNvPr id="3" name="Text Placeholder 2">
+            <a:extLst>
+              <a:ext uri="{FF2B5EF4-FFF2-40B4-BE49-F238E27FC236}">
+                <a16:creationId xmlns:a16="http://schemas.microsoft.com/office/drawing/2014/main" id="{F35F19C6-2F8A-CB87-D7DA-4ED19514104B}"/>
+              </a:ext>
+            </a:extLst>
+          </p:cNvPr>
           <p:cNvSpPr>
             <a:spLocks noGrp="1"/>
           </p:cNvSpPr>
@@ -927,99 +1143,99 @@
         </p:nvSpPr>
         <p:spPr>
           <a:xfrm>
-            <a:off x="722313" y="2906713"/>
-            <a:ext cx="7772400" cy="1500187"/>
-          </a:xfrm>
-        </p:spPr>
-        <p:txBody>
-          <a:bodyPr anchor="b"/>
+            <a:off x="831850" y="4589463"/>
+            <a:ext cx="10515600" cy="1500187"/>
+          </a:xfrm>
+        </p:spPr>
+        <p:txBody>
+          <a:bodyPr/>
           <a:lstStyle>
             <a:lvl1pPr marL="0" indent="0">
               <a:buNone/>
-              <a:defRPr sz="2000">
+              <a:defRPr sz="2400">
                 <a:solidFill>
                   <a:schemeClr val="tx1">
-                    <a:tint val="75000"/>
+                    <a:tint val="82000"/>
                   </a:schemeClr>
                 </a:solidFill>
               </a:defRPr>
             </a:lvl1pPr>
             <a:lvl2pPr marL="457200" indent="0">
               <a:buNone/>
-              <a:defRPr sz="1800">
+              <a:defRPr sz="2000">
                 <a:solidFill>
                   <a:schemeClr val="tx1">
-                    <a:tint val="75000"/>
+                    <a:tint val="82000"/>
                   </a:schemeClr>
                 </a:solidFill>
               </a:defRPr>
             </a:lvl2pPr>
             <a:lvl3pPr marL="914400" indent="0">
               <a:buNone/>
-              <a:defRPr sz="1600">
+              <a:defRPr sz="1800">
                 <a:solidFill>
                   <a:schemeClr val="tx1">
-                    <a:tint val="75000"/>
+                    <a:tint val="82000"/>
                   </a:schemeClr>
                 </a:solidFill>
               </a:defRPr>
             </a:lvl3pPr>
             <a:lvl4pPr marL="1371600" indent="0">
               <a:buNone/>
-              <a:defRPr sz="1400">
+              <a:defRPr sz="1600">
                 <a:solidFill>
                   <a:schemeClr val="tx1">
-                    <a:tint val="75000"/>
+                    <a:tint val="82000"/>
                   </a:schemeClr>
                 </a:solidFill>
               </a:defRPr>
             </a:lvl4pPr>
             <a:lvl5pPr marL="1828800" indent="0">
               <a:buNone/>
-              <a:defRPr sz="1400">
+              <a:defRPr sz="1600">
                 <a:solidFill>
                   <a:schemeClr val="tx1">
-                    <a:tint val="75000"/>
+                    <a:tint val="82000"/>
                   </a:schemeClr>
                 </a:solidFill>
               </a:defRPr>
             </a:lvl5pPr>
             <a:lvl6pPr marL="2286000" indent="0">
               <a:buNone/>
-              <a:defRPr sz="1400">
+              <a:defRPr sz="1600">
                 <a:solidFill>
                   <a:schemeClr val="tx1">
-                    <a:tint val="75000"/>
+                    <a:tint val="82000"/>
                   </a:schemeClr>
                 </a:solidFill>
               </a:defRPr>
             </a:lvl6pPr>
             <a:lvl7pPr marL="2743200" indent="0">
               <a:buNone/>
-              <a:defRPr sz="1400">
+              <a:defRPr sz="1600">
                 <a:solidFill>
                   <a:schemeClr val="tx1">
-                    <a:tint val="75000"/>
+                    <a:tint val="82000"/>
                   </a:schemeClr>
                 </a:solidFill>
               </a:defRPr>
             </a:lvl7pPr>
             <a:lvl8pPr marL="3200400" indent="0">
               <a:buNone/>
-              <a:defRPr sz="1400">
+              <a:defRPr sz="1600">
                 <a:solidFill>
                   <a:schemeClr val="tx1">
-                    <a:tint val="75000"/>
+                    <a:tint val="82000"/>
                   </a:schemeClr>
                 </a:solidFill>
               </a:defRPr>
             </a:lvl8pPr>
             <a:lvl9pPr marL="3657600" indent="0">
               <a:buNone/>
-              <a:defRPr sz="1400">
+              <a:defRPr sz="1600">
                 <a:solidFill>
                   <a:schemeClr val="tx1">
-                    <a:tint val="75000"/>
+                    <a:tint val="82000"/>
                   </a:schemeClr>
                 </a:solidFill>
               </a:defRPr>
@@ -1028,30 +1244,36 @@
           <a:p>
             <a:pPr lvl="0"/>
             <a:r>
+              <a:rPr lang="en-US"/>
+              <a:t>Click to edit Master text styles</a:t>
+            </a:r>
+          </a:p>
+        </p:txBody>
+      </p:sp>
+      <p:sp>
+        <p:nvSpPr>
+          <p:cNvPr id="4" name="Date Placeholder 3">
+            <a:extLst>
+              <a:ext uri="{FF2B5EF4-FFF2-40B4-BE49-F238E27FC236}">
+                <a16:creationId xmlns:a16="http://schemas.microsoft.com/office/drawing/2014/main" id="{44F4AC52-F7F8-7018-12A9-AA1303F6DFDD}"/>
+              </a:ext>
+            </a:extLst>
+          </p:cNvPr>
+          <p:cNvSpPr>
+            <a:spLocks noGrp="1"/>
+          </p:cNvSpPr>
+          <p:nvPr>
+            <p:ph type="dt" sz="half" idx="10"/>
+          </p:nvPr>
+        </p:nvSpPr>
+        <p:spPr/>
+        <p:txBody>
+          <a:bodyPr/>
+          <a:lstStyle/>
+          <a:p>
+            <a:fld id="{FCBA1D2B-2537-4D61-9387-23A02DC35F45}" type="datetimeFigureOut">
               <a:rPr lang="en-US" smtClean="0"/>
-              <a:t>Click to edit Master text styles</a:t>
-            </a:r>
-          </a:p>
-        </p:txBody>
-      </p:sp>
-      <p:sp>
-        <p:nvSpPr>
-          <p:cNvPr id="4" name="Date Placeholder 3"/>
-          <p:cNvSpPr>
-            <a:spLocks noGrp="1"/>
-          </p:cNvSpPr>
-          <p:nvPr>
-            <p:ph type="dt" sz="half" idx="10"/>
-          </p:nvPr>
-        </p:nvSpPr>
-        <p:spPr/>
-        <p:txBody>
-          <a:bodyPr/>
-          <a:lstStyle/>
-          <a:p>
-            <a:fld id="{5BCAD085-E8A6-8845-BD4E-CB4CCA059FC4}" type="datetimeFigureOut">
-              <a:rPr lang="en-US" smtClean="0"/>
-              <a:t>1/27/13</a:t>
+              <a:t>2/12/2026</a:t>
             </a:fld>
             <a:endParaRPr lang="en-US"/>
           </a:p>
@@ -1059,7 +1281,13 @@
       </p:sp>
       <p:sp>
         <p:nvSpPr>
-          <p:cNvPr id="5" name="Footer Placeholder 4"/>
+          <p:cNvPr id="5" name="Footer Placeholder 4">
+            <a:extLst>
+              <a:ext uri="{FF2B5EF4-FFF2-40B4-BE49-F238E27FC236}">
+                <a16:creationId xmlns:a16="http://schemas.microsoft.com/office/drawing/2014/main" id="{16132B91-DC30-C9F4-F0C6-3FB87C57A6C4}"/>
+              </a:ext>
+            </a:extLst>
+          </p:cNvPr>
           <p:cNvSpPr>
             <a:spLocks noGrp="1"/>
           </p:cNvSpPr>
@@ -1078,7 +1306,13 @@
       </p:sp>
       <p:sp>
         <p:nvSpPr>
-          <p:cNvPr id="6" name="Slide Number Placeholder 5"/>
+          <p:cNvPr id="6" name="Slide Number Placeholder 5">
+            <a:extLst>
+              <a:ext uri="{FF2B5EF4-FFF2-40B4-BE49-F238E27FC236}">
+                <a16:creationId xmlns:a16="http://schemas.microsoft.com/office/drawing/2014/main" id="{15A460AA-6459-E62A-448E-763418CA166B}"/>
+              </a:ext>
+            </a:extLst>
+          </p:cNvPr>
           <p:cNvSpPr>
             <a:spLocks noGrp="1"/>
           </p:cNvSpPr>
@@ -1091,7 +1325,7 @@
           <a:bodyPr/>
           <a:lstStyle/>
           <a:p>
-            <a:fld id="{C1FF6DA9-008F-8B48-92A6-B652298478BF}" type="slidenum">
+            <a:fld id="{1F6C2334-BDD3-4B5A-BFA7-22F489CFAFEA}" type="slidenum">
               <a:rPr lang="en-US" smtClean="0"/>
               <a:t>‹#›</a:t>
             </a:fld>
@@ -1102,7 +1336,7 @@
     </p:spTree>
     <p:extLst>
       <p:ext uri="{BB962C8B-B14F-4D97-AF65-F5344CB8AC3E}">
-        <p14:creationId xmlns:p14="http://schemas.microsoft.com/office/powerpoint/2010/main" val="960648375"/>
+        <p14:creationId xmlns:p14="http://schemas.microsoft.com/office/powerpoint/2010/main" val="3120423877"/>
       </p:ext>
     </p:extLst>
   </p:cSld>
@@ -1131,7 +1365,13 @@
       </p:grpSpPr>
       <p:sp>
         <p:nvSpPr>
-          <p:cNvPr id="2" name="Title 1"/>
+          <p:cNvPr id="2" name="Title 1">
+            <a:extLst>
+              <a:ext uri="{FF2B5EF4-FFF2-40B4-BE49-F238E27FC236}">
+                <a16:creationId xmlns:a16="http://schemas.microsoft.com/office/drawing/2014/main" id="{1B4CC642-3D60-302E-A662-BBC9B28F1F62}"/>
+              </a:ext>
+            </a:extLst>
+          </p:cNvPr>
           <p:cNvSpPr>
             <a:spLocks noGrp="1"/>
           </p:cNvSpPr>
@@ -1145,201 +1385,160 @@
           <a:lstStyle/>
           <a:p>
             <a:r>
+              <a:rPr lang="en-US"/>
+              <a:t>Click to edit Master title style</a:t>
+            </a:r>
+          </a:p>
+        </p:txBody>
+      </p:sp>
+      <p:sp>
+        <p:nvSpPr>
+          <p:cNvPr id="3" name="Content Placeholder 2">
+            <a:extLst>
+              <a:ext uri="{FF2B5EF4-FFF2-40B4-BE49-F238E27FC236}">
+                <a16:creationId xmlns:a16="http://schemas.microsoft.com/office/drawing/2014/main" id="{F8E0E26D-930C-6D6A-C0CF-16CFD85C09CB}"/>
+              </a:ext>
+            </a:extLst>
+          </p:cNvPr>
+          <p:cNvSpPr>
+            <a:spLocks noGrp="1"/>
+          </p:cNvSpPr>
+          <p:nvPr>
+            <p:ph sz="half" idx="1"/>
+          </p:nvPr>
+        </p:nvSpPr>
+        <p:spPr>
+          <a:xfrm>
+            <a:off x="838200" y="1825625"/>
+            <a:ext cx="5181600" cy="4351338"/>
+          </a:xfrm>
+        </p:spPr>
+        <p:txBody>
+          <a:bodyPr/>
+          <a:lstStyle/>
+          <a:p>
+            <a:pPr lvl="0"/>
+            <a:r>
+              <a:rPr lang="en-US"/>
+              <a:t>Click to edit Master text styles</a:t>
+            </a:r>
+          </a:p>
+          <a:p>
+            <a:pPr lvl="1"/>
+            <a:r>
+              <a:rPr lang="en-US"/>
+              <a:t>Second level</a:t>
+            </a:r>
+          </a:p>
+          <a:p>
+            <a:pPr lvl="2"/>
+            <a:r>
+              <a:rPr lang="en-US"/>
+              <a:t>Third level</a:t>
+            </a:r>
+          </a:p>
+          <a:p>
+            <a:pPr lvl="3"/>
+            <a:r>
+              <a:rPr lang="en-US"/>
+              <a:t>Fourth level</a:t>
+            </a:r>
+          </a:p>
+          <a:p>
+            <a:pPr lvl="4"/>
+            <a:r>
+              <a:rPr lang="en-US"/>
+              <a:t>Fifth level</a:t>
+            </a:r>
+          </a:p>
+        </p:txBody>
+      </p:sp>
+      <p:sp>
+        <p:nvSpPr>
+          <p:cNvPr id="4" name="Content Placeholder 3">
+            <a:extLst>
+              <a:ext uri="{FF2B5EF4-FFF2-40B4-BE49-F238E27FC236}">
+                <a16:creationId xmlns:a16="http://schemas.microsoft.com/office/drawing/2014/main" id="{2131D49A-C64D-4FD5-B994-48DD226079A2}"/>
+              </a:ext>
+            </a:extLst>
+          </p:cNvPr>
+          <p:cNvSpPr>
+            <a:spLocks noGrp="1"/>
+          </p:cNvSpPr>
+          <p:nvPr>
+            <p:ph sz="half" idx="2"/>
+          </p:nvPr>
+        </p:nvSpPr>
+        <p:spPr>
+          <a:xfrm>
+            <a:off x="6172200" y="1825625"/>
+            <a:ext cx="5181600" cy="4351338"/>
+          </a:xfrm>
+        </p:spPr>
+        <p:txBody>
+          <a:bodyPr/>
+          <a:lstStyle/>
+          <a:p>
+            <a:pPr lvl="0"/>
+            <a:r>
+              <a:rPr lang="en-US"/>
+              <a:t>Click to edit Master text styles</a:t>
+            </a:r>
+          </a:p>
+          <a:p>
+            <a:pPr lvl="1"/>
+            <a:r>
+              <a:rPr lang="en-US"/>
+              <a:t>Second level</a:t>
+            </a:r>
+          </a:p>
+          <a:p>
+            <a:pPr lvl="2"/>
+            <a:r>
+              <a:rPr lang="en-US"/>
+              <a:t>Third level</a:t>
+            </a:r>
+          </a:p>
+          <a:p>
+            <a:pPr lvl="3"/>
+            <a:r>
+              <a:rPr lang="en-US"/>
+              <a:t>Fourth level</a:t>
+            </a:r>
+          </a:p>
+          <a:p>
+            <a:pPr lvl="4"/>
+            <a:r>
+              <a:rPr lang="en-US"/>
+              <a:t>Fifth level</a:t>
+            </a:r>
+          </a:p>
+        </p:txBody>
+      </p:sp>
+      <p:sp>
+        <p:nvSpPr>
+          <p:cNvPr id="5" name="Date Placeholder 4">
+            <a:extLst>
+              <a:ext uri="{FF2B5EF4-FFF2-40B4-BE49-F238E27FC236}">
+                <a16:creationId xmlns:a16="http://schemas.microsoft.com/office/drawing/2014/main" id="{4ED274F4-E841-1D9D-26B0-3FF1E440D4D4}"/>
+              </a:ext>
+            </a:extLst>
+          </p:cNvPr>
+          <p:cNvSpPr>
+            <a:spLocks noGrp="1"/>
+          </p:cNvSpPr>
+          <p:nvPr>
+            <p:ph type="dt" sz="half" idx="10"/>
+          </p:nvPr>
+        </p:nvSpPr>
+        <p:spPr/>
+        <p:txBody>
+          <a:bodyPr/>
+          <a:lstStyle/>
+          <a:p>
+            <a:fld id="{FCBA1D2B-2537-4D61-9387-23A02DC35F45}" type="datetimeFigureOut">
               <a:rPr lang="en-US" smtClean="0"/>
-              <a:t>Click to edit Master title style</a:t>
-            </a:r>
-            <a:endParaRPr lang="en-US"/>
-          </a:p>
-        </p:txBody>
-      </p:sp>
-      <p:sp>
-        <p:nvSpPr>
-          <p:cNvPr id="3" name="Content Placeholder 2"/>
-          <p:cNvSpPr>
-            <a:spLocks noGrp="1"/>
-          </p:cNvSpPr>
-          <p:nvPr>
-            <p:ph sz="half" idx="1"/>
-          </p:nvPr>
-        </p:nvSpPr>
-        <p:spPr>
-          <a:xfrm>
-            <a:off x="457200" y="1600200"/>
-            <a:ext cx="4038600" cy="4525963"/>
-          </a:xfrm>
-        </p:spPr>
-        <p:txBody>
-          <a:bodyPr/>
-          <a:lstStyle>
-            <a:lvl1pPr>
-              <a:defRPr sz="2800"/>
-            </a:lvl1pPr>
-            <a:lvl2pPr>
-              <a:defRPr sz="2400"/>
-            </a:lvl2pPr>
-            <a:lvl3pPr>
-              <a:defRPr sz="2000"/>
-            </a:lvl3pPr>
-            <a:lvl4pPr>
-              <a:defRPr sz="1800"/>
-            </a:lvl4pPr>
-            <a:lvl5pPr>
-              <a:defRPr sz="1800"/>
-            </a:lvl5pPr>
-            <a:lvl6pPr>
-              <a:defRPr sz="1800"/>
-            </a:lvl6pPr>
-            <a:lvl7pPr>
-              <a:defRPr sz="1800"/>
-            </a:lvl7pPr>
-            <a:lvl8pPr>
-              <a:defRPr sz="1800"/>
-            </a:lvl8pPr>
-            <a:lvl9pPr>
-              <a:defRPr sz="1800"/>
-            </a:lvl9pPr>
-          </a:lstStyle>
-          <a:p>
-            <a:pPr lvl="0"/>
-            <a:r>
-              <a:rPr lang="en-US" smtClean="0"/>
-              <a:t>Click to edit Master text styles</a:t>
-            </a:r>
-          </a:p>
-          <a:p>
-            <a:pPr lvl="1"/>
-            <a:r>
-              <a:rPr lang="en-US" smtClean="0"/>
-              <a:t>Second level</a:t>
-            </a:r>
-          </a:p>
-          <a:p>
-            <a:pPr lvl="2"/>
-            <a:r>
-              <a:rPr lang="en-US" smtClean="0"/>
-              <a:t>Third level</a:t>
-            </a:r>
-          </a:p>
-          <a:p>
-            <a:pPr lvl="3"/>
-            <a:r>
-              <a:rPr lang="en-US" smtClean="0"/>
-              <a:t>Fourth level</a:t>
-            </a:r>
-          </a:p>
-          <a:p>
-            <a:pPr lvl="4"/>
-            <a:r>
-              <a:rPr lang="en-US" smtClean="0"/>
-              <a:t>Fifth level</a:t>
-            </a:r>
-            <a:endParaRPr lang="en-US"/>
-          </a:p>
-        </p:txBody>
-      </p:sp>
-      <p:sp>
-        <p:nvSpPr>
-          <p:cNvPr id="4" name="Content Placeholder 3"/>
-          <p:cNvSpPr>
-            <a:spLocks noGrp="1"/>
-          </p:cNvSpPr>
-          <p:nvPr>
-            <p:ph sz="half" idx="2"/>
-          </p:nvPr>
-        </p:nvSpPr>
-        <p:spPr>
-          <a:xfrm>
-            <a:off x="4648200" y="1600200"/>
-            <a:ext cx="4038600" cy="4525963"/>
-          </a:xfrm>
-        </p:spPr>
-        <p:txBody>
-          <a:bodyPr/>
-          <a:lstStyle>
-            <a:lvl1pPr>
-              <a:defRPr sz="2800"/>
-            </a:lvl1pPr>
-            <a:lvl2pPr>
-              <a:defRPr sz="2400"/>
-            </a:lvl2pPr>
-            <a:lvl3pPr>
-              <a:defRPr sz="2000"/>
-            </a:lvl3pPr>
-            <a:lvl4pPr>
-              <a:defRPr sz="1800"/>
-            </a:lvl4pPr>
-            <a:lvl5pPr>
-              <a:defRPr sz="1800"/>
-            </a:lvl5pPr>
-            <a:lvl6pPr>
-              <a:defRPr sz="1800"/>
-            </a:lvl6pPr>
-            <a:lvl7pPr>
-              <a:defRPr sz="1800"/>
-            </a:lvl7pPr>
-            <a:lvl8pPr>
-              <a:defRPr sz="1800"/>
-            </a:lvl8pPr>
-            <a:lvl9pPr>
-              <a:defRPr sz="1800"/>
-            </a:lvl9pPr>
-          </a:lstStyle>
-          <a:p>
-            <a:pPr lvl="0"/>
-            <a:r>
-              <a:rPr lang="en-US" smtClean="0"/>
-              <a:t>Click to edit Master text styles</a:t>
-            </a:r>
-          </a:p>
-          <a:p>
-            <a:pPr lvl="1"/>
-            <a:r>
-              <a:rPr lang="en-US" smtClean="0"/>
-              <a:t>Second level</a:t>
-            </a:r>
-          </a:p>
-          <a:p>
-            <a:pPr lvl="2"/>
-            <a:r>
-              <a:rPr lang="en-US" smtClean="0"/>
-              <a:t>Third level</a:t>
-            </a:r>
-          </a:p>
-          <a:p>
-            <a:pPr lvl="3"/>
-            <a:r>
-              <a:rPr lang="en-US" smtClean="0"/>
-              <a:t>Fourth level</a:t>
-            </a:r>
-          </a:p>
-          <a:p>
-            <a:pPr lvl="4"/>
-            <a:r>
-              <a:rPr lang="en-US" smtClean="0"/>
-              <a:t>Fifth level</a:t>
-            </a:r>
-            <a:endParaRPr lang="en-US"/>
-          </a:p>
-        </p:txBody>
-      </p:sp>
-      <p:sp>
-        <p:nvSpPr>
-          <p:cNvPr id="5" name="Date Placeholder 4"/>
-          <p:cNvSpPr>
-            <a:spLocks noGrp="1"/>
-          </p:cNvSpPr>
-          <p:nvPr>
-            <p:ph type="dt" sz="half" idx="10"/>
-          </p:nvPr>
-        </p:nvSpPr>
-        <p:spPr/>
-        <p:txBody>
-          <a:bodyPr/>
-          <a:lstStyle/>
-          <a:p>
-            <a:fld id="{5BCAD085-E8A6-8845-BD4E-CB4CCA059FC4}" type="datetimeFigureOut">
-              <a:rPr lang="en-US" smtClean="0"/>
-              <a:t>1/27/13</a:t>
+              <a:t>2/12/2026</a:t>
             </a:fld>
             <a:endParaRPr lang="en-US"/>
           </a:p>
@@ -1347,7 +1546,13 @@
       </p:sp>
       <p:sp>
         <p:nvSpPr>
-          <p:cNvPr id="6" name="Footer Placeholder 5"/>
+          <p:cNvPr id="6" name="Footer Placeholder 5">
+            <a:extLst>
+              <a:ext uri="{FF2B5EF4-FFF2-40B4-BE49-F238E27FC236}">
+                <a16:creationId xmlns:a16="http://schemas.microsoft.com/office/drawing/2014/main" id="{6DC45427-AD00-05CD-03F8-12602E26B5B8}"/>
+              </a:ext>
+            </a:extLst>
+          </p:cNvPr>
           <p:cNvSpPr>
             <a:spLocks noGrp="1"/>
           </p:cNvSpPr>
@@ -1366,7 +1571,13 @@
       </p:sp>
       <p:sp>
         <p:nvSpPr>
-          <p:cNvPr id="7" name="Slide Number Placeholder 6"/>
+          <p:cNvPr id="7" name="Slide Number Placeholder 6">
+            <a:extLst>
+              <a:ext uri="{FF2B5EF4-FFF2-40B4-BE49-F238E27FC236}">
+                <a16:creationId xmlns:a16="http://schemas.microsoft.com/office/drawing/2014/main" id="{6BDFD10A-78FF-D8D2-CFA7-B1743DFA6E6B}"/>
+              </a:ext>
+            </a:extLst>
+          </p:cNvPr>
           <p:cNvSpPr>
             <a:spLocks noGrp="1"/>
           </p:cNvSpPr>
@@ -1379,7 +1590,7 @@
           <a:bodyPr/>
           <a:lstStyle/>
           <a:p>
-            <a:fld id="{C1FF6DA9-008F-8B48-92A6-B652298478BF}" type="slidenum">
+            <a:fld id="{1F6C2334-BDD3-4B5A-BFA7-22F489CFAFEA}" type="slidenum">
               <a:rPr lang="en-US" smtClean="0"/>
               <a:t>‹#›</a:t>
             </a:fld>
@@ -1390,7 +1601,7 @@
     </p:spTree>
     <p:extLst>
       <p:ext uri="{BB962C8B-B14F-4D97-AF65-F5344CB8AC3E}">
-        <p14:creationId xmlns:p14="http://schemas.microsoft.com/office/powerpoint/2010/main" val="2782244947"/>
+        <p14:creationId xmlns:p14="http://schemas.microsoft.com/office/powerpoint/2010/main" val="1676290457"/>
       </p:ext>
     </p:extLst>
   </p:cSld>
@@ -1419,7 +1630,13 @@
       </p:grpSpPr>
       <p:sp>
         <p:nvSpPr>
-          <p:cNvPr id="2" name="Title 1"/>
+          <p:cNvPr id="2" name="Title 1">
+            <a:extLst>
+              <a:ext uri="{FF2B5EF4-FFF2-40B4-BE49-F238E27FC236}">
+                <a16:creationId xmlns:a16="http://schemas.microsoft.com/office/drawing/2014/main" id="{4C474B5F-92F8-178B-A927-E8728C9DD67F}"/>
+              </a:ext>
+            </a:extLst>
+          </p:cNvPr>
           <p:cNvSpPr>
             <a:spLocks noGrp="1"/>
           </p:cNvSpPr>
@@ -1427,26 +1644,32 @@
             <p:ph type="title"/>
           </p:nvPr>
         </p:nvSpPr>
-        <p:spPr/>
-        <p:txBody>
-          <a:bodyPr/>
-          <a:lstStyle>
-            <a:lvl1pPr>
-              <a:defRPr/>
-            </a:lvl1pPr>
-          </a:lstStyle>
-          <a:p>
-            <a:r>
-              <a:rPr lang="en-US" smtClean="0"/>
+        <p:spPr>
+          <a:xfrm>
+            <a:off x="839788" y="365125"/>
+            <a:ext cx="10515600" cy="1325563"/>
+          </a:xfrm>
+        </p:spPr>
+        <p:txBody>
+          <a:bodyPr/>
+          <a:lstStyle/>
+          <a:p>
+            <a:r>
+              <a:rPr lang="en-US"/>
               <a:t>Click to edit Master title style</a:t>
             </a:r>
-            <a:endParaRPr lang="en-US"/>
-          </a:p>
-        </p:txBody>
-      </p:sp>
-      <p:sp>
-        <p:nvSpPr>
-          <p:cNvPr id="3" name="Text Placeholder 2"/>
+          </a:p>
+        </p:txBody>
+      </p:sp>
+      <p:sp>
+        <p:nvSpPr>
+          <p:cNvPr id="3" name="Text Placeholder 2">
+            <a:extLst>
+              <a:ext uri="{FF2B5EF4-FFF2-40B4-BE49-F238E27FC236}">
+                <a16:creationId xmlns:a16="http://schemas.microsoft.com/office/drawing/2014/main" id="{B21ED377-31A6-4F6A-0503-6FC97E3F4892}"/>
+              </a:ext>
+            </a:extLst>
+          </p:cNvPr>
           <p:cNvSpPr>
             <a:spLocks noGrp="1"/>
           </p:cNvSpPr>
@@ -1456,8 +1679,8 @@
         </p:nvSpPr>
         <p:spPr>
           <a:xfrm>
-            <a:off x="457200" y="1535113"/>
-            <a:ext cx="4040188" cy="639762"/>
+            <a:off x="839788" y="1681163"/>
+            <a:ext cx="5157787" cy="823912"/>
           </a:xfrm>
         </p:spPr>
         <p:txBody>
@@ -1503,7 +1726,7 @@
           <a:p>
             <a:pPr lvl="0"/>
             <a:r>
-              <a:rPr lang="en-US" smtClean="0"/>
+              <a:rPr lang="en-US"/>
               <a:t>Click to edit Master text styles</a:t>
             </a:r>
           </a:p>
@@ -1511,7 +1734,13 @@
       </p:sp>
       <p:sp>
         <p:nvSpPr>
-          <p:cNvPr id="4" name="Content Placeholder 3"/>
+          <p:cNvPr id="4" name="Content Placeholder 3">
+            <a:extLst>
+              <a:ext uri="{FF2B5EF4-FFF2-40B4-BE49-F238E27FC236}">
+                <a16:creationId xmlns:a16="http://schemas.microsoft.com/office/drawing/2014/main" id="{8D6A1C2E-49D0-310E-C909-275F74373802}"/>
+              </a:ext>
+            </a:extLst>
+          </p:cNvPr>
           <p:cNvSpPr>
             <a:spLocks noGrp="1"/>
           </p:cNvSpPr>
@@ -1521,82 +1750,59 @@
         </p:nvSpPr>
         <p:spPr>
           <a:xfrm>
-            <a:off x="457200" y="2174875"/>
-            <a:ext cx="4040188" cy="3951288"/>
-          </a:xfrm>
-        </p:spPr>
-        <p:txBody>
-          <a:bodyPr/>
-          <a:lstStyle>
-            <a:lvl1pPr>
-              <a:defRPr sz="2400"/>
-            </a:lvl1pPr>
-            <a:lvl2pPr>
-              <a:defRPr sz="2000"/>
-            </a:lvl2pPr>
-            <a:lvl3pPr>
-              <a:defRPr sz="1800"/>
-            </a:lvl3pPr>
-            <a:lvl4pPr>
-              <a:defRPr sz="1600"/>
-            </a:lvl4pPr>
-            <a:lvl5pPr>
-              <a:defRPr sz="1600"/>
-            </a:lvl5pPr>
-            <a:lvl6pPr>
-              <a:defRPr sz="1600"/>
-            </a:lvl6pPr>
-            <a:lvl7pPr>
-              <a:defRPr sz="1600"/>
-            </a:lvl7pPr>
-            <a:lvl8pPr>
-              <a:defRPr sz="1600"/>
-            </a:lvl8pPr>
-            <a:lvl9pPr>
-              <a:defRPr sz="1600"/>
-            </a:lvl9pPr>
-          </a:lstStyle>
+            <a:off x="839788" y="2505075"/>
+            <a:ext cx="5157787" cy="3684588"/>
+          </a:xfrm>
+        </p:spPr>
+        <p:txBody>
+          <a:bodyPr/>
+          <a:lstStyle/>
           <a:p>
             <a:pPr lvl="0"/>
             <a:r>
-              <a:rPr lang="en-US" smtClean="0"/>
+              <a:rPr lang="en-US"/>
               <a:t>Click to edit Master text styles</a:t>
             </a:r>
           </a:p>
           <a:p>
             <a:pPr lvl="1"/>
             <a:r>
-              <a:rPr lang="en-US" smtClean="0"/>
+              <a:rPr lang="en-US"/>
               <a:t>Second level</a:t>
             </a:r>
           </a:p>
           <a:p>
             <a:pPr lvl="2"/>
             <a:r>
-              <a:rPr lang="en-US" smtClean="0"/>
+              <a:rPr lang="en-US"/>
               <a:t>Third level</a:t>
             </a:r>
           </a:p>
           <a:p>
             <a:pPr lvl="3"/>
             <a:r>
-              <a:rPr lang="en-US" smtClean="0"/>
+              <a:rPr lang="en-US"/>
               <a:t>Fourth level</a:t>
             </a:r>
           </a:p>
           <a:p>
             <a:pPr lvl="4"/>
             <a:r>
-              <a:rPr lang="en-US" smtClean="0"/>
+              <a:rPr lang="en-US"/>
               <a:t>Fifth level</a:t>
             </a:r>
-            <a:endParaRPr lang="en-US"/>
-          </a:p>
-        </p:txBody>
-      </p:sp>
-      <p:sp>
-        <p:nvSpPr>
-          <p:cNvPr id="5" name="Text Placeholder 4"/>
+          </a:p>
+        </p:txBody>
+      </p:sp>
+      <p:sp>
+        <p:nvSpPr>
+          <p:cNvPr id="5" name="Text Placeholder 4">
+            <a:extLst>
+              <a:ext uri="{FF2B5EF4-FFF2-40B4-BE49-F238E27FC236}">
+                <a16:creationId xmlns:a16="http://schemas.microsoft.com/office/drawing/2014/main" id="{2990EE38-022C-6980-7AE5-1E529D27CCC1}"/>
+              </a:ext>
+            </a:extLst>
+          </p:cNvPr>
           <p:cNvSpPr>
             <a:spLocks noGrp="1"/>
           </p:cNvSpPr>
@@ -1606,8 +1812,8 @@
         </p:nvSpPr>
         <p:spPr>
           <a:xfrm>
-            <a:off x="4645025" y="1535113"/>
-            <a:ext cx="4041775" cy="639762"/>
+            <a:off x="6172200" y="1681163"/>
+            <a:ext cx="5183188" cy="823912"/>
           </a:xfrm>
         </p:spPr>
         <p:txBody>
@@ -1653,115 +1859,98 @@
           <a:p>
             <a:pPr lvl="0"/>
             <a:r>
+              <a:rPr lang="en-US"/>
+              <a:t>Click to edit Master text styles</a:t>
+            </a:r>
+          </a:p>
+        </p:txBody>
+      </p:sp>
+      <p:sp>
+        <p:nvSpPr>
+          <p:cNvPr id="6" name="Content Placeholder 5">
+            <a:extLst>
+              <a:ext uri="{FF2B5EF4-FFF2-40B4-BE49-F238E27FC236}">
+                <a16:creationId xmlns:a16="http://schemas.microsoft.com/office/drawing/2014/main" id="{C7A6D4EB-D736-8F4F-840C-5F5AC877A1A8}"/>
+              </a:ext>
+            </a:extLst>
+          </p:cNvPr>
+          <p:cNvSpPr>
+            <a:spLocks noGrp="1"/>
+          </p:cNvSpPr>
+          <p:nvPr>
+            <p:ph sz="quarter" idx="4"/>
+          </p:nvPr>
+        </p:nvSpPr>
+        <p:spPr>
+          <a:xfrm>
+            <a:off x="6172200" y="2505075"/>
+            <a:ext cx="5183188" cy="3684588"/>
+          </a:xfrm>
+        </p:spPr>
+        <p:txBody>
+          <a:bodyPr/>
+          <a:lstStyle/>
+          <a:p>
+            <a:pPr lvl="0"/>
+            <a:r>
+              <a:rPr lang="en-US"/>
+              <a:t>Click to edit Master text styles</a:t>
+            </a:r>
+          </a:p>
+          <a:p>
+            <a:pPr lvl="1"/>
+            <a:r>
+              <a:rPr lang="en-US"/>
+              <a:t>Second level</a:t>
+            </a:r>
+          </a:p>
+          <a:p>
+            <a:pPr lvl="2"/>
+            <a:r>
+              <a:rPr lang="en-US"/>
+              <a:t>Third level</a:t>
+            </a:r>
+          </a:p>
+          <a:p>
+            <a:pPr lvl="3"/>
+            <a:r>
+              <a:rPr lang="en-US"/>
+              <a:t>Fourth level</a:t>
+            </a:r>
+          </a:p>
+          <a:p>
+            <a:pPr lvl="4"/>
+            <a:r>
+              <a:rPr lang="en-US"/>
+              <a:t>Fifth level</a:t>
+            </a:r>
+          </a:p>
+        </p:txBody>
+      </p:sp>
+      <p:sp>
+        <p:nvSpPr>
+          <p:cNvPr id="7" name="Date Placeholder 6">
+            <a:extLst>
+              <a:ext uri="{FF2B5EF4-FFF2-40B4-BE49-F238E27FC236}">
+                <a16:creationId xmlns:a16="http://schemas.microsoft.com/office/drawing/2014/main" id="{9D146CEC-C9B5-4A70-FCA1-78FA407F75AF}"/>
+              </a:ext>
+            </a:extLst>
+          </p:cNvPr>
+          <p:cNvSpPr>
+            <a:spLocks noGrp="1"/>
+          </p:cNvSpPr>
+          <p:nvPr>
+            <p:ph type="dt" sz="half" idx="10"/>
+          </p:nvPr>
+        </p:nvSpPr>
+        <p:spPr/>
+        <p:txBody>
+          <a:bodyPr/>
+          <a:lstStyle/>
+          <a:p>
+            <a:fld id="{FCBA1D2B-2537-4D61-9387-23A02DC35F45}" type="datetimeFigureOut">
               <a:rPr lang="en-US" smtClean="0"/>
-              <a:t>Click to edit Master text styles</a:t>
-            </a:r>
-          </a:p>
-        </p:txBody>
-      </p:sp>
-      <p:sp>
-        <p:nvSpPr>
-          <p:cNvPr id="6" name="Content Placeholder 5"/>
-          <p:cNvSpPr>
-            <a:spLocks noGrp="1"/>
-          </p:cNvSpPr>
-          <p:nvPr>
-            <p:ph sz="quarter" idx="4"/>
-          </p:nvPr>
-        </p:nvSpPr>
-        <p:spPr>
-          <a:xfrm>
-            <a:off x="4645025" y="2174875"/>
-            <a:ext cx="4041775" cy="3951288"/>
-          </a:xfrm>
-        </p:spPr>
-        <p:txBody>
-          <a:bodyPr/>
-          <a:lstStyle>
-            <a:lvl1pPr>
-              <a:defRPr sz="2400"/>
-            </a:lvl1pPr>
-            <a:lvl2pPr>
-              <a:defRPr sz="2000"/>
-            </a:lvl2pPr>
-            <a:lvl3pPr>
-              <a:defRPr sz="1800"/>
-            </a:lvl3pPr>
-            <a:lvl4pPr>
-              <a:defRPr sz="1600"/>
-            </a:lvl4pPr>
-            <a:lvl5pPr>
-              <a:defRPr sz="1600"/>
-            </a:lvl5pPr>
-            <a:lvl6pPr>
-              <a:defRPr sz="1600"/>
-            </a:lvl6pPr>
-            <a:lvl7pPr>
-              <a:defRPr sz="1600"/>
-            </a:lvl7pPr>
-            <a:lvl8pPr>
-              <a:defRPr sz="1600"/>
-            </a:lvl8pPr>
-            <a:lvl9pPr>
-              <a:defRPr sz="1600"/>
-            </a:lvl9pPr>
-          </a:lstStyle>
-          <a:p>
-            <a:pPr lvl="0"/>
-            <a:r>
-              <a:rPr lang="en-US" smtClean="0"/>
-              <a:t>Click to edit Master text styles</a:t>
-            </a:r>
-          </a:p>
-          <a:p>
-            <a:pPr lvl="1"/>
-            <a:r>
-              <a:rPr lang="en-US" smtClean="0"/>
-              <a:t>Second level</a:t>
-            </a:r>
-          </a:p>
-          <a:p>
-            <a:pPr lvl="2"/>
-            <a:r>
-              <a:rPr lang="en-US" smtClean="0"/>
-              <a:t>Third level</a:t>
-            </a:r>
-          </a:p>
-          <a:p>
-            <a:pPr lvl="3"/>
-            <a:r>
-              <a:rPr lang="en-US" smtClean="0"/>
-              <a:t>Fourth level</a:t>
-            </a:r>
-          </a:p>
-          <a:p>
-            <a:pPr lvl="4"/>
-            <a:r>
-              <a:rPr lang="en-US" smtClean="0"/>
-              <a:t>Fifth level</a:t>
-            </a:r>
-            <a:endParaRPr lang="en-US"/>
-          </a:p>
-        </p:txBody>
-      </p:sp>
-      <p:sp>
-        <p:nvSpPr>
-          <p:cNvPr id="7" name="Date Placeholder 6"/>
-          <p:cNvSpPr>
-            <a:spLocks noGrp="1"/>
-          </p:cNvSpPr>
-          <p:nvPr>
-            <p:ph type="dt" sz="half" idx="10"/>
-          </p:nvPr>
-        </p:nvSpPr>
-        <p:spPr/>
-        <p:txBody>
-          <a:bodyPr/>
-          <a:lstStyle/>
-          <a:p>
-            <a:fld id="{5BCAD085-E8A6-8845-BD4E-CB4CCA059FC4}" type="datetimeFigureOut">
-              <a:rPr lang="en-US" smtClean="0"/>
-              <a:t>1/27/13</a:t>
+              <a:t>2/12/2026</a:t>
             </a:fld>
             <a:endParaRPr lang="en-US"/>
           </a:p>
@@ -1769,7 +1958,13 @@
       </p:sp>
       <p:sp>
         <p:nvSpPr>
-          <p:cNvPr id="8" name="Footer Placeholder 7"/>
+          <p:cNvPr id="8" name="Footer Placeholder 7">
+            <a:extLst>
+              <a:ext uri="{FF2B5EF4-FFF2-40B4-BE49-F238E27FC236}">
+                <a16:creationId xmlns:a16="http://schemas.microsoft.com/office/drawing/2014/main" id="{9BDB9038-C6A6-0424-0057-16167FDEC35A}"/>
+              </a:ext>
+            </a:extLst>
+          </p:cNvPr>
           <p:cNvSpPr>
             <a:spLocks noGrp="1"/>
           </p:cNvSpPr>
@@ -1788,7 +1983,13 @@
       </p:sp>
       <p:sp>
         <p:nvSpPr>
-          <p:cNvPr id="9" name="Slide Number Placeholder 8"/>
+          <p:cNvPr id="9" name="Slide Number Placeholder 8">
+            <a:extLst>
+              <a:ext uri="{FF2B5EF4-FFF2-40B4-BE49-F238E27FC236}">
+                <a16:creationId xmlns:a16="http://schemas.microsoft.com/office/drawing/2014/main" id="{630521EB-5F60-35C8-F38C-8922D4E2EC45}"/>
+              </a:ext>
+            </a:extLst>
+          </p:cNvPr>
           <p:cNvSpPr>
             <a:spLocks noGrp="1"/>
           </p:cNvSpPr>
@@ -1801,7 +2002,7 @@
           <a:bodyPr/>
           <a:lstStyle/>
           <a:p>
-            <a:fld id="{C1FF6DA9-008F-8B48-92A6-B652298478BF}" type="slidenum">
+            <a:fld id="{1F6C2334-BDD3-4B5A-BFA7-22F489CFAFEA}" type="slidenum">
               <a:rPr lang="en-US" smtClean="0"/>
               <a:t>‹#›</a:t>
             </a:fld>
@@ -1812,7 +2013,7 @@
     </p:spTree>
     <p:extLst>
       <p:ext uri="{BB962C8B-B14F-4D97-AF65-F5344CB8AC3E}">
-        <p14:creationId xmlns:p14="http://schemas.microsoft.com/office/powerpoint/2010/main" val="990158736"/>
+        <p14:creationId xmlns:p14="http://schemas.microsoft.com/office/powerpoint/2010/main" val="4199810328"/>
       </p:ext>
     </p:extLst>
   </p:cSld>
@@ -1841,7 +2042,13 @@
       </p:grpSpPr>
       <p:sp>
         <p:nvSpPr>
-          <p:cNvPr id="2" name="Title 1"/>
+          <p:cNvPr id="2" name="Title 1">
+            <a:extLst>
+              <a:ext uri="{FF2B5EF4-FFF2-40B4-BE49-F238E27FC236}">
+                <a16:creationId xmlns:a16="http://schemas.microsoft.com/office/drawing/2014/main" id="{F943AF14-C5BA-A0BD-2BCC-5C0355A886D4}"/>
+              </a:ext>
+            </a:extLst>
+          </p:cNvPr>
           <p:cNvSpPr>
             <a:spLocks noGrp="1"/>
           </p:cNvSpPr>
@@ -1855,31 +2062,36 @@
           <a:lstStyle/>
           <a:p>
             <a:r>
+              <a:rPr lang="en-US"/>
+              <a:t>Click to edit Master title style</a:t>
+            </a:r>
+          </a:p>
+        </p:txBody>
+      </p:sp>
+      <p:sp>
+        <p:nvSpPr>
+          <p:cNvPr id="3" name="Date Placeholder 2">
+            <a:extLst>
+              <a:ext uri="{FF2B5EF4-FFF2-40B4-BE49-F238E27FC236}">
+                <a16:creationId xmlns:a16="http://schemas.microsoft.com/office/drawing/2014/main" id="{DE66F26E-2B3E-E1B2-E204-FB57C0C8B4C7}"/>
+              </a:ext>
+            </a:extLst>
+          </p:cNvPr>
+          <p:cNvSpPr>
+            <a:spLocks noGrp="1"/>
+          </p:cNvSpPr>
+          <p:nvPr>
+            <p:ph type="dt" sz="half" idx="10"/>
+          </p:nvPr>
+        </p:nvSpPr>
+        <p:spPr/>
+        <p:txBody>
+          <a:bodyPr/>
+          <a:lstStyle/>
+          <a:p>
+            <a:fld id="{FCBA1D2B-2537-4D61-9387-23A02DC35F45}" type="datetimeFigureOut">
               <a:rPr lang="en-US" smtClean="0"/>
-              <a:t>Click to edit Master title style</a:t>
-            </a:r>
-            <a:endParaRPr lang="en-US"/>
-          </a:p>
-        </p:txBody>
-      </p:sp>
-      <p:sp>
-        <p:nvSpPr>
-          <p:cNvPr id="3" name="Date Placeholder 2"/>
-          <p:cNvSpPr>
-            <a:spLocks noGrp="1"/>
-          </p:cNvSpPr>
-          <p:nvPr>
-            <p:ph type="dt" sz="half" idx="10"/>
-          </p:nvPr>
-        </p:nvSpPr>
-        <p:spPr/>
-        <p:txBody>
-          <a:bodyPr/>
-          <a:lstStyle/>
-          <a:p>
-            <a:fld id="{5BCAD085-E8A6-8845-BD4E-CB4CCA059FC4}" type="datetimeFigureOut">
-              <a:rPr lang="en-US" smtClean="0"/>
-              <a:t>1/27/13</a:t>
+              <a:t>2/12/2026</a:t>
             </a:fld>
             <a:endParaRPr lang="en-US"/>
           </a:p>
@@ -1887,7 +2099,13 @@
       </p:sp>
       <p:sp>
         <p:nvSpPr>
-          <p:cNvPr id="4" name="Footer Placeholder 3"/>
+          <p:cNvPr id="4" name="Footer Placeholder 3">
+            <a:extLst>
+              <a:ext uri="{FF2B5EF4-FFF2-40B4-BE49-F238E27FC236}">
+                <a16:creationId xmlns:a16="http://schemas.microsoft.com/office/drawing/2014/main" id="{1341FB6E-B085-44EA-74FE-BA186848651B}"/>
+              </a:ext>
+            </a:extLst>
+          </p:cNvPr>
           <p:cNvSpPr>
             <a:spLocks noGrp="1"/>
           </p:cNvSpPr>
@@ -1906,7 +2124,13 @@
       </p:sp>
       <p:sp>
         <p:nvSpPr>
-          <p:cNvPr id="5" name="Slide Number Placeholder 4"/>
+          <p:cNvPr id="5" name="Slide Number Placeholder 4">
+            <a:extLst>
+              <a:ext uri="{FF2B5EF4-FFF2-40B4-BE49-F238E27FC236}">
+                <a16:creationId xmlns:a16="http://schemas.microsoft.com/office/drawing/2014/main" id="{8C241FE2-BD68-23E1-8E69-8B1B1910A2F6}"/>
+              </a:ext>
+            </a:extLst>
+          </p:cNvPr>
           <p:cNvSpPr>
             <a:spLocks noGrp="1"/>
           </p:cNvSpPr>
@@ -1919,7 +2143,7 @@
           <a:bodyPr/>
           <a:lstStyle/>
           <a:p>
-            <a:fld id="{C1FF6DA9-008F-8B48-92A6-B652298478BF}" type="slidenum">
+            <a:fld id="{1F6C2334-BDD3-4B5A-BFA7-22F489CFAFEA}" type="slidenum">
               <a:rPr lang="en-US" smtClean="0"/>
               <a:t>‹#›</a:t>
             </a:fld>
@@ -1930,7 +2154,7 @@
     </p:spTree>
     <p:extLst>
       <p:ext uri="{BB962C8B-B14F-4D97-AF65-F5344CB8AC3E}">
-        <p14:creationId xmlns:p14="http://schemas.microsoft.com/office/powerpoint/2010/main" val="727027711"/>
+        <p14:creationId xmlns:p14="http://schemas.microsoft.com/office/powerpoint/2010/main" val="3889377055"/>
       </p:ext>
     </p:extLst>
   </p:cSld>
@@ -1959,7 +2183,13 @@
       </p:grpSpPr>
       <p:sp>
         <p:nvSpPr>
-          <p:cNvPr id="2" name="Date Placeholder 1"/>
+          <p:cNvPr id="2" name="Date Placeholder 1">
+            <a:extLst>
+              <a:ext uri="{FF2B5EF4-FFF2-40B4-BE49-F238E27FC236}">
+                <a16:creationId xmlns:a16="http://schemas.microsoft.com/office/drawing/2014/main" id="{1E70A915-5F3E-0F37-C026-AFEA703F49F6}"/>
+              </a:ext>
+            </a:extLst>
+          </p:cNvPr>
           <p:cNvSpPr>
             <a:spLocks noGrp="1"/>
           </p:cNvSpPr>
@@ -1972,9 +2202,9 @@
           <a:bodyPr/>
           <a:lstStyle/>
           <a:p>
-            <a:fld id="{5BCAD085-E8A6-8845-BD4E-CB4CCA059FC4}" type="datetimeFigureOut">
+            <a:fld id="{FCBA1D2B-2537-4D61-9387-23A02DC35F45}" type="datetimeFigureOut">
               <a:rPr lang="en-US" smtClean="0"/>
-              <a:t>1/27/13</a:t>
+              <a:t>2/12/2026</a:t>
             </a:fld>
             <a:endParaRPr lang="en-US"/>
           </a:p>
@@ -1982,7 +2212,13 @@
       </p:sp>
       <p:sp>
         <p:nvSpPr>
-          <p:cNvPr id="3" name="Footer Placeholder 2"/>
+          <p:cNvPr id="3" name="Footer Placeholder 2">
+            <a:extLst>
+              <a:ext uri="{FF2B5EF4-FFF2-40B4-BE49-F238E27FC236}">
+                <a16:creationId xmlns:a16="http://schemas.microsoft.com/office/drawing/2014/main" id="{42B8D61F-3F02-41CB-9FE6-D76719EBE37C}"/>
+              </a:ext>
+            </a:extLst>
+          </p:cNvPr>
           <p:cNvSpPr>
             <a:spLocks noGrp="1"/>
           </p:cNvSpPr>
@@ -2001,7 +2237,13 @@
       </p:sp>
       <p:sp>
         <p:nvSpPr>
-          <p:cNvPr id="4" name="Slide Number Placeholder 3"/>
+          <p:cNvPr id="4" name="Slide Number Placeholder 3">
+            <a:extLst>
+              <a:ext uri="{FF2B5EF4-FFF2-40B4-BE49-F238E27FC236}">
+                <a16:creationId xmlns:a16="http://schemas.microsoft.com/office/drawing/2014/main" id="{8DCB4E02-ACCF-A03E-B4BE-D93F99A29111}"/>
+              </a:ext>
+            </a:extLst>
+          </p:cNvPr>
           <p:cNvSpPr>
             <a:spLocks noGrp="1"/>
           </p:cNvSpPr>
@@ -2014,7 +2256,7 @@
           <a:bodyPr/>
           <a:lstStyle/>
           <a:p>
-            <a:fld id="{C1FF6DA9-008F-8B48-92A6-B652298478BF}" type="slidenum">
+            <a:fld id="{1F6C2334-BDD3-4B5A-BFA7-22F489CFAFEA}" type="slidenum">
               <a:rPr lang="en-US" smtClean="0"/>
               <a:t>‹#›</a:t>
             </a:fld>
@@ -2025,7 +2267,7 @@
     </p:spTree>
     <p:extLst>
       <p:ext uri="{BB962C8B-B14F-4D97-AF65-F5344CB8AC3E}">
-        <p14:creationId xmlns:p14="http://schemas.microsoft.com/office/powerpoint/2010/main" val="1212999818"/>
+        <p14:creationId xmlns:p14="http://schemas.microsoft.com/office/powerpoint/2010/main" val="3044351020"/>
       </p:ext>
     </p:extLst>
   </p:cSld>
@@ -2036,6 +2278,285 @@
 </file>
 
 <file path=ppt/slideLayouts/slideLayout8.xml><?xml version="1.0" encoding="utf-8"?>
+<p:sldLayout xmlns:a="http://schemas.openxmlformats.org/drawingml/2006/main" xmlns:r="http://schemas.openxmlformats.org/officeDocument/2006/relationships" xmlns:p="http://schemas.openxmlformats.org/presentationml/2006/main" showMasterSp="0" preserve="1">
+  <p:cSld name="Side Panel with Picture">
+    <p:spTree>
+      <p:nvGrpSpPr>
+        <p:cNvPr id="1" name=""/>
+        <p:cNvGrpSpPr/>
+        <p:nvPr/>
+      </p:nvGrpSpPr>
+      <p:grpSpPr>
+        <a:xfrm>
+          <a:off x="0" y="0"/>
+          <a:ext cx="0" cy="0"/>
+          <a:chOff x="0" y="0"/>
+          <a:chExt cx="0" cy="0"/>
+        </a:xfrm>
+      </p:grpSpPr>
+      <p:sp>
+        <p:nvSpPr>
+          <p:cNvPr id="10" name="Side Panel"/>
+          <p:cNvSpPr/>
+          <p:nvPr userDrawn="1"/>
+        </p:nvSpPr>
+        <p:spPr>
+          <a:xfrm>
+            <a:off x="0" y="0"/>
+            <a:ext cx="3857297" cy="6858000"/>
+          </a:xfrm>
+          <a:prstGeom prst="rect">
+            <a:avLst/>
+          </a:prstGeom>
+          <a:solidFill>
+            <a:srgbClr val="4472C4"/>
+          </a:solidFill>
+          <a:ln>
+            <a:noFill/>
+          </a:ln>
+        </p:spPr>
+        <p:txBody>
+          <a:bodyPr/>
+          <a:lstStyle/>
+          <a:p>
+            <a:endParaRPr lang="en-US"/>
+          </a:p>
+        </p:txBody>
+      </p:sp>
+      <p:cxnSp>
+        <p:nvCxnSpPr>
+          <p:cNvPr id="15" name="Divider Line"/>
+          <p:cNvCxnSpPr/>
+          <p:nvPr userDrawn="1"/>
+        </p:nvCxnSpPr>
+        <p:spPr>
+          <a:xfrm>
+            <a:off x="0" y="2469931"/>
+            <a:ext cx="3857296" cy="0"/>
+          </a:xfrm>
+          <a:prstGeom prst="line">
+            <a:avLst/>
+          </a:prstGeom>
+          <a:ln w="6350">
+            <a:solidFill>
+              <a:schemeClr val="tx2">
+                <a:lumMod val="25000"/>
+                <a:lumOff val="75000"/>
+              </a:schemeClr>
+            </a:solidFill>
+          </a:ln>
+        </p:spPr>
+      </p:cxnSp>
+      <p:pic>
+        <p:nvPicPr>
+          <p:cNvPr id="16" name="Logo"/>
+          <p:cNvPicPr>
+            <a:picLocks noChangeAspect="1"/>
+          </p:cNvPicPr>
+          <p:nvPr userDrawn="1"/>
+        </p:nvPicPr>
+        <p:blipFill>
+          <a:blip r:embed="rId2"/>
+          <a:stretch>
+            <a:fillRect/>
+          </a:stretch>
+        </p:blipFill>
+        <p:spPr>
+          <a:xfrm>
+            <a:off x="255798" y="6384036"/>
+            <a:ext cx="1199069" cy="257820"/>
+          </a:xfrm>
+          <a:prstGeom prst="rect">
+            <a:avLst/>
+          </a:prstGeom>
+        </p:spPr>
+      </p:pic>
+      <p:sp>
+        <p:nvSpPr>
+          <p:cNvPr id="12" name="Title 1"/>
+          <p:cNvSpPr>
+            <a:spLocks noGrp="1"/>
+          </p:cNvSpPr>
+          <p:nvPr>
+            <p:ph type="title"/>
+          </p:nvPr>
+        </p:nvSpPr>
+        <p:spPr>
+          <a:xfrm>
+            <a:off x="354105" y="284672"/>
+            <a:ext cx="3225675" cy="857250"/>
+          </a:xfrm>
+        </p:spPr>
+        <p:txBody>
+          <a:bodyPr vert="horz" lIns="91440" tIns="45720" rIns="91440" bIns="45720" anchor="t">
+            <a:normAutofit/>
+          </a:bodyPr>
+          <a:lstStyle>
+            <a:lvl1pPr algn="l">
+              <a:defRPr sz="2400" b="1">
+                <a:solidFill>
+                  <a:srgbClr val="FFFFFF"/>
+                </a:solidFill>
+              </a:defRPr>
+            </a:lvl1pPr>
+          </a:lstStyle>
+          <a:p>
+            <a:r>
+              <a:rPr lang="en-US"/>
+              <a:t>Click to edit Master title style</a:t>
+            </a:r>
+          </a:p>
+        </p:txBody>
+      </p:sp>
+      <p:sp>
+        <p:nvSpPr>
+          <p:cNvPr id="13" name="Text Placeholder 3"/>
+          <p:cNvSpPr>
+            <a:spLocks noGrp="1"/>
+          </p:cNvSpPr>
+          <p:nvPr>
+            <p:ph type="body" idx="2"/>
+          </p:nvPr>
+        </p:nvSpPr>
+        <p:spPr>
+          <a:xfrm>
+            <a:off x="342058" y="2915728"/>
+            <a:ext cx="3306731" cy="3200000"/>
+          </a:xfrm>
+        </p:spPr>
+        <p:txBody>
+          <a:bodyPr wrap="square">
+            <a:spAutoFit/>
+          </a:bodyPr>
+          <a:lstStyle>
+            <a:lvl1pPr marL="285750" indent="-285750">
+              <a:buFont typeface="Arial"/>
+              <a:buChar char="•"/>
+              <a:defRPr sz="1800">
+                <a:solidFill>
+                  <a:schemeClr val="bg1"/>
+                </a:solidFill>
+              </a:defRPr>
+            </a:lvl1pPr>
+          </a:lstStyle>
+          <a:p>
+            <a:pPr lvl="0"/>
+            <a:r>
+              <a:rPr lang="en-US"/>
+              <a:t>Click to edit Master text styles</a:t>
+            </a:r>
+          </a:p>
+        </p:txBody>
+      </p:sp>
+      <p:sp>
+        <p:nvSpPr>
+          <p:cNvPr id="14" name="Picture Placeholder 2"/>
+          <p:cNvSpPr>
+            <a:spLocks noGrp="1"/>
+          </p:cNvSpPr>
+          <p:nvPr>
+            <p:ph type="pic" idx="1"/>
+          </p:nvPr>
+        </p:nvSpPr>
+        <p:spPr>
+          <a:xfrm>
+            <a:off x="4046475" y="215657"/>
+            <a:ext cx="7924800" cy="6449543"/>
+          </a:xfrm>
+        </p:spPr>
+      </p:sp>
+      <p:sp>
+        <p:nvSpPr>
+          <p:cNvPr id="17" name="Subtitle"/>
+          <p:cNvSpPr>
+            <a:spLocks noGrp="1"/>
+          </p:cNvSpPr>
+          <p:nvPr>
+            <p:ph type="body" sz="quarter" idx="11"/>
+          </p:nvPr>
+        </p:nvSpPr>
+        <p:spPr>
+          <a:xfrm>
+            <a:off x="354105" y="1190625"/>
+            <a:ext cx="3225675" cy="640080"/>
+          </a:xfrm>
+        </p:spPr>
+        <p:txBody>
+          <a:bodyPr vert="horz" lIns="91440" tIns="0" rIns="91440" bIns="0" anchor="t">
+            <a:normAutofit/>
+          </a:bodyPr>
+          <a:lstStyle>
+            <a:lvl1pPr marL="0" indent="0" algn="l">
+              <a:buNone/>
+              <a:defRPr sz="1800" b="0">
+                <a:solidFill>
+                  <a:srgbClr val="FFFFFF"/>
+                </a:solidFill>
+              </a:defRPr>
+            </a:lvl1pPr>
+          </a:lstStyle>
+          <a:p>
+            <a:pPr lvl="0"/>
+            <a:r>
+              <a:rPr lang="en-US"/>
+              <a:t>Click to edit Master text styles</a:t>
+            </a:r>
+          </a:p>
+        </p:txBody>
+      </p:sp>
+      <p:sp>
+        <p:nvSpPr>
+          <p:cNvPr id="18" name="Detail"/>
+          <p:cNvSpPr>
+            <a:spLocks noGrp="1"/>
+          </p:cNvSpPr>
+          <p:nvPr>
+            <p:ph type="body" sz="quarter" idx="12"/>
+          </p:nvPr>
+        </p:nvSpPr>
+        <p:spPr>
+          <a:xfrm>
+            <a:off x="354105" y="1874520"/>
+            <a:ext cx="3225675" cy="594360"/>
+          </a:xfrm>
+        </p:spPr>
+        <p:txBody>
+          <a:bodyPr vert="horz" lIns="91440" tIns="0" rIns="91440" bIns="0" anchor="t">
+            <a:normAutofit/>
+          </a:bodyPr>
+          <a:lstStyle>
+            <a:lvl1pPr marL="0" indent="0" algn="l">
+              <a:buNone/>
+              <a:defRPr sz="1400" b="0" i="1">
+                <a:solidFill>
+                  <a:srgbClr val="D0DCE8"/>
+                </a:solidFill>
+              </a:defRPr>
+            </a:lvl1pPr>
+          </a:lstStyle>
+          <a:p>
+            <a:pPr lvl="0"/>
+            <a:r>
+              <a:rPr lang="en-US"/>
+              <a:t>Click to edit Master text styles</a:t>
+            </a:r>
+          </a:p>
+        </p:txBody>
+      </p:sp>
+    </p:spTree>
+    <p:extLst>
+      <p:ext uri="{BB962C8B-B14F-4D97-AF65-F5344CB8AC3E}">
+        <p14:creationId xmlns:p14="http://schemas.microsoft.com/office/powerpoint/2010/main" val="398998912"/>
+      </p:ext>
+    </p:extLst>
+  </p:cSld>
+  <p:clrMapOvr>
+    <a:masterClrMapping/>
+  </p:clrMapOvr>
+</p:sldLayout>
+</file>
+
+<file path=ppt/slideLayouts/slideLayout9.xml><?xml version="1.0" encoding="utf-8"?>
 <p:sldLayout xmlns:a="http://schemas.openxmlformats.org/drawingml/2006/main" xmlns:r="http://schemas.openxmlformats.org/officeDocument/2006/relationships" xmlns:p="http://schemas.openxmlformats.org/presentationml/2006/main" type="objTx" preserve="1">
   <p:cSld name="Content with Caption">
     <p:spTree>
@@ -2054,7 +2575,13 @@
       </p:grpSpPr>
       <p:sp>
         <p:nvSpPr>
-          <p:cNvPr id="2" name="Title 1"/>
+          <p:cNvPr id="2" name="Title 1">
+            <a:extLst>
+              <a:ext uri="{FF2B5EF4-FFF2-40B4-BE49-F238E27FC236}">
+                <a16:creationId xmlns:a16="http://schemas.microsoft.com/office/drawing/2014/main" id="{AC920BB2-026E-1363-2CC1-112543892B6D}"/>
+              </a:ext>
+            </a:extLst>
+          </p:cNvPr>
           <p:cNvSpPr>
             <a:spLocks noGrp="1"/>
           </p:cNvSpPr>
@@ -2064,29 +2591,34 @@
         </p:nvSpPr>
         <p:spPr>
           <a:xfrm>
-            <a:off x="457200" y="273050"/>
-            <a:ext cx="3008313" cy="1162050"/>
+            <a:off x="839788" y="457200"/>
+            <a:ext cx="3932237" cy="1600200"/>
           </a:xfrm>
         </p:spPr>
         <p:txBody>
           <a:bodyPr anchor="b"/>
           <a:lstStyle>
-            <a:lvl1pPr algn="l">
-              <a:defRPr sz="2000" b="1"/>
+            <a:lvl1pPr>
+              <a:defRPr sz="3200"/>
             </a:lvl1pPr>
           </a:lstStyle>
           <a:p>
             <a:r>
-              <a:rPr lang="en-US" smtClean="0"/>
+              <a:rPr lang="en-US"/>
               <a:t>Click to edit Master title style</a:t>
             </a:r>
-            <a:endParaRPr lang="en-US"/>
-          </a:p>
-        </p:txBody>
-      </p:sp>
-      <p:sp>
-        <p:nvSpPr>
-          <p:cNvPr id="3" name="Content Placeholder 2"/>
+          </a:p>
+        </p:txBody>
+      </p:sp>
+      <p:sp>
+        <p:nvSpPr>
+          <p:cNvPr id="3" name="Content Placeholder 2">
+            <a:extLst>
+              <a:ext uri="{FF2B5EF4-FFF2-40B4-BE49-F238E27FC236}">
+                <a16:creationId xmlns:a16="http://schemas.microsoft.com/office/drawing/2014/main" id="{108B711B-3280-AD97-E832-B29AE72CD5BD}"/>
+              </a:ext>
+            </a:extLst>
+          </p:cNvPr>
           <p:cNvSpPr>
             <a:spLocks noGrp="1"/>
           </p:cNvSpPr>
@@ -2096,8 +2628,8 @@
         </p:nvSpPr>
         <p:spPr>
           <a:xfrm>
-            <a:off x="3575050" y="273050"/>
-            <a:ext cx="5111750" cy="5853113"/>
+            <a:off x="5183188" y="987425"/>
+            <a:ext cx="6172200" cy="4873625"/>
           </a:xfrm>
         </p:spPr>
         <p:txBody>
@@ -2134,44 +2666,49 @@
           <a:p>
             <a:pPr lvl="0"/>
             <a:r>
-              <a:rPr lang="en-US" smtClean="0"/>
+              <a:rPr lang="en-US"/>
               <a:t>Click to edit Master text styles</a:t>
             </a:r>
           </a:p>
           <a:p>
             <a:pPr lvl="1"/>
             <a:r>
-              <a:rPr lang="en-US" smtClean="0"/>
+              <a:rPr lang="en-US"/>
               <a:t>Second level</a:t>
             </a:r>
           </a:p>
           <a:p>
             <a:pPr lvl="2"/>
             <a:r>
-              <a:rPr lang="en-US" smtClean="0"/>
+              <a:rPr lang="en-US"/>
               <a:t>Third level</a:t>
             </a:r>
           </a:p>
           <a:p>
             <a:pPr lvl="3"/>
             <a:r>
-              <a:rPr lang="en-US" smtClean="0"/>
+              <a:rPr lang="en-US"/>
               <a:t>Fourth level</a:t>
             </a:r>
           </a:p>
           <a:p>
             <a:pPr lvl="4"/>
             <a:r>
-              <a:rPr lang="en-US" smtClean="0"/>
+              <a:rPr lang="en-US"/>
               <a:t>Fifth level</a:t>
             </a:r>
-            <a:endParaRPr lang="en-US"/>
-          </a:p>
-        </p:txBody>
-      </p:sp>
-      <p:sp>
-        <p:nvSpPr>
-          <p:cNvPr id="4" name="Text Placeholder 3"/>
+          </a:p>
+        </p:txBody>
+      </p:sp>
+      <p:sp>
+        <p:nvSpPr>
+          <p:cNvPr id="4" name="Text Placeholder 3">
+            <a:extLst>
+              <a:ext uri="{FF2B5EF4-FFF2-40B4-BE49-F238E27FC236}">
+                <a16:creationId xmlns:a16="http://schemas.microsoft.com/office/drawing/2014/main" id="{F62357AB-56AF-639E-0A77-E1BBC0C5F167}"/>
+              </a:ext>
+            </a:extLst>
+          </p:cNvPr>
           <p:cNvSpPr>
             <a:spLocks noGrp="1"/>
           </p:cNvSpPr>
@@ -2181,8 +2718,8 @@
         </p:nvSpPr>
         <p:spPr>
           <a:xfrm>
-            <a:off x="457200" y="1435100"/>
-            <a:ext cx="3008313" cy="4691063"/>
+            <a:off x="839788" y="2057400"/>
+            <a:ext cx="3932237" cy="3811588"/>
           </a:xfrm>
         </p:spPr>
         <p:txBody>
@@ -2190,68 +2727,74 @@
           <a:lstStyle>
             <a:lvl1pPr marL="0" indent="0">
               <a:buNone/>
-              <a:defRPr sz="1400"/>
+              <a:defRPr sz="1600"/>
             </a:lvl1pPr>
             <a:lvl2pPr marL="457200" indent="0">
               <a:buNone/>
-              <a:defRPr sz="1200"/>
+              <a:defRPr sz="1400"/>
             </a:lvl2pPr>
             <a:lvl3pPr marL="914400" indent="0">
               <a:buNone/>
-              <a:defRPr sz="1000"/>
+              <a:defRPr sz="1200"/>
             </a:lvl3pPr>
             <a:lvl4pPr marL="1371600" indent="0">
               <a:buNone/>
-              <a:defRPr sz="900"/>
+              <a:defRPr sz="1000"/>
             </a:lvl4pPr>
             <a:lvl5pPr marL="1828800" indent="0">
               <a:buNone/>
-              <a:defRPr sz="900"/>
+              <a:defRPr sz="1000"/>
             </a:lvl5pPr>
             <a:lvl6pPr marL="2286000" indent="0">
               <a:buNone/>
-              <a:defRPr sz="900"/>
+              <a:defRPr sz="1000"/>
             </a:lvl6pPr>
             <a:lvl7pPr marL="2743200" indent="0">
               <a:buNone/>
-              <a:defRPr sz="900"/>
+              <a:defRPr sz="1000"/>
             </a:lvl7pPr>
             <a:lvl8pPr marL="3200400" indent="0">
               <a:buNone/>
-              <a:defRPr sz="900"/>
+              <a:defRPr sz="1000"/>
             </a:lvl8pPr>
             <a:lvl9pPr marL="3657600" indent="0">
               <a:buNone/>
-              <a:defRPr sz="900"/>
+              <a:defRPr sz="1000"/>
             </a:lvl9pPr>
           </a:lstStyle>
           <a:p>
             <a:pPr lvl="0"/>
             <a:r>
+              <a:rPr lang="en-US"/>
+              <a:t>Click to edit Master text styles</a:t>
+            </a:r>
+          </a:p>
+        </p:txBody>
+      </p:sp>
+      <p:sp>
+        <p:nvSpPr>
+          <p:cNvPr id="5" name="Date Placeholder 4">
+            <a:extLst>
+              <a:ext uri="{FF2B5EF4-FFF2-40B4-BE49-F238E27FC236}">
+                <a16:creationId xmlns:a16="http://schemas.microsoft.com/office/drawing/2014/main" id="{BDBD3D61-279B-369F-6558-EE28C85A25AF}"/>
+              </a:ext>
+            </a:extLst>
+          </p:cNvPr>
+          <p:cNvSpPr>
+            <a:spLocks noGrp="1"/>
+          </p:cNvSpPr>
+          <p:nvPr>
+            <p:ph type="dt" sz="half" idx="10"/>
+          </p:nvPr>
+        </p:nvSpPr>
+        <p:spPr/>
+        <p:txBody>
+          <a:bodyPr/>
+          <a:lstStyle/>
+          <a:p>
+            <a:fld id="{FCBA1D2B-2537-4D61-9387-23A02DC35F45}" type="datetimeFigureOut">
               <a:rPr lang="en-US" smtClean="0"/>
-              <a:t>Click to edit Master text styles</a:t>
-            </a:r>
-          </a:p>
-        </p:txBody>
-      </p:sp>
-      <p:sp>
-        <p:nvSpPr>
-          <p:cNvPr id="5" name="Date Placeholder 4"/>
-          <p:cNvSpPr>
-            <a:spLocks noGrp="1"/>
-          </p:cNvSpPr>
-          <p:nvPr>
-            <p:ph type="dt" sz="half" idx="10"/>
-          </p:nvPr>
-        </p:nvSpPr>
-        <p:spPr/>
-        <p:txBody>
-          <a:bodyPr/>
-          <a:lstStyle/>
-          <a:p>
-            <a:fld id="{5BCAD085-E8A6-8845-BD4E-CB4CCA059FC4}" type="datetimeFigureOut">
-              <a:rPr lang="en-US" smtClean="0"/>
-              <a:t>1/27/13</a:t>
+              <a:t>2/12/2026</a:t>
             </a:fld>
             <a:endParaRPr lang="en-US"/>
           </a:p>
@@ -2259,7 +2802,13 @@
       </p:sp>
       <p:sp>
         <p:nvSpPr>
-          <p:cNvPr id="6" name="Footer Placeholder 5"/>
+          <p:cNvPr id="6" name="Footer Placeholder 5">
+            <a:extLst>
+              <a:ext uri="{FF2B5EF4-FFF2-40B4-BE49-F238E27FC236}">
+                <a16:creationId xmlns:a16="http://schemas.microsoft.com/office/drawing/2014/main" id="{8A5A9E28-8342-D25F-89AC-0E3D11AADE16}"/>
+              </a:ext>
+            </a:extLst>
+          </p:cNvPr>
           <p:cNvSpPr>
             <a:spLocks noGrp="1"/>
           </p:cNvSpPr>
@@ -2278,7 +2827,13 @@
       </p:sp>
       <p:sp>
         <p:nvSpPr>
-          <p:cNvPr id="7" name="Slide Number Placeholder 6"/>
+          <p:cNvPr id="7" name="Slide Number Placeholder 6">
+            <a:extLst>
+              <a:ext uri="{FF2B5EF4-FFF2-40B4-BE49-F238E27FC236}">
+                <a16:creationId xmlns:a16="http://schemas.microsoft.com/office/drawing/2014/main" id="{17E3A4CB-56D2-E5E0-64A2-A73F93EAF157}"/>
+              </a:ext>
+            </a:extLst>
+          </p:cNvPr>
           <p:cNvSpPr>
             <a:spLocks noGrp="1"/>
           </p:cNvSpPr>
@@ -2291,7 +2846,7 @@
           <a:bodyPr/>
           <a:lstStyle/>
           <a:p>
-            <a:fld id="{C1FF6DA9-008F-8B48-92A6-B652298478BF}" type="slidenum">
+            <a:fld id="{1F6C2334-BDD3-4B5A-BFA7-22F489CFAFEA}" type="slidenum">
               <a:rPr lang="en-US" smtClean="0"/>
               <a:t>‹#›</a:t>
             </a:fld>
@@ -2302,260 +2857,7 @@
     </p:spTree>
     <p:extLst>
       <p:ext uri="{BB962C8B-B14F-4D97-AF65-F5344CB8AC3E}">
-        <p14:creationId xmlns:p14="http://schemas.microsoft.com/office/powerpoint/2010/main" val="1840726560"/>
-      </p:ext>
-    </p:extLst>
-  </p:cSld>
-  <p:clrMapOvr>
-    <a:masterClrMapping/>
-  </p:clrMapOvr>
-</p:sldLayout>
-</file>
-
-<file path=ppt/slideLayouts/slideLayout9.xml><?xml version="1.0" encoding="utf-8"?>
-<p:sldLayout xmlns:a="http://schemas.openxmlformats.org/drawingml/2006/main" xmlns:r="http://schemas.openxmlformats.org/officeDocument/2006/relationships" xmlns:p="http://schemas.openxmlformats.org/presentationml/2006/main" type="picTx" preserve="1">
-  <p:cSld name="Picture with Caption">
-    <p:spTree>
-      <p:nvGrpSpPr>
-        <p:cNvPr id="1" name=""/>
-        <p:cNvGrpSpPr/>
-        <p:nvPr/>
-      </p:nvGrpSpPr>
-      <p:grpSpPr>
-        <a:xfrm>
-          <a:off x="0" y="0"/>
-          <a:ext cx="0" cy="0"/>
-          <a:chOff x="0" y="0"/>
-          <a:chExt cx="0" cy="0"/>
-        </a:xfrm>
-      </p:grpSpPr>
-      <p:sp>
-        <p:nvSpPr>
-          <p:cNvPr id="2" name="Title 1"/>
-          <p:cNvSpPr>
-            <a:spLocks noGrp="1"/>
-          </p:cNvSpPr>
-          <p:nvPr>
-            <p:ph type="title"/>
-          </p:nvPr>
-        </p:nvSpPr>
-        <p:spPr>
-          <a:xfrm>
-            <a:off x="1792288" y="4800600"/>
-            <a:ext cx="5486400" cy="566738"/>
-          </a:xfrm>
-        </p:spPr>
-        <p:txBody>
-          <a:bodyPr anchor="b"/>
-          <a:lstStyle>
-            <a:lvl1pPr algn="l">
-              <a:defRPr sz="2000" b="1"/>
-            </a:lvl1pPr>
-          </a:lstStyle>
-          <a:p>
-            <a:r>
-              <a:rPr lang="en-US" smtClean="0"/>
-              <a:t>Click to edit Master title style</a:t>
-            </a:r>
-            <a:endParaRPr lang="en-US"/>
-          </a:p>
-        </p:txBody>
-      </p:sp>
-      <p:sp>
-        <p:nvSpPr>
-          <p:cNvPr id="3" name="Picture Placeholder 2"/>
-          <p:cNvSpPr>
-            <a:spLocks noGrp="1"/>
-          </p:cNvSpPr>
-          <p:nvPr>
-            <p:ph type="pic" idx="1"/>
-          </p:nvPr>
-        </p:nvSpPr>
-        <p:spPr>
-          <a:xfrm>
-            <a:off x="1792288" y="612775"/>
-            <a:ext cx="5486400" cy="4114800"/>
-          </a:xfrm>
-        </p:spPr>
-        <p:txBody>
-          <a:bodyPr/>
-          <a:lstStyle>
-            <a:lvl1pPr marL="0" indent="0">
-              <a:buNone/>
-              <a:defRPr sz="3200"/>
-            </a:lvl1pPr>
-            <a:lvl2pPr marL="457200" indent="0">
-              <a:buNone/>
-              <a:defRPr sz="2800"/>
-            </a:lvl2pPr>
-            <a:lvl3pPr marL="914400" indent="0">
-              <a:buNone/>
-              <a:defRPr sz="2400"/>
-            </a:lvl3pPr>
-            <a:lvl4pPr marL="1371600" indent="0">
-              <a:buNone/>
-              <a:defRPr sz="2000"/>
-            </a:lvl4pPr>
-            <a:lvl5pPr marL="1828800" indent="0">
-              <a:buNone/>
-              <a:defRPr sz="2000"/>
-            </a:lvl5pPr>
-            <a:lvl6pPr marL="2286000" indent="0">
-              <a:buNone/>
-              <a:defRPr sz="2000"/>
-            </a:lvl6pPr>
-            <a:lvl7pPr marL="2743200" indent="0">
-              <a:buNone/>
-              <a:defRPr sz="2000"/>
-            </a:lvl7pPr>
-            <a:lvl8pPr marL="3200400" indent="0">
-              <a:buNone/>
-              <a:defRPr sz="2000"/>
-            </a:lvl8pPr>
-            <a:lvl9pPr marL="3657600" indent="0">
-              <a:buNone/>
-              <a:defRPr sz="2000"/>
-            </a:lvl9pPr>
-          </a:lstStyle>
-          <a:p>
-            <a:endParaRPr lang="en-US"/>
-          </a:p>
-        </p:txBody>
-      </p:sp>
-      <p:sp>
-        <p:nvSpPr>
-          <p:cNvPr id="4" name="Text Placeholder 3"/>
-          <p:cNvSpPr>
-            <a:spLocks noGrp="1"/>
-          </p:cNvSpPr>
-          <p:nvPr>
-            <p:ph type="body" sz="half" idx="2"/>
-          </p:nvPr>
-        </p:nvSpPr>
-        <p:spPr>
-          <a:xfrm>
-            <a:off x="1792288" y="5367338"/>
-            <a:ext cx="5486400" cy="804862"/>
-          </a:xfrm>
-        </p:spPr>
-        <p:txBody>
-          <a:bodyPr/>
-          <a:lstStyle>
-            <a:lvl1pPr marL="0" indent="0">
-              <a:buNone/>
-              <a:defRPr sz="1400"/>
-            </a:lvl1pPr>
-            <a:lvl2pPr marL="457200" indent="0">
-              <a:buNone/>
-              <a:defRPr sz="1200"/>
-            </a:lvl2pPr>
-            <a:lvl3pPr marL="914400" indent="0">
-              <a:buNone/>
-              <a:defRPr sz="1000"/>
-            </a:lvl3pPr>
-            <a:lvl4pPr marL="1371600" indent="0">
-              <a:buNone/>
-              <a:defRPr sz="900"/>
-            </a:lvl4pPr>
-            <a:lvl5pPr marL="1828800" indent="0">
-              <a:buNone/>
-              <a:defRPr sz="900"/>
-            </a:lvl5pPr>
-            <a:lvl6pPr marL="2286000" indent="0">
-              <a:buNone/>
-              <a:defRPr sz="900"/>
-            </a:lvl6pPr>
-            <a:lvl7pPr marL="2743200" indent="0">
-              <a:buNone/>
-              <a:defRPr sz="900"/>
-            </a:lvl7pPr>
-            <a:lvl8pPr marL="3200400" indent="0">
-              <a:buNone/>
-              <a:defRPr sz="900"/>
-            </a:lvl8pPr>
-            <a:lvl9pPr marL="3657600" indent="0">
-              <a:buNone/>
-              <a:defRPr sz="900"/>
-            </a:lvl9pPr>
-          </a:lstStyle>
-          <a:p>
-            <a:pPr lvl="0"/>
-            <a:r>
-              <a:rPr lang="en-US" smtClean="0"/>
-              <a:t>Click to edit Master text styles</a:t>
-            </a:r>
-          </a:p>
-        </p:txBody>
-      </p:sp>
-      <p:sp>
-        <p:nvSpPr>
-          <p:cNvPr id="5" name="Date Placeholder 4"/>
-          <p:cNvSpPr>
-            <a:spLocks noGrp="1"/>
-          </p:cNvSpPr>
-          <p:nvPr>
-            <p:ph type="dt" sz="half" idx="10"/>
-          </p:nvPr>
-        </p:nvSpPr>
-        <p:spPr/>
-        <p:txBody>
-          <a:bodyPr/>
-          <a:lstStyle/>
-          <a:p>
-            <a:fld id="{5BCAD085-E8A6-8845-BD4E-CB4CCA059FC4}" type="datetimeFigureOut">
-              <a:rPr lang="en-US" smtClean="0"/>
-              <a:t>1/27/13</a:t>
-            </a:fld>
-            <a:endParaRPr lang="en-US"/>
-          </a:p>
-        </p:txBody>
-      </p:sp>
-      <p:sp>
-        <p:nvSpPr>
-          <p:cNvPr id="6" name="Footer Placeholder 5"/>
-          <p:cNvSpPr>
-            <a:spLocks noGrp="1"/>
-          </p:cNvSpPr>
-          <p:nvPr>
-            <p:ph type="ftr" sz="quarter" idx="11"/>
-          </p:nvPr>
-        </p:nvSpPr>
-        <p:spPr/>
-        <p:txBody>
-          <a:bodyPr/>
-          <a:lstStyle/>
-          <a:p>
-            <a:endParaRPr lang="en-US"/>
-          </a:p>
-        </p:txBody>
-      </p:sp>
-      <p:sp>
-        <p:nvSpPr>
-          <p:cNvPr id="7" name="Slide Number Placeholder 6"/>
-          <p:cNvSpPr>
-            <a:spLocks noGrp="1"/>
-          </p:cNvSpPr>
-          <p:nvPr>
-            <p:ph type="sldNum" sz="quarter" idx="12"/>
-          </p:nvPr>
-        </p:nvSpPr>
-        <p:spPr/>
-        <p:txBody>
-          <a:bodyPr/>
-          <a:lstStyle/>
-          <a:p>
-            <a:fld id="{C1FF6DA9-008F-8B48-92A6-B652298478BF}" type="slidenum">
-              <a:rPr lang="en-US" smtClean="0"/>
-              <a:t>‹#›</a:t>
-            </a:fld>
-            <a:endParaRPr lang="en-US"/>
-          </a:p>
-        </p:txBody>
-      </p:sp>
-    </p:spTree>
-    <p:extLst>
-      <p:ext uri="{BB962C8B-B14F-4D97-AF65-F5344CB8AC3E}">
-        <p14:creationId xmlns:p14="http://schemas.microsoft.com/office/powerpoint/2010/main" val="3889236939"/>
+        <p14:creationId xmlns:p14="http://schemas.microsoft.com/office/powerpoint/2010/main" val="1755128243"/>
       </p:ext>
     </p:extLst>
   </p:cSld>
@@ -2589,7 +2891,13 @@
       </p:grpSpPr>
       <p:sp>
         <p:nvSpPr>
-          <p:cNvPr id="2" name="Title Placeholder 1"/>
+          <p:cNvPr id="2" name="Title Placeholder 1">
+            <a:extLst>
+              <a:ext uri="{FF2B5EF4-FFF2-40B4-BE49-F238E27FC236}">
+                <a16:creationId xmlns:a16="http://schemas.microsoft.com/office/drawing/2014/main" id="{17399D4A-DCAF-0984-E164-F86382E76417}"/>
+              </a:ext>
+            </a:extLst>
+          </p:cNvPr>
           <p:cNvSpPr>
             <a:spLocks noGrp="1"/>
           </p:cNvSpPr>
@@ -2599,8 +2907,8 @@
         </p:nvSpPr>
         <p:spPr>
           <a:xfrm>
-            <a:off x="457200" y="274638"/>
-            <a:ext cx="8229600" cy="1143000"/>
+            <a:off x="838200" y="365125"/>
+            <a:ext cx="10515600" cy="1325563"/>
           </a:xfrm>
           <a:prstGeom prst="rect">
             <a:avLst/>
@@ -2613,16 +2921,21 @@
           <a:lstStyle/>
           <a:p>
             <a:r>
-              <a:rPr lang="en-US" smtClean="0"/>
+              <a:rPr lang="en-US"/>
               <a:t>Click to edit Master title style</a:t>
             </a:r>
-            <a:endParaRPr lang="en-US"/>
-          </a:p>
-        </p:txBody>
-      </p:sp>
-      <p:sp>
-        <p:nvSpPr>
-          <p:cNvPr id="3" name="Text Placeholder 2"/>
+          </a:p>
+        </p:txBody>
+      </p:sp>
+      <p:sp>
+        <p:nvSpPr>
+          <p:cNvPr id="3" name="Text Placeholder 2">
+            <a:extLst>
+              <a:ext uri="{FF2B5EF4-FFF2-40B4-BE49-F238E27FC236}">
+                <a16:creationId xmlns:a16="http://schemas.microsoft.com/office/drawing/2014/main" id="{69158955-6509-505A-955D-F3F95B2CBB7C}"/>
+              </a:ext>
+            </a:extLst>
+          </p:cNvPr>
           <p:cNvSpPr>
             <a:spLocks noGrp="1"/>
           </p:cNvSpPr>
@@ -2632,8 +2945,8 @@
         </p:nvSpPr>
         <p:spPr>
           <a:xfrm>
-            <a:off x="457200" y="1600200"/>
-            <a:ext cx="8229600" cy="4525963"/>
+            <a:off x="838200" y="1825625"/>
+            <a:ext cx="10515600" cy="4351338"/>
           </a:xfrm>
           <a:prstGeom prst="rect">
             <a:avLst/>
@@ -2647,44 +2960,49 @@
           <a:p>
             <a:pPr lvl="0"/>
             <a:r>
-              <a:rPr lang="en-US" smtClean="0"/>
+              <a:rPr lang="en-US"/>
               <a:t>Click to edit Master text styles</a:t>
             </a:r>
           </a:p>
           <a:p>
             <a:pPr lvl="1"/>
             <a:r>
-              <a:rPr lang="en-US" smtClean="0"/>
+              <a:rPr lang="en-US"/>
               <a:t>Second level</a:t>
             </a:r>
           </a:p>
           <a:p>
             <a:pPr lvl="2"/>
             <a:r>
-              <a:rPr lang="en-US" smtClean="0"/>
+              <a:rPr lang="en-US"/>
               <a:t>Third level</a:t>
             </a:r>
           </a:p>
           <a:p>
             <a:pPr lvl="3"/>
             <a:r>
-              <a:rPr lang="en-US" smtClean="0"/>
+              <a:rPr lang="en-US"/>
               <a:t>Fourth level</a:t>
             </a:r>
           </a:p>
           <a:p>
             <a:pPr lvl="4"/>
             <a:r>
-              <a:rPr lang="en-US" smtClean="0"/>
+              <a:rPr lang="en-US"/>
               <a:t>Fifth level</a:t>
             </a:r>
-            <a:endParaRPr lang="en-US"/>
-          </a:p>
-        </p:txBody>
-      </p:sp>
-      <p:sp>
-        <p:nvSpPr>
-          <p:cNvPr id="4" name="Date Placeholder 3"/>
+          </a:p>
+        </p:txBody>
+      </p:sp>
+      <p:sp>
+        <p:nvSpPr>
+          <p:cNvPr id="4" name="Date Placeholder 3">
+            <a:extLst>
+              <a:ext uri="{FF2B5EF4-FFF2-40B4-BE49-F238E27FC236}">
+                <a16:creationId xmlns:a16="http://schemas.microsoft.com/office/drawing/2014/main" id="{2AF0DE31-D691-AF2E-9B8F-D5430E8FF89C}"/>
+              </a:ext>
+            </a:extLst>
+          </p:cNvPr>
           <p:cNvSpPr>
             <a:spLocks noGrp="1"/>
           </p:cNvSpPr>
@@ -2694,8 +3012,8 @@
         </p:nvSpPr>
         <p:spPr>
           <a:xfrm>
-            <a:off x="457200" y="6356350"/>
-            <a:ext cx="2133600" cy="365125"/>
+            <a:off x="838200" y="6356350"/>
+            <a:ext cx="2743200" cy="365125"/>
           </a:xfrm>
           <a:prstGeom prst="rect">
             <a:avLst/>
@@ -2708,16 +3026,16 @@
               <a:defRPr sz="1200">
                 <a:solidFill>
                   <a:schemeClr val="tx1">
-                    <a:tint val="75000"/>
+                    <a:tint val="82000"/>
                   </a:schemeClr>
                 </a:solidFill>
               </a:defRPr>
             </a:lvl1pPr>
           </a:lstStyle>
           <a:p>
-            <a:fld id="{5BCAD085-E8A6-8845-BD4E-CB4CCA059FC4}" type="datetimeFigureOut">
+            <a:fld id="{FCBA1D2B-2537-4D61-9387-23A02DC35F45}" type="datetimeFigureOut">
               <a:rPr lang="en-US" smtClean="0"/>
-              <a:t>1/27/13</a:t>
+              <a:t>2/12/2026</a:t>
             </a:fld>
             <a:endParaRPr lang="en-US"/>
           </a:p>
@@ -2725,7 +3043,13 @@
       </p:sp>
       <p:sp>
         <p:nvSpPr>
-          <p:cNvPr id="5" name="Footer Placeholder 4"/>
+          <p:cNvPr id="5" name="Footer Placeholder 4">
+            <a:extLst>
+              <a:ext uri="{FF2B5EF4-FFF2-40B4-BE49-F238E27FC236}">
+                <a16:creationId xmlns:a16="http://schemas.microsoft.com/office/drawing/2014/main" id="{6F507A74-AF5F-AC26-E714-9AB872BA469B}"/>
+              </a:ext>
+            </a:extLst>
+          </p:cNvPr>
           <p:cNvSpPr>
             <a:spLocks noGrp="1"/>
           </p:cNvSpPr>
@@ -2735,8 +3059,8 @@
         </p:nvSpPr>
         <p:spPr>
           <a:xfrm>
-            <a:off x="3124200" y="6356350"/>
-            <a:ext cx="2895600" cy="365125"/>
+            <a:off x="4038600" y="6356350"/>
+            <a:ext cx="4114800" cy="365125"/>
           </a:xfrm>
           <a:prstGeom prst="rect">
             <a:avLst/>
@@ -2749,7 +3073,7 @@
               <a:defRPr sz="1200">
                 <a:solidFill>
                   <a:schemeClr val="tx1">
-                    <a:tint val="75000"/>
+                    <a:tint val="82000"/>
                   </a:schemeClr>
                 </a:solidFill>
               </a:defRPr>
@@ -2762,7 +3086,13 @@
       </p:sp>
       <p:sp>
         <p:nvSpPr>
-          <p:cNvPr id="6" name="Slide Number Placeholder 5"/>
+          <p:cNvPr id="6" name="Slide Number Placeholder 5">
+            <a:extLst>
+              <a:ext uri="{FF2B5EF4-FFF2-40B4-BE49-F238E27FC236}">
+                <a16:creationId xmlns:a16="http://schemas.microsoft.com/office/drawing/2014/main" id="{2F3E4C43-7267-8A54-BF86-BF77094912DE}"/>
+              </a:ext>
+            </a:extLst>
+          </p:cNvPr>
           <p:cNvSpPr>
             <a:spLocks noGrp="1"/>
           </p:cNvSpPr>
@@ -2772,8 +3102,8 @@
         </p:nvSpPr>
         <p:spPr>
           <a:xfrm>
-            <a:off x="6553200" y="6356350"/>
-            <a:ext cx="2133600" cy="365125"/>
+            <a:off x="8610600" y="6356350"/>
+            <a:ext cx="2743200" cy="365125"/>
           </a:xfrm>
           <a:prstGeom prst="rect">
             <a:avLst/>
@@ -2786,14 +3116,14 @@
               <a:defRPr sz="1200">
                 <a:solidFill>
                   <a:schemeClr val="tx1">
-                    <a:tint val="75000"/>
+                    <a:tint val="82000"/>
                   </a:schemeClr>
                 </a:solidFill>
               </a:defRPr>
             </a:lvl1pPr>
           </a:lstStyle>
           <a:p>
-            <a:fld id="{C1FF6DA9-008F-8B48-92A6-B652298478BF}" type="slidenum">
+            <a:fld id="{1F6C2334-BDD3-4B5A-BFA7-22F489CFAFEA}" type="slidenum">
               <a:rPr lang="en-US" smtClean="0"/>
               <a:t>‹#›</a:t>
             </a:fld>
@@ -2801,30 +3131,96 @@
           </a:p>
         </p:txBody>
       </p:sp>
+      <p:grpSp>
+        <p:nvGrpSpPr>
+          <p:cNvPr id="100" name="Footer Group"/>
+          <p:cNvGrpSpPr/>
+          <p:nvPr/>
+        </p:nvGrpSpPr>
+        <p:grpSpPr>
+          <a:xfrm>
+            <a:off x="0" y="5713687"/>
+            <a:ext cx="12192000" cy="1154824"/>
+            <a:chOff x="0" y="5713687"/>
+            <a:chExt cx="12192000" cy="1154824"/>
+          </a:xfrm>
+        </p:grpSpPr>
+        <p:pic>
+          <p:nvPicPr>
+            <p:cNvPr id="101" name="Wave Footer"/>
+            <p:cNvPicPr>
+              <a:picLocks noChangeAspect="1"/>
+            </p:cNvPicPr>
+            <p:nvPr/>
+          </p:nvPicPr>
+          <p:blipFill>
+            <a:blip r:embed="rId13"/>
+            <a:stretch>
+              <a:fillRect/>
+            </a:stretch>
+          </p:blipFill>
+          <p:spPr>
+            <a:xfrm>
+              <a:off x="0" y="5713687"/>
+              <a:ext cx="12192000" cy="1154824"/>
+            </a:xfrm>
+            <a:prstGeom prst="rect">
+              <a:avLst/>
+            </a:prstGeom>
+          </p:spPr>
+        </p:pic>
+        <p:pic>
+          <p:nvPicPr>
+            <p:cNvPr id="102" name="Logo Footer"/>
+            <p:cNvPicPr>
+              <a:picLocks noChangeAspect="1"/>
+            </p:cNvPicPr>
+            <p:nvPr/>
+          </p:nvPicPr>
+          <p:blipFill>
+            <a:blip r:embed="rId14"/>
+            <a:stretch>
+              <a:fillRect/>
+            </a:stretch>
+          </p:blipFill>
+          <p:spPr>
+            <a:xfrm>
+              <a:off x="388191" y="6002185"/>
+              <a:ext cx="1665893" cy="358195"/>
+            </a:xfrm>
+            <a:prstGeom prst="rect">
+              <a:avLst/>
+            </a:prstGeom>
+          </p:spPr>
+        </p:pic>
+      </p:grpSp>
     </p:spTree>
     <p:extLst>
       <p:ext uri="{BB962C8B-B14F-4D97-AF65-F5344CB8AC3E}">
-        <p14:creationId xmlns:p14="http://schemas.microsoft.com/office/powerpoint/2010/main" val="2209977519"/>
+        <p14:creationId xmlns:p14="http://schemas.microsoft.com/office/powerpoint/2010/main" val="3867173947"/>
       </p:ext>
     </p:extLst>
   </p:cSld>
   <p:clrMap bg1="lt1" tx1="dk1" bg2="lt2" tx2="dk2" accent1="accent1" accent2="accent2" accent3="accent3" accent4="accent4" accent5="accent5" accent6="accent6" hlink="hlink" folHlink="folHlink"/>
   <p:sldLayoutIdLst>
-    <p:sldLayoutId id="2147483649" r:id="rId1"/>
-    <p:sldLayoutId id="2147483650" r:id="rId2"/>
-    <p:sldLayoutId id="2147483651" r:id="rId3"/>
-    <p:sldLayoutId id="2147483652" r:id="rId4"/>
-    <p:sldLayoutId id="2147483653" r:id="rId5"/>
-    <p:sldLayoutId id="2147483654" r:id="rId6"/>
-    <p:sldLayoutId id="2147483655" r:id="rId7"/>
-    <p:sldLayoutId id="2147483656" r:id="rId8"/>
-    <p:sldLayoutId id="2147483657" r:id="rId9"/>
-    <p:sldLayoutId id="2147483658" r:id="rId10"/>
-    <p:sldLayoutId id="2147483659" r:id="rId11"/>
+    <p:sldLayoutId id="2147483678" r:id="rId1"/>
+    <p:sldLayoutId id="2147483679" r:id="rId2"/>
+    <p:sldLayoutId id="2147483681" r:id="rId3"/>
+    <p:sldLayoutId id="2147483682" r:id="rId4"/>
+    <p:sldLayoutId id="2147483683" r:id="rId5"/>
+    <p:sldLayoutId id="2147483684" r:id="rId6"/>
+    <p:sldLayoutId id="2147483685" r:id="rId7"/>
+    <p:sldLayoutId id="2147483695" r:id="rId8"/>
+    <p:sldLayoutId id="2147483688" r:id="rId9"/>
+    <p:sldLayoutId id="2147483696" r:id="rId10"/>
+    <p:sldLayoutId id="2147483691" r:id="rId11"/>
   </p:sldLayoutIdLst>
   <p:txStyles>
     <p:titleStyle>
-      <a:lvl1pPr algn="ctr" defTabSz="457200" rtl="0" eaLnBrk="1" latinLnBrk="0" hangingPunct="1">
+      <a:lvl1pPr algn="l" defTabSz="914400" rtl="0" eaLnBrk="1" latinLnBrk="0" hangingPunct="1">
+        <a:lnSpc>
+          <a:spcPct val="90000"/>
+        </a:lnSpc>
         <a:spcBef>
           <a:spcPct val="0"/>
         </a:spcBef>
@@ -2840,13 +3236,16 @@
       </a:lvl1pPr>
     </p:titleStyle>
     <p:bodyStyle>
-      <a:lvl1pPr marL="342900" indent="-342900" algn="l" defTabSz="457200" rtl="0" eaLnBrk="1" latinLnBrk="0" hangingPunct="1">
+      <a:lvl1pPr marL="228600" indent="-228600" algn="l" defTabSz="914400" rtl="0" eaLnBrk="1" latinLnBrk="0" hangingPunct="1">
+        <a:lnSpc>
+          <a:spcPct val="90000"/>
+        </a:lnSpc>
         <a:spcBef>
-          <a:spcPct val="20000"/>
+          <a:spcPts val="1000"/>
         </a:spcBef>
-        <a:buFont typeface="Arial"/>
+        <a:buFont typeface="Arial" panose="020B0604020202020204" pitchFamily="34" charset="0"/>
         <a:buChar char="•"/>
-        <a:defRPr sz="3200" kern="1200">
+        <a:defRPr sz="2800" kern="1200">
           <a:solidFill>
             <a:schemeClr val="tx1"/>
           </a:solidFill>
@@ -2855,26 +3254,14 @@
           <a:cs typeface="+mn-cs"/>
         </a:defRPr>
       </a:lvl1pPr>
-      <a:lvl2pPr marL="742950" indent="-285750" algn="l" defTabSz="457200" rtl="0" eaLnBrk="1" latinLnBrk="0" hangingPunct="1">
+      <a:lvl2pPr marL="685800" indent="-228600" algn="l" defTabSz="914400" rtl="0" eaLnBrk="1" latinLnBrk="0" hangingPunct="1">
+        <a:lnSpc>
+          <a:spcPct val="90000"/>
+        </a:lnSpc>
         <a:spcBef>
-          <a:spcPct val="20000"/>
+          <a:spcPts val="500"/>
         </a:spcBef>
-        <a:buFont typeface="Arial"/>
-        <a:buChar char="–"/>
-        <a:defRPr sz="2800" kern="1200">
-          <a:solidFill>
-            <a:schemeClr val="tx1"/>
-          </a:solidFill>
-          <a:latin typeface="+mn-lt"/>
-          <a:ea typeface="+mn-ea"/>
-          <a:cs typeface="+mn-cs"/>
-        </a:defRPr>
-      </a:lvl2pPr>
-      <a:lvl3pPr marL="1143000" indent="-228600" algn="l" defTabSz="457200" rtl="0" eaLnBrk="1" latinLnBrk="0" hangingPunct="1">
-        <a:spcBef>
-          <a:spcPct val="20000"/>
-        </a:spcBef>
-        <a:buFont typeface="Arial"/>
+        <a:buFont typeface="Arial" panose="020B0604020202020204" pitchFamily="34" charset="0"/>
         <a:buChar char="•"/>
         <a:defRPr sz="2400" kern="1200">
           <a:solidFill>
@@ -2884,42 +3271,15 @@
           <a:ea typeface="+mn-ea"/>
           <a:cs typeface="+mn-cs"/>
         </a:defRPr>
-      </a:lvl3pPr>
-      <a:lvl4pPr marL="1600200" indent="-228600" algn="l" defTabSz="457200" rtl="0" eaLnBrk="1" latinLnBrk="0" hangingPunct="1">
+      </a:lvl2pPr>
+      <a:lvl3pPr marL="1143000" indent="-228600" algn="l" defTabSz="914400" rtl="0" eaLnBrk="1" latinLnBrk="0" hangingPunct="1">
+        <a:lnSpc>
+          <a:spcPct val="90000"/>
+        </a:lnSpc>
         <a:spcBef>
-          <a:spcPct val="20000"/>
+          <a:spcPts val="500"/>
         </a:spcBef>
-        <a:buFont typeface="Arial"/>
-        <a:buChar char="–"/>
-        <a:defRPr sz="2000" kern="1200">
-          <a:solidFill>
-            <a:schemeClr val="tx1"/>
-          </a:solidFill>
-          <a:latin typeface="+mn-lt"/>
-          <a:ea typeface="+mn-ea"/>
-          <a:cs typeface="+mn-cs"/>
-        </a:defRPr>
-      </a:lvl4pPr>
-      <a:lvl5pPr marL="2057400" indent="-228600" algn="l" defTabSz="457200" rtl="0" eaLnBrk="1" latinLnBrk="0" hangingPunct="1">
-        <a:spcBef>
-          <a:spcPct val="20000"/>
-        </a:spcBef>
-        <a:buFont typeface="Arial"/>
-        <a:buChar char="»"/>
-        <a:defRPr sz="2000" kern="1200">
-          <a:solidFill>
-            <a:schemeClr val="tx1"/>
-          </a:solidFill>
-          <a:latin typeface="+mn-lt"/>
-          <a:ea typeface="+mn-ea"/>
-          <a:cs typeface="+mn-cs"/>
-        </a:defRPr>
-      </a:lvl5pPr>
-      <a:lvl6pPr marL="2514600" indent="-228600" algn="l" defTabSz="457200" rtl="0" eaLnBrk="1" latinLnBrk="0" hangingPunct="1">
-        <a:spcBef>
-          <a:spcPct val="20000"/>
-        </a:spcBef>
-        <a:buFont typeface="Arial"/>
+        <a:buFont typeface="Arial" panose="020B0604020202020204" pitchFamily="34" charset="0"/>
         <a:buChar char="•"/>
         <a:defRPr sz="2000" kern="1200">
           <a:solidFill>
@@ -2929,14 +3289,71 @@
           <a:ea typeface="+mn-ea"/>
           <a:cs typeface="+mn-cs"/>
         </a:defRPr>
+      </a:lvl3pPr>
+      <a:lvl4pPr marL="1600200" indent="-228600" algn="l" defTabSz="914400" rtl="0" eaLnBrk="1" latinLnBrk="0" hangingPunct="1">
+        <a:lnSpc>
+          <a:spcPct val="90000"/>
+        </a:lnSpc>
+        <a:spcBef>
+          <a:spcPts val="500"/>
+        </a:spcBef>
+        <a:buFont typeface="Arial" panose="020B0604020202020204" pitchFamily="34" charset="0"/>
+        <a:buChar char="•"/>
+        <a:defRPr sz="1800" kern="1200">
+          <a:solidFill>
+            <a:schemeClr val="tx1"/>
+          </a:solidFill>
+          <a:latin typeface="+mn-lt"/>
+          <a:ea typeface="+mn-ea"/>
+          <a:cs typeface="+mn-cs"/>
+        </a:defRPr>
+      </a:lvl4pPr>
+      <a:lvl5pPr marL="2057400" indent="-228600" algn="l" defTabSz="914400" rtl="0" eaLnBrk="1" latinLnBrk="0" hangingPunct="1">
+        <a:lnSpc>
+          <a:spcPct val="90000"/>
+        </a:lnSpc>
+        <a:spcBef>
+          <a:spcPts val="500"/>
+        </a:spcBef>
+        <a:buFont typeface="Arial" panose="020B0604020202020204" pitchFamily="34" charset="0"/>
+        <a:buChar char="•"/>
+        <a:defRPr sz="1800" kern="1200">
+          <a:solidFill>
+            <a:schemeClr val="tx1"/>
+          </a:solidFill>
+          <a:latin typeface="+mn-lt"/>
+          <a:ea typeface="+mn-ea"/>
+          <a:cs typeface="+mn-cs"/>
+        </a:defRPr>
+      </a:lvl5pPr>
+      <a:lvl6pPr marL="2514600" indent="-228600" algn="l" defTabSz="914400" rtl="0" eaLnBrk="1" latinLnBrk="0" hangingPunct="1">
+        <a:lnSpc>
+          <a:spcPct val="90000"/>
+        </a:lnSpc>
+        <a:spcBef>
+          <a:spcPts val="500"/>
+        </a:spcBef>
+        <a:buFont typeface="Arial" panose="020B0604020202020204" pitchFamily="34" charset="0"/>
+        <a:buChar char="•"/>
+        <a:defRPr sz="1800" kern="1200">
+          <a:solidFill>
+            <a:schemeClr val="tx1"/>
+          </a:solidFill>
+          <a:latin typeface="+mn-lt"/>
+          <a:ea typeface="+mn-ea"/>
+          <a:cs typeface="+mn-cs"/>
+        </a:defRPr>
       </a:lvl6pPr>
-      <a:lvl7pPr marL="2971800" indent="-228600" algn="l" defTabSz="457200" rtl="0" eaLnBrk="1" latinLnBrk="0" hangingPunct="1">
+      <a:lvl7pPr marL="2971800" indent="-228600" algn="l" defTabSz="914400" rtl="0" eaLnBrk="1" latinLnBrk="0" hangingPunct="1">
+        <a:lnSpc>
+          <a:spcPct val="90000"/>
+        </a:lnSpc>
         <a:spcBef>
-          <a:spcPct val="20000"/>
+          <a:spcPts val="500"/>
         </a:spcBef>
-        <a:buFont typeface="Arial"/>
+        <a:buFont typeface="Arial" panose="020B0604020202020204" pitchFamily="34" charset="0"/>
         <a:buChar char="•"/>
-        <a:defRPr sz="2000" kern="1200">
+        <a:defRPr sz="1800" kern="1200">
           <a:solidFill>
             <a:schemeClr val="tx1"/>
           </a:solidFill>
@@ -2945,13 +3362,16 @@
           <a:cs typeface="+mn-cs"/>
         </a:defRPr>
       </a:lvl7pPr>
-      <a:lvl8pPr marL="3429000" indent="-228600" algn="l" defTabSz="457200" rtl="0" eaLnBrk="1" latinLnBrk="0" hangingPunct="1">
+      <a:lvl8pPr marL="3429000" indent="-228600" algn="l" defTabSz="914400" rtl="0" eaLnBrk="1" latinLnBrk="0" hangingPunct="1">
+        <a:lnSpc>
+          <a:spcPct val="90000"/>
+        </a:lnSpc>
         <a:spcBef>
-          <a:spcPct val="20000"/>
+          <a:spcPts val="500"/>
         </a:spcBef>
-        <a:buFont typeface="Arial"/>
+        <a:buFont typeface="Arial" panose="020B0604020202020204" pitchFamily="34" charset="0"/>
         <a:buChar char="•"/>
-        <a:defRPr sz="2000" kern="1200">
+        <a:defRPr sz="1800" kern="1200">
           <a:solidFill>
             <a:schemeClr val="tx1"/>
           </a:solidFill>
@@ -2960,13 +3380,16 @@
           <a:cs typeface="+mn-cs"/>
         </a:defRPr>
       </a:lvl8pPr>
-      <a:lvl9pPr marL="3886200" indent="-228600" algn="l" defTabSz="457200" rtl="0" eaLnBrk="1" latinLnBrk="0" hangingPunct="1">
+      <a:lvl9pPr marL="3886200" indent="-228600" algn="l" defTabSz="914400" rtl="0" eaLnBrk="1" latinLnBrk="0" hangingPunct="1">
+        <a:lnSpc>
+          <a:spcPct val="90000"/>
+        </a:lnSpc>
         <a:spcBef>
-          <a:spcPct val="20000"/>
+          <a:spcPts val="500"/>
         </a:spcBef>
-        <a:buFont typeface="Arial"/>
+        <a:buFont typeface="Arial" panose="020B0604020202020204" pitchFamily="34" charset="0"/>
         <a:buChar char="•"/>
-        <a:defRPr sz="2000" kern="1200">
+        <a:defRPr sz="1800" kern="1200">
           <a:solidFill>
             <a:schemeClr val="tx1"/>
           </a:solidFill>
@@ -2980,7 +3403,7 @@
       <a:defPPr>
         <a:defRPr lang="en-US"/>
       </a:defPPr>
-      <a:lvl1pPr marL="0" algn="l" defTabSz="457200" rtl="0" eaLnBrk="1" latinLnBrk="0" hangingPunct="1">
+      <a:lvl1pPr marL="0" algn="l" defTabSz="914400" rtl="0" eaLnBrk="1" latinLnBrk="0" hangingPunct="1">
         <a:defRPr sz="1800" kern="1200">
           <a:solidFill>
             <a:schemeClr val="tx1"/>
@@ -2990,7 +3413,7 @@
           <a:cs typeface="+mn-cs"/>
         </a:defRPr>
       </a:lvl1pPr>
-      <a:lvl2pPr marL="457200" algn="l" defTabSz="457200" rtl="0" eaLnBrk="1" latinLnBrk="0" hangingPunct="1">
+      <a:lvl2pPr marL="457200" algn="l" defTabSz="914400" rtl="0" eaLnBrk="1" latinLnBrk="0" hangingPunct="1">
         <a:defRPr sz="1800" kern="1200">
           <a:solidFill>
             <a:schemeClr val="tx1"/>
@@ -3000,7 +3423,7 @@
           <a:cs typeface="+mn-cs"/>
         </a:defRPr>
       </a:lvl2pPr>
-      <a:lvl3pPr marL="914400" algn="l" defTabSz="457200" rtl="0" eaLnBrk="1" latinLnBrk="0" hangingPunct="1">
+      <a:lvl3pPr marL="914400" algn="l" defTabSz="914400" rtl="0" eaLnBrk="1" latinLnBrk="0" hangingPunct="1">
         <a:defRPr sz="1800" kern="1200">
           <a:solidFill>
             <a:schemeClr val="tx1"/>
@@ -3010,7 +3433,7 @@
           <a:cs typeface="+mn-cs"/>
         </a:defRPr>
       </a:lvl3pPr>
-      <a:lvl4pPr marL="1371600" algn="l" defTabSz="457200" rtl="0" eaLnBrk="1" latinLnBrk="0" hangingPunct="1">
+      <a:lvl4pPr marL="1371600" algn="l" defTabSz="914400" rtl="0" eaLnBrk="1" latinLnBrk="0" hangingPunct="1">
         <a:defRPr sz="1800" kern="1200">
           <a:solidFill>
             <a:schemeClr val="tx1"/>
@@ -3020,7 +3443,7 @@
           <a:cs typeface="+mn-cs"/>
         </a:defRPr>
       </a:lvl4pPr>
-      <a:lvl5pPr marL="1828800" algn="l" defTabSz="457200" rtl="0" eaLnBrk="1" latinLnBrk="0" hangingPunct="1">
+      <a:lvl5pPr marL="1828800" algn="l" defTabSz="914400" rtl="0" eaLnBrk="1" latinLnBrk="0" hangingPunct="1">
         <a:defRPr sz="1800" kern="1200">
           <a:solidFill>
             <a:schemeClr val="tx1"/>
@@ -3030,7 +3453,7 @@
           <a:cs typeface="+mn-cs"/>
         </a:defRPr>
       </a:lvl5pPr>
-      <a:lvl6pPr marL="2286000" algn="l" defTabSz="457200" rtl="0" eaLnBrk="1" latinLnBrk="0" hangingPunct="1">
+      <a:lvl6pPr marL="2286000" algn="l" defTabSz="914400" rtl="0" eaLnBrk="1" latinLnBrk="0" hangingPunct="1">
         <a:defRPr sz="1800" kern="1200">
           <a:solidFill>
             <a:schemeClr val="tx1"/>
@@ -3040,7 +3463,7 @@
           <a:cs typeface="+mn-cs"/>
         </a:defRPr>
       </a:lvl6pPr>
-      <a:lvl7pPr marL="2743200" algn="l" defTabSz="457200" rtl="0" eaLnBrk="1" latinLnBrk="0" hangingPunct="1">
+      <a:lvl7pPr marL="2743200" algn="l" defTabSz="914400" rtl="0" eaLnBrk="1" latinLnBrk="0" hangingPunct="1">
         <a:defRPr sz="1800" kern="1200">
           <a:solidFill>
             <a:schemeClr val="tx1"/>
@@ -3050,7 +3473,7 @@
           <a:cs typeface="+mn-cs"/>
         </a:defRPr>
       </a:lvl7pPr>
-      <a:lvl8pPr marL="3200400" algn="l" defTabSz="457200" rtl="0" eaLnBrk="1" latinLnBrk="0" hangingPunct="1">
+      <a:lvl8pPr marL="3200400" algn="l" defTabSz="914400" rtl="0" eaLnBrk="1" latinLnBrk="0" hangingPunct="1">
         <a:defRPr sz="1800" kern="1200">
           <a:solidFill>
             <a:schemeClr val="tx1"/>
@@ -3060,7 +3483,7 @@
           <a:cs typeface="+mn-cs"/>
         </a:defRPr>
       </a:lvl8pPr>
-      <a:lvl9pPr marL="3657600" algn="l" defTabSz="457200" rtl="0" eaLnBrk="1" latinLnBrk="0" hangingPunct="1">
+      <a:lvl9pPr marL="3657600" algn="l" defTabSz="914400" rtl="0" eaLnBrk="1" latinLnBrk="0" hangingPunct="1">
         <a:defRPr sz="1800" kern="1200">
           <a:solidFill>
             <a:schemeClr val="tx1"/>
@@ -3075,55 +3498,1653 @@
 </p:sldMaster>
 </file>
 
+<file path=ppt/slides/slide1.xml><?xml version="1.0" encoding="utf-8"?>
+<p:sld xmlns:a="http://schemas.openxmlformats.org/drawingml/2006/main" xmlns:r="http://schemas.openxmlformats.org/officeDocument/2006/relationships" xmlns:p="http://schemas.openxmlformats.org/presentationml/2006/main">
+  <p:cSld>
+    <p:spTree>
+      <p:nvGrpSpPr>
+        <p:cNvPr id="1" name=""/>
+        <p:cNvGrpSpPr/>
+        <p:nvPr/>
+      </p:nvGrpSpPr>
+      <p:grpSpPr>
+        <a:xfrm>
+          <a:off x="0" y="0"/>
+          <a:ext cx="0" cy="0"/>
+          <a:chOff x="0" y="0"/>
+          <a:chExt cx="0" cy="0"/>
+        </a:xfrm>
+      </p:grpSpPr>
+      <p:sp>
+        <p:nvSpPr>
+          <p:cNvPr id="2" name="Title 1"/>
+          <p:cNvSpPr>
+            <a:spLocks noGrp="1"/>
+          </p:cNvSpPr>
+          <p:nvPr>
+            <p:ph type="ctrTitle"/>
+          </p:nvPr>
+        </p:nvSpPr>
+        <p:spPr>
+          <a:xfrm>
+            <a:off x="1524000" y="1122363"/>
+            <a:ext cx="9144000" cy="2387600"/>
+          </a:xfrm>
+        </p:spPr>
+        <p:txBody>
+          <a:bodyPr/>
+          <a:lstStyle/>
+          <a:p>
+            <a:r>
+              <a:rPr/>
+              <a:t>Maryland CFSR Profile</a:t>
+            </a:r>
+          </a:p>
+        </p:txBody>
+      </p:sp>
+      <p:sp>
+        <p:nvSpPr>
+          <p:cNvPr id="3" name="Subtitle 2"/>
+          <p:cNvSpPr>
+            <a:spLocks noGrp="1"/>
+          </p:cNvSpPr>
+          <p:nvPr>
+            <p:ph type="subTitle" idx="1"/>
+          </p:nvPr>
+        </p:nvSpPr>
+        <p:spPr>
+          <a:xfrm>
+            <a:off x="1524000" y="3602038"/>
+            <a:ext cx="9144000" cy="1655762"/>
+          </a:xfrm>
+        </p:spPr>
+        <p:txBody>
+          <a:bodyPr/>
+          <a:lstStyle/>
+          <a:p>
+            <a:r>
+              <a:rPr/>
+              <a:t>Data Profile Period: NA</a:t>
+            </a:r>
+          </a:p>
+        </p:txBody>
+      </p:sp>
+    </p:spTree>
+  </p:cSld>
+  <p:clrMapOvr>
+    <a:masterClrMapping/>
+  </p:clrMapOvr>
+</p:sld>
+</file>
+
+<file path=ppt/slides/slide10.xml><?xml version="1.0" encoding="utf-8"?>
+<p:sld xmlns:a="http://schemas.openxmlformats.org/drawingml/2006/main" xmlns:r="http://schemas.openxmlformats.org/officeDocument/2006/relationships" xmlns:p="http://schemas.openxmlformats.org/presentationml/2006/main">
+  <p:cSld>
+    <p:spTree>
+      <p:nvGrpSpPr>
+        <p:cNvPr id="1" name=""/>
+        <p:cNvGrpSpPr/>
+        <p:nvPr/>
+      </p:nvGrpSpPr>
+      <p:grpSpPr>
+        <a:xfrm>
+          <a:off x="0" y="0"/>
+          <a:ext cx="0" cy="0"/>
+          <a:chOff x="0" y="0"/>
+          <a:chExt cx="0" cy="0"/>
+        </a:xfrm>
+      </p:grpSpPr>
+      <p:sp>
+        <p:nvSpPr>
+          <p:cNvPr id="2" name="Title 1"/>
+          <p:cNvSpPr>
+            <a:spLocks noGrp="1"/>
+          </p:cNvSpPr>
+          <p:nvPr>
+            <p:ph type="title"/>
+          </p:nvPr>
+        </p:nvSpPr>
+        <p:spPr>
+          <a:xfrm>
+            <a:off x="354105" y="284672"/>
+            <a:ext cx="3225675" cy="857250"/>
+          </a:xfrm>
+        </p:spPr>
+        <p:txBody>
+          <a:bodyPr/>
+          <a:lstStyle/>
+          <a:p>
+            <a:r>
+              <a:rPr/>
+              <a:t>Foster care entry rate</a:t>
+            </a:r>
+          </a:p>
+        </p:txBody>
+      </p:sp>
+      <p:sp>
+        <p:nvSpPr>
+          <p:cNvPr id="3" name="Picture Placeholder 2"/>
+          <p:cNvSpPr>
+            <a:spLocks noGrp="1"/>
+          </p:cNvSpPr>
+          <p:nvPr>
+            <p:ph type="pic" idx="1"/>
+          </p:nvPr>
+        </p:nvSpPr>
+        <p:spPr>
+          <a:xfrm>
+            <a:off x="4046475" y="215657"/>
+            <a:ext cx="7924800" cy="6449543"/>
+          </a:xfrm>
+        </p:spPr>
+        <p:txBody>
+          <a:bodyPr/>
+          <a:lstStyle/>
+          <a:p>
+            <a:r>
+              <a:rPr/>
+              <a:t>[INSERT SCREENSHOT: Foster care entry rate (entries / 1,000 children) - By State chart]
+URL: http://localhost:3840/measures?indicator=Foster%20care%20entry%20rate%20%28entries%20%2F%201%2C000%20children%29&amp;state=md&amp;profile=2026_02</a:t>
+            </a:r>
+          </a:p>
+        </p:txBody>
+      </p:sp>
+      <p:sp>
+        <p:nvSpPr>
+          <p:cNvPr id="4" name="Text Placeholder 3"/>
+          <p:cNvSpPr>
+            <a:spLocks noGrp="1"/>
+          </p:cNvSpPr>
+          <p:nvPr>
+            <p:ph type="body" idx="2"/>
+          </p:nvPr>
+        </p:nvSpPr>
+        <p:spPr>
+          <a:xfrm>
+            <a:off x="342058" y="2915728"/>
+            <a:ext cx="3306731" cy="3200000"/>
+          </a:xfrm>
+        </p:spPr>
+        <p:txBody>
+          <a:bodyPr/>
+          <a:lstStyle/>
+          <a:p>
+            <a:pPr/>
+            <a:r>
+              <a:rPr/>
+              <a:t>Maryland ranks 2 of 52 reporting states</a:t>
+            </a:r>
+          </a:p>
+          <a:p>
+            <a:pPr/>
+            <a:r>
+              <a:rPr/>
+              <a:t>Performance: 3.57 per 1,000</a:t>
+            </a:r>
+          </a:p>
+          <a:p>
+            <a:pPr/>
+            <a:r>
+              <a:rPr/>
+              <a:t>Based on 43 events among 12,052 children</a:t>
+            </a:r>
+          </a:p>
+        </p:txBody>
+      </p:sp>
+    </p:spTree>
+  </p:cSld>
+  <p:clrMapOvr>
+    <a:masterClrMapping/>
+  </p:clrMapOvr>
+</p:sld>
+</file>
+
+<file path=ppt/slides/slide11.xml><?xml version="1.0" encoding="utf-8"?>
+<p:sld xmlns:a="http://schemas.openxmlformats.org/drawingml/2006/main" xmlns:r="http://schemas.openxmlformats.org/officeDocument/2006/relationships" xmlns:p="http://schemas.openxmlformats.org/presentationml/2006/main">
+  <p:cSld>
+    <p:spTree>
+      <p:nvGrpSpPr>
+        <p:cNvPr id="1" name=""/>
+        <p:cNvGrpSpPr/>
+        <p:nvPr/>
+      </p:nvGrpSpPr>
+      <p:grpSpPr>
+        <a:xfrm>
+          <a:off x="0" y="0"/>
+          <a:ext cx="0" cy="0"/>
+          <a:chOff x="0" y="0"/>
+          <a:chExt cx="0" cy="0"/>
+        </a:xfrm>
+      </p:grpSpPr>
+      <p:sp>
+        <p:nvSpPr>
+          <p:cNvPr id="2" name="Title 1"/>
+          <p:cNvSpPr>
+            <a:spLocks noGrp="1"/>
+          </p:cNvSpPr>
+          <p:nvPr>
+            <p:ph type="title"/>
+          </p:nvPr>
+        </p:nvSpPr>
+        <p:spPr>
+          <a:xfrm>
+            <a:off x="354105" y="284672"/>
+            <a:ext cx="3225675" cy="857250"/>
+          </a:xfrm>
+        </p:spPr>
+        <p:txBody>
+          <a:bodyPr/>
+          <a:lstStyle/>
+          <a:p>
+            <a:r>
+              <a:rPr/>
+              <a:t>Perm in 12 months (entries)</a:t>
+            </a:r>
+          </a:p>
+        </p:txBody>
+      </p:sp>
+      <p:sp>
+        <p:nvSpPr>
+          <p:cNvPr id="3" name="Picture Placeholder 2"/>
+          <p:cNvSpPr>
+            <a:spLocks noGrp="1"/>
+          </p:cNvSpPr>
+          <p:nvPr>
+            <p:ph type="pic" idx="1"/>
+          </p:nvPr>
+        </p:nvSpPr>
+        <p:spPr>
+          <a:xfrm>
+            <a:off x="4046475" y="215657"/>
+            <a:ext cx="7924800" cy="6449543"/>
+          </a:xfrm>
+        </p:spPr>
+        <p:txBody>
+          <a:bodyPr/>
+          <a:lstStyle/>
+          <a:p>
+            <a:r>
+              <a:rPr/>
+              <a:t>[INSERT SCREENSHOT: Permanency in 12 months for children entering care - By State chart]
+URL: http://localhost:3840/measures?indicator=Permanency%20in%2012%20months%20for%20children%20entering%20care&amp;state=md&amp;profile=2026_02</a:t>
+            </a:r>
+          </a:p>
+        </p:txBody>
+      </p:sp>
+      <p:sp>
+        <p:nvSpPr>
+          <p:cNvPr id="4" name="Text Placeholder 3"/>
+          <p:cNvSpPr>
+            <a:spLocks noGrp="1"/>
+          </p:cNvSpPr>
+          <p:nvPr>
+            <p:ph type="body" idx="2"/>
+          </p:nvPr>
+        </p:nvSpPr>
+        <p:spPr>
+          <a:xfrm>
+            <a:off x="342058" y="2915728"/>
+            <a:ext cx="3306731" cy="3200000"/>
+          </a:xfrm>
+        </p:spPr>
+        <p:txBody>
+          <a:bodyPr/>
+          <a:lstStyle/>
+          <a:p>
+            <a:pPr/>
+            <a:r>
+              <a:rPr/>
+              <a:t>Maryland ranks 42 of 49 reporting states</a:t>
+            </a:r>
+          </a:p>
+          <a:p>
+            <a:pPr/>
+            <a:r>
+              <a:rPr/>
+              <a:t>Performance: 34.5%</a:t>
+            </a:r>
+          </a:p>
+          <a:p>
+            <a:pPr/>
+            <a:r>
+              <a:rPr/>
+              <a:t>0.7% below national standard of 35.2%</a:t>
+            </a:r>
+          </a:p>
+          <a:p>
+            <a:pPr/>
+            <a:r>
+              <a:rPr/>
+              <a:t>Performance below national standard</a:t>
+            </a:r>
+          </a:p>
+          <a:p>
+            <a:pPr/>
+            <a:r>
+              <a:rPr/>
+              <a:t>Based on 10 events among 29 children</a:t>
+            </a:r>
+          </a:p>
+        </p:txBody>
+      </p:sp>
+    </p:spTree>
+  </p:cSld>
+  <p:clrMapOvr>
+    <a:masterClrMapping/>
+  </p:clrMapOvr>
+</p:sld>
+</file>
+
+<file path=ppt/slides/slide12.xml><?xml version="1.0" encoding="utf-8"?>
+<p:sld xmlns:a="http://schemas.openxmlformats.org/drawingml/2006/main" xmlns:r="http://schemas.openxmlformats.org/officeDocument/2006/relationships" xmlns:p="http://schemas.openxmlformats.org/presentationml/2006/main">
+  <p:cSld>
+    <p:spTree>
+      <p:nvGrpSpPr>
+        <p:cNvPr id="1" name=""/>
+        <p:cNvGrpSpPr/>
+        <p:nvPr/>
+      </p:nvGrpSpPr>
+      <p:grpSpPr>
+        <a:xfrm>
+          <a:off x="0" y="0"/>
+          <a:ext cx="0" cy="0"/>
+          <a:chOff x="0" y="0"/>
+          <a:chExt cx="0" cy="0"/>
+        </a:xfrm>
+      </p:grpSpPr>
+      <p:sp>
+        <p:nvSpPr>
+          <p:cNvPr id="2" name="Title 1"/>
+          <p:cNvSpPr>
+            <a:spLocks noGrp="1"/>
+          </p:cNvSpPr>
+          <p:nvPr>
+            <p:ph type="title"/>
+          </p:nvPr>
+        </p:nvSpPr>
+        <p:spPr>
+          <a:xfrm>
+            <a:off x="354105" y="284672"/>
+            <a:ext cx="3225675" cy="857250"/>
+          </a:xfrm>
+        </p:spPr>
+        <p:txBody>
+          <a:bodyPr/>
+          <a:lstStyle/>
+          <a:p>
+            <a:r>
+              <a:rPr/>
+              <a:t>Perm in 12 months (12-23 months)</a:t>
+            </a:r>
+          </a:p>
+        </p:txBody>
+      </p:sp>
+      <p:sp>
+        <p:nvSpPr>
+          <p:cNvPr id="3" name="Picture Placeholder 2"/>
+          <p:cNvSpPr>
+            <a:spLocks noGrp="1"/>
+          </p:cNvSpPr>
+          <p:nvPr>
+            <p:ph type="pic" idx="1"/>
+          </p:nvPr>
+        </p:nvSpPr>
+        <p:spPr>
+          <a:xfrm>
+            <a:off x="4046475" y="215657"/>
+            <a:ext cx="7924800" cy="6449543"/>
+          </a:xfrm>
+        </p:spPr>
+        <p:txBody>
+          <a:bodyPr/>
+          <a:lstStyle/>
+          <a:p>
+            <a:r>
+              <a:rPr/>
+              <a:t>[INSERT SCREENSHOT: Permanency in 12 months for children in care 12-23 months - By State chart]
+URL: http://localhost:3840/measures?indicator=Permanency%20in%2012%20months%20for%20children%20in%20care%2012-23%20months&amp;state=md&amp;profile=2026_02</a:t>
+            </a:r>
+          </a:p>
+        </p:txBody>
+      </p:sp>
+      <p:sp>
+        <p:nvSpPr>
+          <p:cNvPr id="4" name="Text Placeholder 3"/>
+          <p:cNvSpPr>
+            <a:spLocks noGrp="1"/>
+          </p:cNvSpPr>
+          <p:nvPr>
+            <p:ph type="body" idx="2"/>
+          </p:nvPr>
+        </p:nvSpPr>
+        <p:spPr>
+          <a:xfrm>
+            <a:off x="342058" y="2915728"/>
+            <a:ext cx="3306731" cy="3200000"/>
+          </a:xfrm>
+        </p:spPr>
+        <p:txBody>
+          <a:bodyPr/>
+          <a:lstStyle/>
+          <a:p>
+            <a:pPr/>
+            <a:r>
+              <a:rPr/>
+              <a:t>Maryland ranks 44 of 49 reporting states</a:t>
+            </a:r>
+          </a:p>
+          <a:p>
+            <a:pPr/>
+            <a:r>
+              <a:rPr/>
+              <a:t>Performance: 64.3%</a:t>
+            </a:r>
+          </a:p>
+          <a:p>
+            <a:pPr/>
+            <a:r>
+              <a:rPr/>
+              <a:t>20.5% above national standard of 43.8%</a:t>
+            </a:r>
+          </a:p>
+          <a:p>
+            <a:pPr/>
+            <a:r>
+              <a:rPr/>
+              <a:t>Performance meets or exceeds national standard</a:t>
+            </a:r>
+          </a:p>
+          <a:p>
+            <a:pPr/>
+            <a:r>
+              <a:rPr/>
+              <a:t>Based on 18 events among 28 children</a:t>
+            </a:r>
+          </a:p>
+        </p:txBody>
+      </p:sp>
+    </p:spTree>
+  </p:cSld>
+  <p:clrMapOvr>
+    <a:masterClrMapping/>
+  </p:clrMapOvr>
+</p:sld>
+</file>
+
+<file path=ppt/slides/slide13.xml><?xml version="1.0" encoding="utf-8"?>
+<p:sld xmlns:a="http://schemas.openxmlformats.org/drawingml/2006/main" xmlns:r="http://schemas.openxmlformats.org/officeDocument/2006/relationships" xmlns:p="http://schemas.openxmlformats.org/presentationml/2006/main">
+  <p:cSld>
+    <p:spTree>
+      <p:nvGrpSpPr>
+        <p:cNvPr id="1" name=""/>
+        <p:cNvGrpSpPr/>
+        <p:nvPr/>
+      </p:nvGrpSpPr>
+      <p:grpSpPr>
+        <a:xfrm>
+          <a:off x="0" y="0"/>
+          <a:ext cx="0" cy="0"/>
+          <a:chOff x="0" y="0"/>
+          <a:chExt cx="0" cy="0"/>
+        </a:xfrm>
+      </p:grpSpPr>
+      <p:sp>
+        <p:nvSpPr>
+          <p:cNvPr id="2" name="Title 1"/>
+          <p:cNvSpPr>
+            <a:spLocks noGrp="1"/>
+          </p:cNvSpPr>
+          <p:nvPr>
+            <p:ph type="title"/>
+          </p:nvPr>
+        </p:nvSpPr>
+        <p:spPr>
+          <a:xfrm>
+            <a:off x="354105" y="284672"/>
+            <a:ext cx="3225675" cy="857250"/>
+          </a:xfrm>
+        </p:spPr>
+        <p:txBody>
+          <a:bodyPr/>
+          <a:lstStyle/>
+          <a:p>
+            <a:r>
+              <a:rPr/>
+              <a:t>Perm in 12 months (24 months or more)</a:t>
+            </a:r>
+          </a:p>
+        </p:txBody>
+      </p:sp>
+      <p:sp>
+        <p:nvSpPr>
+          <p:cNvPr id="3" name="Picture Placeholder 2"/>
+          <p:cNvSpPr>
+            <a:spLocks noGrp="1"/>
+          </p:cNvSpPr>
+          <p:nvPr>
+            <p:ph type="pic" idx="1"/>
+          </p:nvPr>
+        </p:nvSpPr>
+        <p:spPr>
+          <a:xfrm>
+            <a:off x="4046475" y="215657"/>
+            <a:ext cx="7924800" cy="6449543"/>
+          </a:xfrm>
+        </p:spPr>
+        <p:txBody>
+          <a:bodyPr/>
+          <a:lstStyle/>
+          <a:p>
+            <a:r>
+              <a:rPr/>
+              <a:t>[INSERT SCREENSHOT: Permanency in 12 months for children in care 24 months or more - By State chart]
+URL: http://localhost:3840/measures?indicator=Permanency%20in%2012%20months%20for%20children%20in%20care%2024%20months%20or%20more&amp;state=md&amp;profile=2026_02</a:t>
+            </a:r>
+          </a:p>
+        </p:txBody>
+      </p:sp>
+      <p:sp>
+        <p:nvSpPr>
+          <p:cNvPr id="4" name="Text Placeholder 3"/>
+          <p:cNvSpPr>
+            <a:spLocks noGrp="1"/>
+          </p:cNvSpPr>
+          <p:nvPr>
+            <p:ph type="body" idx="2"/>
+          </p:nvPr>
+        </p:nvSpPr>
+        <p:spPr>
+          <a:xfrm>
+            <a:off x="342058" y="2915728"/>
+            <a:ext cx="3306731" cy="3200000"/>
+          </a:xfrm>
+        </p:spPr>
+        <p:txBody>
+          <a:bodyPr/>
+          <a:lstStyle/>
+          <a:p>
+            <a:pPr/>
+            <a:r>
+              <a:rPr/>
+              <a:t>Maryland ranks 36 of 49 reporting states</a:t>
+            </a:r>
+          </a:p>
+          <a:p>
+            <a:pPr/>
+            <a:r>
+              <a:rPr/>
+              <a:t>Performance: 16.7%</a:t>
+            </a:r>
+          </a:p>
+          <a:p>
+            <a:pPr/>
+            <a:r>
+              <a:rPr/>
+              <a:t>20.6% below national standard of 37.3%</a:t>
+            </a:r>
+          </a:p>
+          <a:p>
+            <a:pPr/>
+            <a:r>
+              <a:rPr/>
+              <a:t>Performance below national standard</a:t>
+            </a:r>
+          </a:p>
+          <a:p>
+            <a:pPr/>
+            <a:r>
+              <a:rPr/>
+              <a:t>Based on 1 events among 6 children</a:t>
+            </a:r>
+          </a:p>
+        </p:txBody>
+      </p:sp>
+    </p:spTree>
+  </p:cSld>
+  <p:clrMapOvr>
+    <a:masterClrMapping/>
+  </p:clrMapOvr>
+</p:sld>
+</file>
+
+<file path=ppt/slides/slide14.xml><?xml version="1.0" encoding="utf-8"?>
+<p:sld xmlns:a="http://schemas.openxmlformats.org/drawingml/2006/main" xmlns:r="http://schemas.openxmlformats.org/officeDocument/2006/relationships" xmlns:p="http://schemas.openxmlformats.org/presentationml/2006/main">
+  <p:cSld>
+    <p:spTree>
+      <p:nvGrpSpPr>
+        <p:cNvPr id="1" name=""/>
+        <p:cNvGrpSpPr/>
+        <p:nvPr/>
+      </p:nvGrpSpPr>
+      <p:grpSpPr>
+        <a:xfrm>
+          <a:off x="0" y="0"/>
+          <a:ext cx="0" cy="0"/>
+          <a:chOff x="0" y="0"/>
+          <a:chExt cx="0" cy="0"/>
+        </a:xfrm>
+      </p:grpSpPr>
+      <p:sp>
+        <p:nvSpPr>
+          <p:cNvPr id="2" name="Title 1"/>
+          <p:cNvSpPr>
+            <a:spLocks noGrp="1"/>
+          </p:cNvSpPr>
+          <p:nvPr>
+            <p:ph type="title"/>
+          </p:nvPr>
+        </p:nvSpPr>
+        <p:spPr>
+          <a:xfrm>
+            <a:off x="354105" y="284672"/>
+            <a:ext cx="3225675" cy="857250"/>
+          </a:xfrm>
+        </p:spPr>
+        <p:txBody>
+          <a:bodyPr/>
+          <a:lstStyle/>
+          <a:p>
+            <a:r>
+              <a:rPr/>
+              <a:t>Reentry to foster care within 12 months</a:t>
+            </a:r>
+          </a:p>
+        </p:txBody>
+      </p:sp>
+      <p:sp>
+        <p:nvSpPr>
+          <p:cNvPr id="3" name="Picture Placeholder 2"/>
+          <p:cNvSpPr>
+            <a:spLocks noGrp="1"/>
+          </p:cNvSpPr>
+          <p:nvPr>
+            <p:ph type="pic" idx="1"/>
+          </p:nvPr>
+        </p:nvSpPr>
+        <p:spPr>
+          <a:xfrm>
+            <a:off x="4046475" y="215657"/>
+            <a:ext cx="7924800" cy="6449543"/>
+          </a:xfrm>
+        </p:spPr>
+        <p:txBody>
+          <a:bodyPr/>
+          <a:lstStyle/>
+          <a:p>
+            <a:r>
+              <a:rPr/>
+              <a:t>[INSERT SCREENSHOT: Reentry to foster care within 12 months - By State chart]
+URL: http://localhost:3840/measures?indicator=Reentry%20to%20foster%20care%20within%2012%20months&amp;state=md&amp;profile=2026_02</a:t>
+            </a:r>
+          </a:p>
+        </p:txBody>
+      </p:sp>
+      <p:sp>
+        <p:nvSpPr>
+          <p:cNvPr id="4" name="Text Placeholder 3"/>
+          <p:cNvSpPr>
+            <a:spLocks noGrp="1"/>
+          </p:cNvSpPr>
+          <p:nvPr>
+            <p:ph type="body" idx="2"/>
+          </p:nvPr>
+        </p:nvSpPr>
+        <p:spPr>
+          <a:xfrm>
+            <a:off x="342058" y="2915728"/>
+            <a:ext cx="3306731" cy="3200000"/>
+          </a:xfrm>
+        </p:spPr>
+        <p:txBody>
+          <a:bodyPr/>
+          <a:lstStyle/>
+          <a:p>
+            <a:pPr/>
+            <a:r>
+              <a:rPr/>
+              <a:t>Maryland ranks 13 of 44 reporting states</a:t>
+            </a:r>
+          </a:p>
+          <a:p>
+            <a:pPr/>
+            <a:r>
+              <a:rPr/>
+              <a:t>Performance: 20%</a:t>
+            </a:r>
+          </a:p>
+          <a:p>
+            <a:pPr/>
+            <a:r>
+              <a:rPr/>
+              <a:t>14.4% above national standard of 5.6%</a:t>
+            </a:r>
+          </a:p>
+          <a:p>
+            <a:pPr/>
+            <a:r>
+              <a:rPr/>
+              <a:t>Performance below national standard</a:t>
+            </a:r>
+          </a:p>
+          <a:p>
+            <a:pPr/>
+            <a:r>
+              <a:rPr/>
+              <a:t>Based on 4 events among 20 children</a:t>
+            </a:r>
+          </a:p>
+        </p:txBody>
+      </p:sp>
+    </p:spTree>
+  </p:cSld>
+  <p:clrMapOvr>
+    <a:masterClrMapping/>
+  </p:clrMapOvr>
+</p:sld>
+</file>
+
+<file path=ppt/slides/slide15.xml><?xml version="1.0" encoding="utf-8"?>
+<p:sld xmlns:a="http://schemas.openxmlformats.org/drawingml/2006/main" xmlns:r="http://schemas.openxmlformats.org/officeDocument/2006/relationships" xmlns:p="http://schemas.openxmlformats.org/presentationml/2006/main">
+  <p:cSld>
+    <p:spTree>
+      <p:nvGrpSpPr>
+        <p:cNvPr id="1" name=""/>
+        <p:cNvGrpSpPr/>
+        <p:nvPr/>
+      </p:nvGrpSpPr>
+      <p:grpSpPr>
+        <a:xfrm>
+          <a:off x="0" y="0"/>
+          <a:ext cx="0" cy="0"/>
+          <a:chOff x="0" y="0"/>
+          <a:chExt cx="0" cy="0"/>
+        </a:xfrm>
+      </p:grpSpPr>
+      <p:sp>
+        <p:nvSpPr>
+          <p:cNvPr id="2" name="Title 1"/>
+          <p:cNvSpPr>
+            <a:spLocks noGrp="1"/>
+          </p:cNvSpPr>
+          <p:nvPr>
+            <p:ph type="title"/>
+          </p:nvPr>
+        </p:nvSpPr>
+        <p:spPr>
+          <a:xfrm>
+            <a:off x="354105" y="284672"/>
+            <a:ext cx="3225675" cy="857250"/>
+          </a:xfrm>
+        </p:spPr>
+        <p:txBody>
+          <a:bodyPr/>
+          <a:lstStyle/>
+          <a:p>
+            <a:r>
+              <a:rPr/>
+              <a:t>Placement stability</a:t>
+            </a:r>
+          </a:p>
+        </p:txBody>
+      </p:sp>
+      <p:sp>
+        <p:nvSpPr>
+          <p:cNvPr id="3" name="Picture Placeholder 2"/>
+          <p:cNvSpPr>
+            <a:spLocks noGrp="1"/>
+          </p:cNvSpPr>
+          <p:nvPr>
+            <p:ph type="pic" idx="1"/>
+          </p:nvPr>
+        </p:nvSpPr>
+        <p:spPr>
+          <a:xfrm>
+            <a:off x="4046475" y="215657"/>
+            <a:ext cx="7924800" cy="6449543"/>
+          </a:xfrm>
+        </p:spPr>
+        <p:txBody>
+          <a:bodyPr/>
+          <a:lstStyle/>
+          <a:p>
+            <a:r>
+              <a:rPr/>
+              <a:t>[INSERT SCREENSHOT: Placement stability (moves / 1,000 days in care) - By State chart]
+URL: http://localhost:3840/measures?indicator=Placement%20stability%20%28moves%20%2F%201%2C000%20days%20in%20care%29&amp;state=md&amp;profile=2026_02</a:t>
+            </a:r>
+          </a:p>
+        </p:txBody>
+      </p:sp>
+      <p:sp>
+        <p:nvSpPr>
+          <p:cNvPr id="4" name="Text Placeholder 3"/>
+          <p:cNvSpPr>
+            <a:spLocks noGrp="1"/>
+          </p:cNvSpPr>
+          <p:nvPr>
+            <p:ph type="body" idx="2"/>
+          </p:nvPr>
+        </p:nvSpPr>
+        <p:spPr>
+          <a:xfrm>
+            <a:off x="342058" y="2915728"/>
+            <a:ext cx="3306731" cy="3200000"/>
+          </a:xfrm>
+        </p:spPr>
+        <p:txBody>
+          <a:bodyPr/>
+          <a:lstStyle/>
+          <a:p>
+            <a:pPr/>
+            <a:r>
+              <a:rPr/>
+              <a:t>Maryland ranks 26 of 49 reporting states</a:t>
+            </a:r>
+          </a:p>
+          <a:p>
+            <a:pPr/>
+            <a:r>
+              <a:rPr/>
+              <a:t>Performance: 3.9 per 1,000</a:t>
+            </a:r>
+          </a:p>
+          <a:p>
+            <a:pPr/>
+            <a:r>
+              <a:rPr/>
+              <a:t>0.58 below national standard of 4.48</a:t>
+            </a:r>
+          </a:p>
+          <a:p>
+            <a:pPr/>
+            <a:r>
+              <a:rPr/>
+              <a:t>Performance meets or exceeds national standard</a:t>
+            </a:r>
+          </a:p>
+          <a:p>
+            <a:pPr/>
+            <a:r>
+              <a:rPr/>
+              <a:t>Based on 18 events among 4,616 children</a:t>
+            </a:r>
+          </a:p>
+        </p:txBody>
+      </p:sp>
+    </p:spTree>
+  </p:cSld>
+  <p:clrMapOvr>
+    <a:masterClrMapping/>
+  </p:clrMapOvr>
+</p:sld>
+</file>
+
+<file path=ppt/slides/slide2.xml><?xml version="1.0" encoding="utf-8"?>
+<p:sld xmlns:a="http://schemas.openxmlformats.org/drawingml/2006/main" xmlns:r="http://schemas.openxmlformats.org/officeDocument/2006/relationships" xmlns:p="http://schemas.openxmlformats.org/presentationml/2006/main">
+  <p:cSld>
+    <p:spTree>
+      <p:nvGrpSpPr>
+        <p:cNvPr id="1" name=""/>
+        <p:cNvGrpSpPr/>
+        <p:nvPr/>
+      </p:nvGrpSpPr>
+      <p:grpSpPr>
+        <a:xfrm>
+          <a:off x="0" y="0"/>
+          <a:ext cx="0" cy="0"/>
+          <a:chOff x="0" y="0"/>
+          <a:chExt cx="0" cy="0"/>
+        </a:xfrm>
+      </p:grpSpPr>
+      <p:sp>
+        <p:nvSpPr>
+          <p:cNvPr id="2" name="Title 1"/>
+          <p:cNvSpPr>
+            <a:spLocks noGrp="1"/>
+          </p:cNvSpPr>
+          <p:nvPr>
+            <p:ph type="title"/>
+          </p:nvPr>
+        </p:nvSpPr>
+        <p:spPr>
+          <a:xfrm>
+            <a:off x="838200" y="365125"/>
+            <a:ext cx="10515600" cy="1325563"/>
+          </a:xfrm>
+        </p:spPr>
+        <p:txBody>
+          <a:bodyPr/>
+          <a:lstStyle/>
+          <a:p>
+            <a:r>
+              <a:rPr/>
+              <a:t>CFSR Round 4 Profile</a:t>
+            </a:r>
+          </a:p>
+        </p:txBody>
+      </p:sp>
+      <p:sp>
+        <p:nvSpPr>
+          <p:cNvPr id="3" name="Content Placeholder 2"/>
+          <p:cNvSpPr>
+            <a:spLocks noGrp="1"/>
+          </p:cNvSpPr>
+          <p:nvPr>
+            <p:ph idx="1"/>
+          </p:nvPr>
+        </p:nvSpPr>
+        <p:spPr>
+          <a:xfrm>
+            <a:off x="838200" y="1825625"/>
+            <a:ext cx="10515600" cy="3788062"/>
+          </a:xfrm>
+        </p:spPr>
+        <p:txBody>
+          <a:bodyPr/>
+          <a:lstStyle/>
+          <a:p>
+            <a:pPr/>
+            <a:r>
+              <a:rPr/>
+              <a:t>Children's Bureau provides CFSR Round 4 Data Profiles every 6 months</a:t>
+            </a:r>
+          </a:p>
+          <a:p>
+            <a:pPr/>
+            <a:r>
+              <a:rPr/>
+              <a:t>Shows your state's risk-standardized performance (RSP) and observed performance</a:t>
+            </a:r>
+          </a:p>
+          <a:p>
+            <a:pPr/>
+            <a:r>
+              <a:rPr/>
+              <a:t>RSP is observed performance but with risk-adjustment</a:t>
+            </a:r>
+          </a:p>
+          <a:p>
+            <a:pPr/>
+            <a:r>
+              <a:rPr/>
+              <a:t>RSP is compared to the national performance to see if performance is statistically better, worse, or no different than national performance</a:t>
+            </a:r>
+          </a:p>
+        </p:txBody>
+      </p:sp>
+    </p:spTree>
+  </p:cSld>
+  <p:clrMapOvr>
+    <a:masterClrMapping/>
+  </p:clrMapOvr>
+</p:sld>
+</file>
+
+<file path=ppt/slides/slide3.xml><?xml version="1.0" encoding="utf-8"?>
+<p:sld xmlns:a="http://schemas.openxmlformats.org/drawingml/2006/main" xmlns:r="http://schemas.openxmlformats.org/officeDocument/2006/relationships" xmlns:p="http://schemas.openxmlformats.org/presentationml/2006/main">
+  <p:cSld>
+    <p:spTree>
+      <p:nvGrpSpPr>
+        <p:cNvPr id="1" name=""/>
+        <p:cNvGrpSpPr/>
+        <p:nvPr/>
+      </p:nvGrpSpPr>
+      <p:grpSpPr>
+        <a:xfrm>
+          <a:off x="0" y="0"/>
+          <a:ext cx="0" cy="0"/>
+          <a:chOff x="0" y="0"/>
+          <a:chExt cx="0" cy="0"/>
+        </a:xfrm>
+      </p:grpSpPr>
+      <p:sp>
+        <p:nvSpPr>
+          <p:cNvPr id="2" name="Title 1"/>
+          <p:cNvSpPr>
+            <a:spLocks noGrp="1"/>
+          </p:cNvSpPr>
+          <p:nvPr>
+            <p:ph type="title"/>
+          </p:nvPr>
+        </p:nvSpPr>
+        <p:spPr>
+          <a:xfrm>
+            <a:off x="831850" y="1709738"/>
+            <a:ext cx="10515600" cy="2852737"/>
+          </a:xfrm>
+        </p:spPr>
+        <p:txBody>
+          <a:bodyPr/>
+          <a:lstStyle/>
+          <a:p>
+            <a:r>
+              <a:rPr/>
+              <a:t>CFSR Performance Summary</a:t>
+            </a:r>
+          </a:p>
+        </p:txBody>
+      </p:sp>
+    </p:spTree>
+  </p:cSld>
+  <p:clrMapOvr>
+    <a:masterClrMapping/>
+  </p:clrMapOvr>
+</p:sld>
+</file>
+
+<file path=ppt/slides/slide4.xml><?xml version="1.0" encoding="utf-8"?>
+<p:sld xmlns:a="http://schemas.openxmlformats.org/drawingml/2006/main" xmlns:r="http://schemas.openxmlformats.org/officeDocument/2006/relationships" xmlns:p="http://schemas.openxmlformats.org/presentationml/2006/main">
+  <p:cSld>
+    <p:spTree>
+      <p:nvGrpSpPr>
+        <p:cNvPr id="1" name=""/>
+        <p:cNvGrpSpPr/>
+        <p:nvPr/>
+      </p:nvGrpSpPr>
+      <p:grpSpPr>
+        <a:xfrm>
+          <a:off x="0" y="0"/>
+          <a:ext cx="0" cy="0"/>
+          <a:chOff x="0" y="0"/>
+          <a:chExt cx="0" cy="0"/>
+        </a:xfrm>
+      </p:grpSpPr>
+      <p:sp>
+        <p:nvSpPr>
+          <p:cNvPr id="2" name="Title 1"/>
+          <p:cNvSpPr>
+            <a:spLocks noGrp="1"/>
+          </p:cNvSpPr>
+          <p:nvPr>
+            <p:ph type="title"/>
+          </p:nvPr>
+        </p:nvSpPr>
+        <p:spPr>
+          <a:xfrm>
+            <a:off x="354105" y="284672"/>
+            <a:ext cx="3225675" cy="480060"/>
+          </a:xfrm>
+        </p:spPr>
+        <p:txBody>
+          <a:bodyPr/>
+          <a:lstStyle/>
+          <a:p>
+            <a:r>
+              <a:rPr/>
+              <a:t>Overall Performance Summary</a:t>
+            </a:r>
+          </a:p>
+        </p:txBody>
+      </p:sp>
+      <p:sp>
+        <p:nvSpPr>
+          <p:cNvPr id="3" name="Picture Placeholder 2"/>
+          <p:cNvSpPr>
+            <a:spLocks noGrp="1"/>
+          </p:cNvSpPr>
+          <p:nvPr>
+            <p:ph type="pic" idx="1"/>
+          </p:nvPr>
+        </p:nvSpPr>
+        <p:spPr>
+          <a:xfrm>
+            <a:off x="170688" y="1759268"/>
+            <a:ext cx="11783400" cy="4916133"/>
+          </a:xfrm>
+        </p:spPr>
+        <p:txBody>
+          <a:bodyPr/>
+          <a:lstStyle/>
+          <a:p>
+            <a:r>
+              <a:rPr/>
+              <a:t>[INSERT SCREENSHOT: Summary App]
+URL: http://localhost:3840/?state=md&amp;profile=2026_02</a:t>
+            </a:r>
+          </a:p>
+        </p:txBody>
+      </p:sp>
+    </p:spTree>
+  </p:cSld>
+  <p:clrMapOvr>
+    <a:masterClrMapping/>
+  </p:clrMapOvr>
+</p:sld>
+</file>
+
+<file path=ppt/slides/slide5.xml><?xml version="1.0" encoding="utf-8"?>
+<p:sld xmlns:a="http://schemas.openxmlformats.org/drawingml/2006/main" xmlns:r="http://schemas.openxmlformats.org/officeDocument/2006/relationships" xmlns:p="http://schemas.openxmlformats.org/presentationml/2006/main">
+  <p:cSld>
+    <p:spTree>
+      <p:nvGrpSpPr>
+        <p:cNvPr id="1" name=""/>
+        <p:cNvGrpSpPr/>
+        <p:nvPr/>
+      </p:nvGrpSpPr>
+      <p:grpSpPr>
+        <a:xfrm>
+          <a:off x="0" y="0"/>
+          <a:ext cx="0" cy="0"/>
+          <a:chOff x="0" y="0"/>
+          <a:chExt cx="0" cy="0"/>
+        </a:xfrm>
+      </p:grpSpPr>
+      <p:sp>
+        <p:nvSpPr>
+          <p:cNvPr id="2" name="Title 1"/>
+          <p:cNvSpPr>
+            <a:spLocks noGrp="1"/>
+          </p:cNvSpPr>
+          <p:nvPr>
+            <p:ph type="title"/>
+          </p:nvPr>
+        </p:nvSpPr>
+        <p:spPr>
+          <a:xfrm>
+            <a:off x="354105" y="284672"/>
+            <a:ext cx="3225675" cy="857250"/>
+          </a:xfrm>
+        </p:spPr>
+        <p:txBody>
+          <a:bodyPr/>
+          <a:lstStyle/>
+          <a:p>
+            <a:r>
+              <a:rPr/>
+              <a:t>Risk-Standardized Performance Overview</a:t>
+            </a:r>
+          </a:p>
+        </p:txBody>
+      </p:sp>
+      <p:sp>
+        <p:nvSpPr>
+          <p:cNvPr id="3" name="Picture Placeholder 2"/>
+          <p:cNvSpPr>
+            <a:spLocks noGrp="1"/>
+          </p:cNvSpPr>
+          <p:nvPr>
+            <p:ph type="pic" idx="1"/>
+          </p:nvPr>
+        </p:nvSpPr>
+        <p:spPr>
+          <a:xfrm>
+            <a:off x="4046475" y="215657"/>
+            <a:ext cx="7924800" cy="6449543"/>
+          </a:xfrm>
+        </p:spPr>
+        <p:txBody>
+          <a:bodyPr/>
+          <a:lstStyle/>
+          <a:p>
+            <a:r>
+              <a:rPr/>
+              <a:t>[INSERT SCREENSHOT: RSP KPI Cards]
+URL: http://localhost:3840/rsp?state=md&amp;profile=2026_02</a:t>
+            </a:r>
+          </a:p>
+        </p:txBody>
+      </p:sp>
+    </p:spTree>
+  </p:cSld>
+  <p:clrMapOvr>
+    <a:masterClrMapping/>
+  </p:clrMapOvr>
+</p:sld>
+</file>
+
+<file path=ppt/slides/slide6.xml><?xml version="1.0" encoding="utf-8"?>
+<p:sld xmlns:a="http://schemas.openxmlformats.org/drawingml/2006/main" xmlns:r="http://schemas.openxmlformats.org/officeDocument/2006/relationships" xmlns:p="http://schemas.openxmlformats.org/presentationml/2006/main">
+  <p:cSld>
+    <p:spTree>
+      <p:nvGrpSpPr>
+        <p:cNvPr id="1" name=""/>
+        <p:cNvGrpSpPr/>
+        <p:nvPr/>
+      </p:nvGrpSpPr>
+      <p:grpSpPr>
+        <a:xfrm>
+          <a:off x="0" y="0"/>
+          <a:ext cx="0" cy="0"/>
+          <a:chOff x="0" y="0"/>
+          <a:chExt cx="0" cy="0"/>
+        </a:xfrm>
+      </p:grpSpPr>
+      <p:sp>
+        <p:nvSpPr>
+          <p:cNvPr id="2" name="Title 1"/>
+          <p:cNvSpPr>
+            <a:spLocks noGrp="1"/>
+          </p:cNvSpPr>
+          <p:nvPr>
+            <p:ph type="title"/>
+          </p:nvPr>
+        </p:nvSpPr>
+        <p:spPr>
+          <a:xfrm>
+            <a:off x="354105" y="284672"/>
+            <a:ext cx="3225675" cy="857250"/>
+          </a:xfrm>
+        </p:spPr>
+        <p:txBody>
+          <a:bodyPr/>
+          <a:lstStyle/>
+          <a:p>
+            <a:r>
+              <a:rPr/>
+              <a:t>Observed Performance Overview</a:t>
+            </a:r>
+          </a:p>
+        </p:txBody>
+      </p:sp>
+      <p:sp>
+        <p:nvSpPr>
+          <p:cNvPr id="3" name="Picture Placeholder 2"/>
+          <p:cNvSpPr>
+            <a:spLocks noGrp="1"/>
+          </p:cNvSpPr>
+          <p:nvPr>
+            <p:ph type="pic" idx="1"/>
+          </p:nvPr>
+        </p:nvSpPr>
+        <p:spPr>
+          <a:xfrm>
+            <a:off x="4046475" y="215657"/>
+            <a:ext cx="7924800" cy="6449543"/>
+          </a:xfrm>
+        </p:spPr>
+        <p:txBody>
+          <a:bodyPr/>
+          <a:lstStyle/>
+          <a:p>
+            <a:r>
+              <a:rPr/>
+              <a:t>[INSERT SCREENSHOT: Observed KPI Cards]
+URL: http://localhost:3840/observed?state=md&amp;profile=2026_02</a:t>
+            </a:r>
+          </a:p>
+        </p:txBody>
+      </p:sp>
+    </p:spTree>
+  </p:cSld>
+  <p:clrMapOvr>
+    <a:masterClrMapping/>
+  </p:clrMapOvr>
+</p:sld>
+</file>
+
+<file path=ppt/slides/slide7.xml><?xml version="1.0" encoding="utf-8"?>
+<p:sld xmlns:a="http://schemas.openxmlformats.org/drawingml/2006/main" xmlns:r="http://schemas.openxmlformats.org/officeDocument/2006/relationships" xmlns:p="http://schemas.openxmlformats.org/presentationml/2006/main">
+  <p:cSld>
+    <p:spTree>
+      <p:nvGrpSpPr>
+        <p:cNvPr id="1" name=""/>
+        <p:cNvGrpSpPr/>
+        <p:nvPr/>
+      </p:nvGrpSpPr>
+      <p:grpSpPr>
+        <a:xfrm>
+          <a:off x="0" y="0"/>
+          <a:ext cx="0" cy="0"/>
+          <a:chOff x="0" y="0"/>
+          <a:chExt cx="0" cy="0"/>
+        </a:xfrm>
+      </p:grpSpPr>
+      <p:sp>
+        <p:nvSpPr>
+          <p:cNvPr id="2" name="Title 1"/>
+          <p:cNvSpPr>
+            <a:spLocks noGrp="1"/>
+          </p:cNvSpPr>
+          <p:nvPr>
+            <p:ph type="title"/>
+          </p:nvPr>
+        </p:nvSpPr>
+        <p:spPr>
+          <a:xfrm>
+            <a:off x="831850" y="1709738"/>
+            <a:ext cx="10515600" cy="2852737"/>
+          </a:xfrm>
+        </p:spPr>
+        <p:txBody>
+          <a:bodyPr/>
+          <a:lstStyle/>
+          <a:p>
+            <a:r>
+              <a:rPr/>
+              <a:t>Individual Indicators</a:t>
+            </a:r>
+          </a:p>
+        </p:txBody>
+      </p:sp>
+    </p:spTree>
+  </p:cSld>
+  <p:clrMapOvr>
+    <a:masterClrMapping/>
+  </p:clrMapOvr>
+</p:sld>
+</file>
+
+<file path=ppt/slides/slide8.xml><?xml version="1.0" encoding="utf-8"?>
+<p:sld xmlns:a="http://schemas.openxmlformats.org/drawingml/2006/main" xmlns:r="http://schemas.openxmlformats.org/officeDocument/2006/relationships" xmlns:p="http://schemas.openxmlformats.org/presentationml/2006/main">
+  <p:cSld>
+    <p:spTree>
+      <p:nvGrpSpPr>
+        <p:cNvPr id="1" name=""/>
+        <p:cNvGrpSpPr/>
+        <p:nvPr/>
+      </p:nvGrpSpPr>
+      <p:grpSpPr>
+        <a:xfrm>
+          <a:off x="0" y="0"/>
+          <a:ext cx="0" cy="0"/>
+          <a:chOff x="0" y="0"/>
+          <a:chExt cx="0" cy="0"/>
+        </a:xfrm>
+      </p:grpSpPr>
+      <p:sp>
+        <p:nvSpPr>
+          <p:cNvPr id="2" name="Title 1"/>
+          <p:cNvSpPr>
+            <a:spLocks noGrp="1"/>
+          </p:cNvSpPr>
+          <p:nvPr>
+            <p:ph type="title"/>
+          </p:nvPr>
+        </p:nvSpPr>
+        <p:spPr>
+          <a:xfrm>
+            <a:off x="354105" y="284672"/>
+            <a:ext cx="3225675" cy="857250"/>
+          </a:xfrm>
+        </p:spPr>
+        <p:txBody>
+          <a:bodyPr/>
+          <a:lstStyle/>
+          <a:p>
+            <a:r>
+              <a:rPr/>
+              <a:t>Maltreatment in foster care</a:t>
+            </a:r>
+          </a:p>
+        </p:txBody>
+      </p:sp>
+      <p:sp>
+        <p:nvSpPr>
+          <p:cNvPr id="3" name="Picture Placeholder 2"/>
+          <p:cNvSpPr>
+            <a:spLocks noGrp="1"/>
+          </p:cNvSpPr>
+          <p:nvPr>
+            <p:ph type="pic" idx="1"/>
+          </p:nvPr>
+        </p:nvSpPr>
+        <p:spPr>
+          <a:xfrm>
+            <a:off x="4046475" y="215657"/>
+            <a:ext cx="7924800" cy="6449543"/>
+          </a:xfrm>
+        </p:spPr>
+        <p:txBody>
+          <a:bodyPr/>
+          <a:lstStyle/>
+          <a:p>
+            <a:r>
+              <a:rPr/>
+              <a:t>[INSERT SCREENSHOT: Maltreatment in care (victimizations / 100,000 days in care) - By State chart]
+URL: http://localhost:3840/measures?indicator=Maltreatment%20in%20care%20%28victimizations%20%2F%20100%2C000%20days%20in%20care%29&amp;state=md&amp;profile=2026_02</a:t>
+            </a:r>
+          </a:p>
+        </p:txBody>
+      </p:sp>
+      <p:sp>
+        <p:nvSpPr>
+          <p:cNvPr id="4" name="Text Placeholder 3"/>
+          <p:cNvSpPr>
+            <a:spLocks noGrp="1"/>
+          </p:cNvSpPr>
+          <p:nvPr>
+            <p:ph type="body" idx="2"/>
+          </p:nvPr>
+        </p:nvSpPr>
+        <p:spPr>
+          <a:xfrm>
+            <a:off x="342058" y="2915728"/>
+            <a:ext cx="3306731" cy="3200000"/>
+          </a:xfrm>
+        </p:spPr>
+        <p:txBody>
+          <a:bodyPr/>
+          <a:lstStyle/>
+          <a:p>
+            <a:pPr/>
+            <a:r>
+              <a:rPr/>
+              <a:t>Maryland ranks 45 of 51 reporting states</a:t>
+            </a:r>
+          </a:p>
+          <a:p>
+            <a:pPr/>
+            <a:r>
+              <a:rPr/>
+              <a:t>Performance: 10.04 per 100,000</a:t>
+            </a:r>
+          </a:p>
+          <a:p>
+            <a:pPr/>
+            <a:r>
+              <a:rPr/>
+              <a:t>0.97 above national standard of 9.07</a:t>
+            </a:r>
+          </a:p>
+          <a:p>
+            <a:pPr/>
+            <a:r>
+              <a:rPr/>
+              <a:t>Performance below national standard</a:t>
+            </a:r>
+          </a:p>
+          <a:p>
+            <a:pPr/>
+            <a:r>
+              <a:rPr/>
+              <a:t>Based on 2 events among 19,913 children</a:t>
+            </a:r>
+          </a:p>
+        </p:txBody>
+      </p:sp>
+    </p:spTree>
+  </p:cSld>
+  <p:clrMapOvr>
+    <a:masterClrMapping/>
+  </p:clrMapOvr>
+</p:sld>
+</file>
+
+<file path=ppt/slides/slide9.xml><?xml version="1.0" encoding="utf-8"?>
+<p:sld xmlns:a="http://schemas.openxmlformats.org/drawingml/2006/main" xmlns:r="http://schemas.openxmlformats.org/officeDocument/2006/relationships" xmlns:p="http://schemas.openxmlformats.org/presentationml/2006/main">
+  <p:cSld>
+    <p:spTree>
+      <p:nvGrpSpPr>
+        <p:cNvPr id="1" name=""/>
+        <p:cNvGrpSpPr/>
+        <p:nvPr/>
+      </p:nvGrpSpPr>
+      <p:grpSpPr>
+        <a:xfrm>
+          <a:off x="0" y="0"/>
+          <a:ext cx="0" cy="0"/>
+          <a:chOff x="0" y="0"/>
+          <a:chExt cx="0" cy="0"/>
+        </a:xfrm>
+      </p:grpSpPr>
+      <p:sp>
+        <p:nvSpPr>
+          <p:cNvPr id="2" name="Title 1"/>
+          <p:cNvSpPr>
+            <a:spLocks noGrp="1"/>
+          </p:cNvSpPr>
+          <p:nvPr>
+            <p:ph type="title"/>
+          </p:nvPr>
+        </p:nvSpPr>
+        <p:spPr>
+          <a:xfrm>
+            <a:off x="354105" y="284672"/>
+            <a:ext cx="3225675" cy="857250"/>
+          </a:xfrm>
+        </p:spPr>
+        <p:txBody>
+          <a:bodyPr/>
+          <a:lstStyle/>
+          <a:p>
+            <a:r>
+              <a:rPr/>
+              <a:t>Maltreatment recurrence within 12 months</a:t>
+            </a:r>
+          </a:p>
+        </p:txBody>
+      </p:sp>
+      <p:sp>
+        <p:nvSpPr>
+          <p:cNvPr id="3" name="Picture Placeholder 2"/>
+          <p:cNvSpPr>
+            <a:spLocks noGrp="1"/>
+          </p:cNvSpPr>
+          <p:nvPr>
+            <p:ph type="pic" idx="1"/>
+          </p:nvPr>
+        </p:nvSpPr>
+        <p:spPr>
+          <a:xfrm>
+            <a:off x="4046475" y="215657"/>
+            <a:ext cx="7924800" cy="6449543"/>
+          </a:xfrm>
+        </p:spPr>
+        <p:txBody>
+          <a:bodyPr/>
+          <a:lstStyle/>
+          <a:p>
+            <a:r>
+              <a:rPr/>
+              <a:t>[INSERT SCREENSHOT: Maltreatment recurrence within 12 months - By State chart]
+URL: http://localhost:3840/measures?indicator=Maltreatment%20recurrence%20within%2012%20months&amp;state=md&amp;profile=2026_02</a:t>
+            </a:r>
+          </a:p>
+        </p:txBody>
+      </p:sp>
+      <p:sp>
+        <p:nvSpPr>
+          <p:cNvPr id="4" name="Text Placeholder 3"/>
+          <p:cNvSpPr>
+            <a:spLocks noGrp="1"/>
+          </p:cNvSpPr>
+          <p:nvPr>
+            <p:ph type="body" idx="2"/>
+          </p:nvPr>
+        </p:nvSpPr>
+        <p:spPr>
+          <a:xfrm>
+            <a:off x="342058" y="2915728"/>
+            <a:ext cx="3306731" cy="3200000"/>
+          </a:xfrm>
+        </p:spPr>
+        <p:txBody>
+          <a:bodyPr/>
+          <a:lstStyle/>
+          <a:p>
+            <a:pPr/>
+            <a:r>
+              <a:rPr/>
+              <a:t>Maryland ranks 28 of 50 reporting states</a:t>
+            </a:r>
+          </a:p>
+          <a:p>
+            <a:pPr/>
+            <a:r>
+              <a:rPr/>
+              <a:t>Performance: 19.8%</a:t>
+            </a:r>
+          </a:p>
+          <a:p>
+            <a:pPr/>
+            <a:r>
+              <a:rPr/>
+              <a:t>10.1% above national standard of 9.7%</a:t>
+            </a:r>
+          </a:p>
+          <a:p>
+            <a:pPr/>
+            <a:r>
+              <a:rPr/>
+              <a:t>Performance below national standard</a:t>
+            </a:r>
+          </a:p>
+          <a:p>
+            <a:pPr/>
+            <a:r>
+              <a:rPr/>
+              <a:t>Based on 19 events among 96 children</a:t>
+            </a:r>
+          </a:p>
+        </p:txBody>
+      </p:sp>
+    </p:spTree>
+  </p:cSld>
+  <p:clrMapOvr>
+    <a:masterClrMapping/>
+  </p:clrMapOvr>
+</p:sld>
+</file>
+
 <file path=ppt/theme/theme1.xml><?xml version="1.0" encoding="utf-8"?>
 <a:theme xmlns:a="http://schemas.openxmlformats.org/drawingml/2006/main" name="Office Theme">
   <a:themeElements>
     <a:clrScheme name="Office">
       <a:dk1>
-        <a:sysClr val="windowText" lastClr="000000"/>
+        <a:srgbClr val="1F2937"/>
       </a:dk1>
       <a:lt1>
-        <a:sysClr val="window" lastClr="FFFFFF"/>
+        <a:srgbClr val="FFFFFF"/>
       </a:lt1>
       <a:dk2>
-        <a:srgbClr val="1F497D"/>
+        <a:srgbClr val="2B4162"/>
       </a:dk2>
       <a:lt2>
-        <a:srgbClr val="EEECE1"/>
+        <a:srgbClr val="E7ECF2"/>
       </a:lt2>
       <a:accent1>
-        <a:srgbClr val="4F81BD"/>
+        <a:srgbClr val="4472C4"/>
       </a:accent1>
       <a:accent2>
-        <a:srgbClr val="C0504D"/>
+        <a:srgbClr val="2B5797"/>
       </a:accent2>
       <a:accent3>
-        <a:srgbClr val="9BBB59"/>
+        <a:srgbClr val="5B9BD5"/>
       </a:accent3>
       <a:accent4>
-        <a:srgbClr val="8064A2"/>
+        <a:srgbClr val="ED7D31"/>
       </a:accent4>
       <a:accent5>
-        <a:srgbClr val="4BACC6"/>
+        <a:srgbClr val="70AD47"/>
       </a:accent5>
       <a:accent6>
-        <a:srgbClr val="F79646"/>
+        <a:srgbClr val="264478"/>
       </a:accent6>
       <a:hlink>
-        <a:srgbClr val="0000FF"/>
+        <a:srgbClr val="467886"/>
       </a:hlink>
       <a:folHlink>
-        <a:srgbClr val="800080"/>
+        <a:srgbClr val="96607D"/>
       </a:folHlink>
     </a:clrScheme>
     <a:fontScheme name="Office">
       <a:majorFont>
-        <a:latin typeface="Calibri"/>
+        <a:latin typeface="Aptos Display" panose="02110004020202020204"/>
         <a:ea typeface=""/>
         <a:cs typeface=""/>
-        <a:font script="Jpan" typeface="ＭＳ Ｐゴシック"/>
+        <a:font script="Jpan" typeface="游ゴシック Light"/>
         <a:font script="Hang" typeface="맑은 고딕"/>
-        <a:font script="Hans" typeface="宋体"/>
+        <a:font script="Hans" typeface="等线 Light"/>
         <a:font script="Hant" typeface="新細明體"/>
         <a:font script="Arab" typeface="Times New Roman"/>
         <a:font script="Hebr" typeface="Times New Roman"/>
@@ -3151,14 +5172,31 @@
         <a:font script="Viet" typeface="Times New Roman"/>
         <a:font script="Uigh" typeface="Microsoft Uighur"/>
         <a:font script="Geor" typeface="Sylfaen"/>
+        <a:font script="Armn" typeface="Arial"/>
+        <a:font script="Bugi" typeface="Leelawadee UI"/>
+        <a:font script="Bopo" typeface="Microsoft JhengHei"/>
+        <a:font script="Java" typeface="Javanese Text"/>
+        <a:font script="Lisu" typeface="Segoe UI"/>
+        <a:font script="Mymr" typeface="Myanmar Text"/>
+        <a:font script="Nkoo" typeface="Ebrima"/>
+        <a:font script="Olck" typeface="Nirmala UI"/>
+        <a:font script="Osma" typeface="Ebrima"/>
+        <a:font script="Phag" typeface="Phagspa"/>
+        <a:font script="Syrn" typeface="Estrangelo Edessa"/>
+        <a:font script="Syrj" typeface="Estrangelo Edessa"/>
+        <a:font script="Syre" typeface="Estrangelo Edessa"/>
+        <a:font script="Sora" typeface="Nirmala UI"/>
+        <a:font script="Tale" typeface="Microsoft Tai Le"/>
+        <a:font script="Talu" typeface="Microsoft New Tai Lue"/>
+        <a:font script="Tfng" typeface="Ebrima"/>
       </a:majorFont>
       <a:minorFont>
-        <a:latin typeface="Calibri"/>
+        <a:latin typeface="Aptos" panose="02110004020202020204"/>
         <a:ea typeface=""/>
         <a:cs typeface=""/>
-        <a:font script="Jpan" typeface="ＭＳ Ｐゴシック"/>
+        <a:font script="Jpan" typeface="游ゴシック"/>
         <a:font script="Hang" typeface="맑은 고딕"/>
-        <a:font script="Hans" typeface="宋体"/>
+        <a:font script="Hans" typeface="等线"/>
         <a:font script="Hant" typeface="新細明體"/>
         <a:font script="Arab" typeface="Arial"/>
         <a:font script="Hebr" typeface="Arial"/>
@@ -3186,6 +5224,23 @@
         <a:font script="Viet" typeface="Arial"/>
         <a:font script="Uigh" typeface="Microsoft Uighur"/>
         <a:font script="Geor" typeface="Sylfaen"/>
+        <a:font script="Armn" typeface="Arial"/>
+        <a:font script="Bugi" typeface="Leelawadee UI"/>
+        <a:font script="Bopo" typeface="Microsoft JhengHei"/>
+        <a:font script="Java" typeface="Javanese Text"/>
+        <a:font script="Lisu" typeface="Segoe UI"/>
+        <a:font script="Mymr" typeface="Myanmar Text"/>
+        <a:font script="Nkoo" typeface="Ebrima"/>
+        <a:font script="Olck" typeface="Nirmala UI"/>
+        <a:font script="Osma" typeface="Ebrima"/>
+        <a:font script="Phag" typeface="Phagspa"/>
+        <a:font script="Syrn" typeface="Estrangelo Edessa"/>
+        <a:font script="Syrj" typeface="Estrangelo Edessa"/>
+        <a:font script="Syre" typeface="Estrangelo Edessa"/>
+        <a:font script="Sora" typeface="Nirmala UI"/>
+        <a:font script="Tale" typeface="Microsoft Tai Le"/>
+        <a:font script="Talu" typeface="Microsoft New Tai Lue"/>
+        <a:font script="Tfng" typeface="Ebrima"/>
       </a:minorFont>
     </a:fontScheme>
     <a:fmtScheme name="Office">
@@ -3197,180 +5252,136 @@
           <a:gsLst>
             <a:gs pos="0">
               <a:schemeClr val="phClr">
-                <a:tint val="50000"/>
-                <a:satMod val="300000"/>
+                <a:lumMod val="110000"/>
+                <a:satMod val="105000"/>
+                <a:tint val="67000"/>
               </a:schemeClr>
             </a:gs>
-            <a:gs pos="35000">
+            <a:gs pos="50000">
               <a:schemeClr val="phClr">
-                <a:tint val="37000"/>
-                <a:satMod val="300000"/>
+                <a:lumMod val="105000"/>
+                <a:satMod val="103000"/>
+                <a:tint val="73000"/>
               </a:schemeClr>
             </a:gs>
             <a:gs pos="100000">
               <a:schemeClr val="phClr">
-                <a:tint val="15000"/>
-                <a:satMod val="350000"/>
+                <a:lumMod val="105000"/>
+                <a:satMod val="109000"/>
+                <a:tint val="81000"/>
               </a:schemeClr>
             </a:gs>
           </a:gsLst>
-          <a:lin ang="16200000" scaled="1"/>
+          <a:lin ang="5400000" scaled="0"/>
         </a:gradFill>
         <a:gradFill rotWithShape="1">
           <a:gsLst>
             <a:gs pos="0">
               <a:schemeClr val="phClr">
-                <a:tint val="100000"/>
+                <a:satMod val="103000"/>
+                <a:lumMod val="102000"/>
+                <a:tint val="94000"/>
+              </a:schemeClr>
+            </a:gs>
+            <a:gs pos="50000">
+              <a:schemeClr val="phClr">
+                <a:satMod val="110000"/>
+                <a:lumMod val="100000"/>
                 <a:shade val="100000"/>
-                <a:satMod val="130000"/>
               </a:schemeClr>
             </a:gs>
             <a:gs pos="100000">
               <a:schemeClr val="phClr">
-                <a:tint val="50000"/>
-                <a:shade val="100000"/>
-                <a:satMod val="350000"/>
+                <a:lumMod val="99000"/>
+                <a:satMod val="120000"/>
+                <a:shade val="78000"/>
               </a:schemeClr>
             </a:gs>
           </a:gsLst>
-          <a:lin ang="16200000" scaled="0"/>
+          <a:lin ang="5400000" scaled="0"/>
         </a:gradFill>
       </a:fillStyleLst>
       <a:lnStyleLst>
-        <a:ln w="9525" cap="flat" cmpd="sng" algn="ctr">
+        <a:ln w="12700" cap="flat" cmpd="sng" algn="ctr">
           <a:solidFill>
-            <a:schemeClr val="phClr">
-              <a:shade val="95000"/>
-              <a:satMod val="105000"/>
-            </a:schemeClr>
+            <a:schemeClr val="phClr"/>
           </a:solidFill>
           <a:prstDash val="solid"/>
+          <a:miter lim="800000"/>
+        </a:ln>
+        <a:ln w="19050" cap="flat" cmpd="sng" algn="ctr">
+          <a:solidFill>
+            <a:schemeClr val="phClr"/>
+          </a:solidFill>
+          <a:prstDash val="solid"/>
+          <a:miter lim="800000"/>
         </a:ln>
         <a:ln w="25400" cap="flat" cmpd="sng" algn="ctr">
           <a:solidFill>
             <a:schemeClr val="phClr"/>
           </a:solidFill>
           <a:prstDash val="solid"/>
-        </a:ln>
-        <a:ln w="38100" cap="flat" cmpd="sng" algn="ctr">
-          <a:solidFill>
-            <a:schemeClr val="phClr"/>
-          </a:solidFill>
-          <a:prstDash val="solid"/>
+          <a:miter lim="800000"/>
         </a:ln>
       </a:lnStyleLst>
       <a:effectStyleLst>
         <a:effectStyle>
+          <a:effectLst/>
+        </a:effectStyle>
+        <a:effectStyle>
+          <a:effectLst/>
+        </a:effectStyle>
+        <a:effectStyle>
           <a:effectLst>
-            <a:outerShdw blurRad="40000" dist="20000" dir="5400000" rotWithShape="0">
+            <a:outerShdw blurRad="57150" dist="19050" dir="5400000" algn="ctr" rotWithShape="0">
               <a:srgbClr val="000000">
-                <a:alpha val="38000"/>
+                <a:alpha val="63000"/>
               </a:srgbClr>
             </a:outerShdw>
           </a:effectLst>
-        </a:effectStyle>
-        <a:effectStyle>
-          <a:effectLst>
-            <a:outerShdw blurRad="40000" dist="23000" dir="5400000" rotWithShape="0">
-              <a:srgbClr val="000000">
-                <a:alpha val="35000"/>
-              </a:srgbClr>
-            </a:outerShdw>
-          </a:effectLst>
-        </a:effectStyle>
-        <a:effectStyle>
-          <a:effectLst>
-            <a:outerShdw blurRad="40000" dist="23000" dir="5400000" rotWithShape="0">
-              <a:srgbClr val="000000">
-                <a:alpha val="35000"/>
-              </a:srgbClr>
-            </a:outerShdw>
-          </a:effectLst>
-          <a:scene3d>
-            <a:camera prst="orthographicFront">
-              <a:rot lat="0" lon="0" rev="0"/>
-            </a:camera>
-            <a:lightRig rig="threePt" dir="t">
-              <a:rot lat="0" lon="0" rev="1200000"/>
-            </a:lightRig>
-          </a:scene3d>
-          <a:sp3d>
-            <a:bevelT w="63500" h="25400"/>
-          </a:sp3d>
         </a:effectStyle>
       </a:effectStyleLst>
       <a:bgFillStyleLst>
         <a:solidFill>
           <a:schemeClr val="phClr"/>
         </a:solidFill>
+        <a:solidFill>
+          <a:schemeClr val="phClr">
+            <a:tint val="95000"/>
+            <a:satMod val="170000"/>
+          </a:schemeClr>
+        </a:solidFill>
         <a:gradFill rotWithShape="1">
           <a:gsLst>
             <a:gs pos="0">
               <a:schemeClr val="phClr">
-                <a:tint val="40000"/>
-                <a:satMod val="350000"/>
+                <a:tint val="93000"/>
+                <a:satMod val="150000"/>
+                <a:shade val="98000"/>
+                <a:lumMod val="102000"/>
               </a:schemeClr>
             </a:gs>
-            <a:gs pos="40000">
+            <a:gs pos="50000">
               <a:schemeClr val="phClr">
-                <a:tint val="45000"/>
-                <a:shade val="99000"/>
-                <a:satMod val="350000"/>
+                <a:tint val="98000"/>
+                <a:satMod val="130000"/>
+                <a:shade val="90000"/>
+                <a:lumMod val="103000"/>
               </a:schemeClr>
             </a:gs>
             <a:gs pos="100000">
               <a:schemeClr val="phClr">
-                <a:shade val="20000"/>
-                <a:satMod val="255000"/>
+                <a:shade val="63000"/>
+                <a:satMod val="120000"/>
               </a:schemeClr>
             </a:gs>
           </a:gsLst>
-          <a:path path="circle">
-            <a:fillToRect l="50000" t="-80000" r="50000" b="180000"/>
-          </a:path>
-        </a:gradFill>
-        <a:gradFill rotWithShape="1">
-          <a:gsLst>
-            <a:gs pos="0">
-              <a:schemeClr val="phClr">
-                <a:tint val="80000"/>
-                <a:satMod val="300000"/>
-              </a:schemeClr>
-            </a:gs>
-            <a:gs pos="100000">
-              <a:schemeClr val="phClr">
-                <a:shade val="30000"/>
-                <a:satMod val="200000"/>
-              </a:schemeClr>
-            </a:gs>
-          </a:gsLst>
-          <a:path path="circle">
-            <a:fillToRect l="50000" t="50000" r="50000" b="50000"/>
-          </a:path>
+          <a:lin ang="5400000" scaled="0"/>
         </a:gradFill>
       </a:bgFillStyleLst>
     </a:fmtScheme>
   </a:themeElements>
   <a:objectDefaults>
-    <a:spDef>
-      <a:spPr/>
-      <a:bodyPr/>
-      <a:lstStyle/>
-      <a:style>
-        <a:lnRef idx="1">
-          <a:schemeClr val="accent1"/>
-        </a:lnRef>
-        <a:fillRef idx="3">
-          <a:schemeClr val="accent1"/>
-        </a:fillRef>
-        <a:effectRef idx="2">
-          <a:schemeClr val="accent1"/>
-        </a:effectRef>
-        <a:fontRef idx="minor">
-          <a:schemeClr val="lt1"/>
-        </a:fontRef>
-      </a:style>
-    </a:spDef>
     <a:lnDef>
       <a:spPr/>
       <a:bodyPr/>
@@ -3392,5 +5403,32 @@
     </a:lnDef>
   </a:objectDefaults>
   <a:extraClrSchemeLst/>
+  <a:extLst>
+    <a:ext uri="{05A4C25C-085E-4340-85A3-A5531E510DB2}">
+      <thm15:themeFamily xmlns:thm15="http://schemas.microsoft.com/office/thememl/2012/main" name="template_ppt_cfsr_20260212.potx" id="{1C7DAFC1-A121-4F63-89FA-821DDE24630B}" vid="{C876BF6B-5B2D-4914-917A-4F41DF265706}"/>
+    </a:ext>
+  </a:extLst>
 </a:theme>
+</file>
+
+<file path=ppt/webextensions/taskpanes.xml><?xml version="1.0" encoding="utf-8"?>
+<wetp:taskpanes xmlns:wetp="http://schemas.microsoft.com/office/webextensions/taskpanes/2010/11">
+  <wetp:taskpane dockstate="right" visibility="0" width="438" row="5">
+    <wetp:webextensionref xmlns:r="http://schemas.openxmlformats.org/officeDocument/2006/relationships" r:id="rId1"/>
+  </wetp:taskpane>
+</wetp:taskpanes>
+</file>
+
+<file path=ppt/webextensions/webextension1.xml><?xml version="1.0" encoding="utf-8"?>
+<we:webextension xmlns:we="http://schemas.microsoft.com/office/webextensions/webextension/2010/11" id="{46417B78-7698-4D7F-B3F3-86F7BEF04A4C}">
+  <we:reference id="wa200010001" version="1.0.0.0" store="en-US" storeType="OMEX"/>
+  <we:alternateReferences>
+    <we:reference id="wa200010001" version="1.0.0.0" store="en-US" storeType="OMEX"/>
+  </we:alternateReferences>
+  <we:properties>
+    <we:property name="Office.AutoShowTaskpaneWithDocument" value="true"/>
+  </we:properties>
+  <we:bindings/>
+  <we:snapshot xmlns:r="http://schemas.openxmlformats.org/officeDocument/2006/relationships"/>
+</we:webextension>
 </file>